--- a/deliverables/pptx/惠民智导_答辩演示.pptx
+++ b/deliverables/pptx/惠民智导_答辩演示.pptx
@@ -2,27 +2,27 @@
 <file path=ppt/presentation.xml><?xml version="1.0" encoding="utf-8"?>
 <p:presentation xmlns:p="http://schemas.openxmlformats.org/presentationml/2006/main">
   <p:sldMasterIdLst>
-    <p:sldMasterId xmlns:r="http://schemas.openxmlformats.org/officeDocument/2006/relationships" id="2147483648" r:id="R04adc241c3f34c0d"/>
+    <p:sldMasterId xmlns:r="http://schemas.openxmlformats.org/officeDocument/2006/relationships" id="2147483648" r:id="Rc674b3eec3c549b3"/>
   </p:sldMasterIdLst>
   <p:notesMasterIdLst>
-    <p:notesMasterId xmlns:r="http://schemas.openxmlformats.org/officeDocument/2006/relationships" r:id="Ref406308a2594aa0"/>
+    <p:notesMasterId xmlns:r="http://schemas.openxmlformats.org/officeDocument/2006/relationships" r:id="R525f351cca0e4830"/>
   </p:notesMasterIdLst>
   <p:sldIdLst>
-    <p:sldId xmlns:r="http://schemas.openxmlformats.org/officeDocument/2006/relationships" id="256" r:id="Refed4894b1cc486a"/>
-    <p:sldId xmlns:r="http://schemas.openxmlformats.org/officeDocument/2006/relationships" id="257" r:id="R212b71f5e3454ed6"/>
-    <p:sldId xmlns:r="http://schemas.openxmlformats.org/officeDocument/2006/relationships" id="258" r:id="Rc610fa516b9c4b03"/>
-    <p:sldId xmlns:r="http://schemas.openxmlformats.org/officeDocument/2006/relationships" id="259" r:id="Rbc290e1cdbd54e11"/>
-    <p:sldId xmlns:r="http://schemas.openxmlformats.org/officeDocument/2006/relationships" id="260" r:id="R883843ef29474231"/>
-    <p:sldId xmlns:r="http://schemas.openxmlformats.org/officeDocument/2006/relationships" id="261" r:id="Ra10a47ad0bad4713"/>
-    <p:sldId xmlns:r="http://schemas.openxmlformats.org/officeDocument/2006/relationships" id="262" r:id="R7d9525b1972d400f"/>
-    <p:sldId xmlns:r="http://schemas.openxmlformats.org/officeDocument/2006/relationships" id="263" r:id="R369270d130f44889"/>
-    <p:sldId xmlns:r="http://schemas.openxmlformats.org/officeDocument/2006/relationships" id="264" r:id="R618a877c001e497c"/>
-    <p:sldId xmlns:r="http://schemas.openxmlformats.org/officeDocument/2006/relationships" id="265" r:id="Re397e28f6e2d4090"/>
-    <p:sldId xmlns:r="http://schemas.openxmlformats.org/officeDocument/2006/relationships" id="266" r:id="R5fa1ee739ca24039"/>
-    <p:sldId xmlns:r="http://schemas.openxmlformats.org/officeDocument/2006/relationships" id="267" r:id="R1de0f09782d6467c"/>
-    <p:sldId xmlns:r="http://schemas.openxmlformats.org/officeDocument/2006/relationships" id="268" r:id="Raee9118269344a22"/>
-    <p:sldId xmlns:r="http://schemas.openxmlformats.org/officeDocument/2006/relationships" id="269" r:id="Rfbd95addda3a4061"/>
-    <p:sldId xmlns:r="http://schemas.openxmlformats.org/officeDocument/2006/relationships" id="270" r:id="Rcb96e42342c240a6"/>
+    <p:sldId xmlns:r="http://schemas.openxmlformats.org/officeDocument/2006/relationships" id="256" r:id="Rba0a3d75983c4000"/>
+    <p:sldId xmlns:r="http://schemas.openxmlformats.org/officeDocument/2006/relationships" id="257" r:id="R9c9784090694479f"/>
+    <p:sldId xmlns:r="http://schemas.openxmlformats.org/officeDocument/2006/relationships" id="258" r:id="R84a7c4a67ad54bf6"/>
+    <p:sldId xmlns:r="http://schemas.openxmlformats.org/officeDocument/2006/relationships" id="259" r:id="R22e1ebfc718949d3"/>
+    <p:sldId xmlns:r="http://schemas.openxmlformats.org/officeDocument/2006/relationships" id="260" r:id="R547c22cdec49406f"/>
+    <p:sldId xmlns:r="http://schemas.openxmlformats.org/officeDocument/2006/relationships" id="261" r:id="R3c22db38abd14176"/>
+    <p:sldId xmlns:r="http://schemas.openxmlformats.org/officeDocument/2006/relationships" id="262" r:id="R931545f5419a42af"/>
+    <p:sldId xmlns:r="http://schemas.openxmlformats.org/officeDocument/2006/relationships" id="263" r:id="R11338176571646ca"/>
+    <p:sldId xmlns:r="http://schemas.openxmlformats.org/officeDocument/2006/relationships" id="264" r:id="R4ef1fe284ed04b7b"/>
+    <p:sldId xmlns:r="http://schemas.openxmlformats.org/officeDocument/2006/relationships" id="265" r:id="R147098bb6c3f4d72"/>
+    <p:sldId xmlns:r="http://schemas.openxmlformats.org/officeDocument/2006/relationships" id="266" r:id="R9d3d89b693b54598"/>
+    <p:sldId xmlns:r="http://schemas.openxmlformats.org/officeDocument/2006/relationships" id="267" r:id="R11057b600d20466a"/>
+    <p:sldId xmlns:r="http://schemas.openxmlformats.org/officeDocument/2006/relationships" id="268" r:id="R5ce7b296bfb34cc5"/>
+    <p:sldId xmlns:r="http://schemas.openxmlformats.org/officeDocument/2006/relationships" id="269" r:id="R54bb987f03ae4d75"/>
+    <p:sldId xmlns:r="http://schemas.openxmlformats.org/officeDocument/2006/relationships" id="270" r:id="R9631ed47efb04811"/>
   </p:sldIdLst>
   <p:sldSz cx="12192000" cy="6858000"/>
   <p:notesSz cx="6858000" cy="9144000"/>
@@ -806,7 +806,7 @@
           <a:lstStyle xmlns:a="http://schemas.openxmlformats.org/drawingml/2006/main"/>
           <a:p xmlns:a="http://schemas.openxmlformats.org/drawingml/2006/main">
             <a:r>
-              <a:t>这一页主动说明边界。模型实测已完成；真人试点、第三方干净机验收和团队视频仍必须由真实参与者完成。 </a:t>
+              <a:t>这一页主动说明边界。模型实测与演示视频已完成；真人试点、基层使用反馈和第三方干净机验收仍必须由真实参与者完成。 </a:t>
             </a:r>
           </a:p>
         </p:txBody>
@@ -1504,7 +1504,7 @@
   </p:cSld>
   <p:clrMap bg1="lt1" tx1="dk1" bg2="lt2" tx2="dk2" accent1="accent1" accent2="accent2" accent3="accent3" accent4="accent4" accent5="accent5" accent6="accent6" hlink="hlink" folHlink="folHlink"/>
   <p:sldLayoutIdLst>
-    <p:sldLayoutId xmlns:r="http://schemas.openxmlformats.org/officeDocument/2006/relationships" id="2147483649" r:id="Ra23042d800a14765"/>
+    <p:sldLayoutId xmlns:r="http://schemas.openxmlformats.org/officeDocument/2006/relationships" id="2147483649" r:id="R90058fc8518f4303"/>
   </p:sldLayoutIdLst>
   <p:txStyles>
     <p:titleStyle>
@@ -2213,7 +2213,7 @@
           <p:cNvPr id="12" name="">
             <a:extLst xmlns:a="http://schemas.openxmlformats.org/drawingml/2006/main">
               <a:ext uri="{FF2B5EF4-FFF2-40B4-BE49-F238E27FC236}">
-                <a16:creationId xmlns:a16="http://schemas.microsoft.com/office/drawing/2014/main" id="{18533869-F398-49FE-AACE-4C2939FA5B5A}"/>
+                <a16:creationId xmlns:a16="http://schemas.microsoft.com/office/drawing/2014/main" id="{4B3D060D-753B-4A10-9D59-3F02BD2B0FC9}"/>
               </a:ext>
             </a:extLst>
           </p:cNvPr>
@@ -2244,7 +2244,7 @@
           <p:cNvPr id="2" name="">
             <a:extLst xmlns:a="http://schemas.openxmlformats.org/drawingml/2006/main">
               <a:ext uri="{FF2B5EF4-FFF2-40B4-BE49-F238E27FC236}">
-                <a16:creationId xmlns:a16="http://schemas.microsoft.com/office/drawing/2014/main" id="{75395969-157D-49EB-B73A-69F75A3529DA}"/>
+                <a16:creationId xmlns:a16="http://schemas.microsoft.com/office/drawing/2014/main" id="{8C7DF093-CD27-41B0-B282-AE1D967DB684}"/>
               </a:ext>
             </a:extLst>
           </p:cNvPr>
@@ -2275,7 +2275,7 @@
           <p:cNvPr id="3" name="">
             <a:extLst xmlns:a="http://schemas.openxmlformats.org/drawingml/2006/main">
               <a:ext uri="{FF2B5EF4-FFF2-40B4-BE49-F238E27FC236}">
-                <a16:creationId xmlns:a16="http://schemas.microsoft.com/office/drawing/2014/main" id="{B98F4525-2F8C-4BB9-A5A4-71E9A0B7ED1B}"/>
+                <a16:creationId xmlns:a16="http://schemas.microsoft.com/office/drawing/2014/main" id="{F73E3A80-0819-4624-85F6-646686012B70}"/>
               </a:ext>
             </a:extLst>
           </p:cNvPr>
@@ -2306,7 +2306,7 @@
           <p:cNvPr id="4" name="">
             <a:extLst xmlns:a="http://schemas.openxmlformats.org/drawingml/2006/main">
               <a:ext uri="{FF2B5EF4-FFF2-40B4-BE49-F238E27FC236}">
-                <a16:creationId xmlns:a16="http://schemas.microsoft.com/office/drawing/2014/main" id="{45EC89E9-D14A-4250-BA69-AF37A25A9B65}"/>
+                <a16:creationId xmlns:a16="http://schemas.microsoft.com/office/drawing/2014/main" id="{197E2032-0889-4EBF-9179-6D3788E398D8}"/>
               </a:ext>
             </a:extLst>
           </p:cNvPr>
@@ -2364,7 +2364,7 @@
           <p:cNvPr id="5" name="">
             <a:extLst xmlns:a="http://schemas.openxmlformats.org/drawingml/2006/main">
               <a:ext uri="{FF2B5EF4-FFF2-40B4-BE49-F238E27FC236}">
-                <a16:creationId xmlns:a16="http://schemas.microsoft.com/office/drawing/2014/main" id="{9E121895-76E2-4AB4-9DED-11DE15AADA94}"/>
+                <a16:creationId xmlns:a16="http://schemas.microsoft.com/office/drawing/2014/main" id="{99859A87-B943-4954-94C3-229B6D65C718}"/>
               </a:ext>
             </a:extLst>
           </p:cNvPr>
@@ -2422,7 +2422,7 @@
           <p:cNvPr id="6" name="">
             <a:extLst xmlns:a="http://schemas.openxmlformats.org/drawingml/2006/main">
               <a:ext uri="{FF2B5EF4-FFF2-40B4-BE49-F238E27FC236}">
-                <a16:creationId xmlns:a16="http://schemas.microsoft.com/office/drawing/2014/main" id="{63F4DB39-4455-4A3D-8A29-AE630A4346D4}"/>
+                <a16:creationId xmlns:a16="http://schemas.microsoft.com/office/drawing/2014/main" id="{01B2CC12-A263-44D7-82A2-C2B9DC4C18C9}"/>
               </a:ext>
             </a:extLst>
           </p:cNvPr>
@@ -2480,7 +2480,7 @@
           <p:cNvPr id="7" name="">
             <a:extLst xmlns:a="http://schemas.openxmlformats.org/drawingml/2006/main">
               <a:ext uri="{FF2B5EF4-FFF2-40B4-BE49-F238E27FC236}">
-                <a16:creationId xmlns:a16="http://schemas.microsoft.com/office/drawing/2014/main" id="{DB43017F-E71B-45D8-A854-B9BAA064AE7C}"/>
+                <a16:creationId xmlns:a16="http://schemas.microsoft.com/office/drawing/2014/main" id="{C05264E8-EC55-4108-B97D-08796794B743}"/>
               </a:ext>
             </a:extLst>
           </p:cNvPr>
@@ -2542,7 +2542,7 @@
           <p:cNvPr id="8" name="">
             <a:extLst xmlns:a="http://schemas.openxmlformats.org/drawingml/2006/main">
               <a:ext uri="{FF2B5EF4-FFF2-40B4-BE49-F238E27FC236}">
-                <a16:creationId xmlns:a16="http://schemas.microsoft.com/office/drawing/2014/main" id="{CBFF73D3-9A90-4930-B7E5-D0ECC0C491E3}"/>
+                <a16:creationId xmlns:a16="http://schemas.microsoft.com/office/drawing/2014/main" id="{DC83A48F-2CD3-42A0-8FBC-A6CE074E4278}"/>
               </a:ext>
             </a:extLst>
           </p:cNvPr>
@@ -2604,7 +2604,7 @@
           <p:cNvPr id="9" name="">
             <a:extLst xmlns:a="http://schemas.openxmlformats.org/drawingml/2006/main">
               <a:ext uri="{FF2B5EF4-FFF2-40B4-BE49-F238E27FC236}">
-                <a16:creationId xmlns:a16="http://schemas.microsoft.com/office/drawing/2014/main" id="{D8A97DA4-EE6E-41AA-B278-2759F0DDA080}"/>
+                <a16:creationId xmlns:a16="http://schemas.microsoft.com/office/drawing/2014/main" id="{6CB8C52A-F17D-47CA-8E02-1CC1E53DE262}"/>
               </a:ext>
             </a:extLst>
           </p:cNvPr>
@@ -2652,7 +2652,7 @@
                 <a:ea typeface="Arial"/>
                 <a:cs typeface="Arial"/>
               </a:rPr>
-              <a:t>策马奔腾  ·  广州软件学院  ·  V0.7.1</a:t>
+              <a:t>策马奔腾  ·  V1.0.0</a:t>
             </a:r>
           </a:p>
         </p:txBody>
@@ -2662,7 +2662,7 @@
           <p:cNvPr id="10" name="">
             <a:extLst xmlns:a="http://schemas.openxmlformats.org/drawingml/2006/main">
               <a:ext uri="{FF2B5EF4-FFF2-40B4-BE49-F238E27FC236}">
-                <a16:creationId xmlns:a16="http://schemas.microsoft.com/office/drawing/2014/main" id="{B003CB44-5679-425A-AE43-DEDD36A19EC3}"/>
+                <a16:creationId xmlns:a16="http://schemas.microsoft.com/office/drawing/2014/main" id="{AC1F2707-2A3A-429C-9B86-6B402A506C76}"/>
               </a:ext>
             </a:extLst>
           </p:cNvPr>
@@ -2710,7 +2710,7 @@
                 <a:ea typeface="Arial"/>
                 <a:cs typeface="Arial"/>
               </a:rPr>
-              <a:t>队长 林琪东    队员 罗晓蓝    RTX 4060 单机本地运行</a:t>
+              <a:t>RTX 4060 单机本地运行  ·  数据与边界可追溯</a:t>
             </a:r>
           </a:p>
         </p:txBody>
@@ -2720,7 +2720,7 @@
           <p:cNvPr id="11" name="">
             <a:extLst xmlns:a="http://schemas.openxmlformats.org/drawingml/2006/main">
               <a:ext uri="{FF2B5EF4-FFF2-40B4-BE49-F238E27FC236}">
-                <a16:creationId xmlns:a16="http://schemas.microsoft.com/office/drawing/2014/main" id="{036B57DB-D0AD-4997-B38D-43D950A42D5C}"/>
+                <a16:creationId xmlns:a16="http://schemas.microsoft.com/office/drawing/2014/main" id="{EC4AD8E6-5005-41B1-A0B4-98D65E57B634}"/>
               </a:ext>
             </a:extLst>
           </p:cNvPr>
@@ -2776,7 +2776,7 @@
     </p:spTree>
     <p:extLst>
       <p:ext uri="{BB962C8B-B14F-4D97-AF65-F5344CB8AC3E}">
-        <p14:creationId xmlns:p14="http://schemas.microsoft.com/office/powerpoint/2010/main" val="18435927"/>
+        <p14:creationId xmlns:p14="http://schemas.microsoft.com/office/powerpoint/2010/main" val="966060429"/>
       </p:ext>
     </p:extLst>
   </p:cSld>
@@ -2807,7 +2807,7 @@
           <p:cNvPr id="27" name="">
             <a:extLst xmlns:a="http://schemas.openxmlformats.org/drawingml/2006/main">
               <a:ext uri="{FF2B5EF4-FFF2-40B4-BE49-F238E27FC236}">
-                <a16:creationId xmlns:a16="http://schemas.microsoft.com/office/drawing/2014/main" id="{D5086852-EC17-408F-A29F-21FE598C038D}"/>
+                <a16:creationId xmlns:a16="http://schemas.microsoft.com/office/drawing/2014/main" id="{D6775D3C-5A03-41C8-9855-A837814FF5DF}"/>
               </a:ext>
             </a:extLst>
           </p:cNvPr>
@@ -2838,7 +2838,7 @@
           <p:cNvPr id="2" name="">
             <a:extLst xmlns:a="http://schemas.openxmlformats.org/drawingml/2006/main">
               <a:ext uri="{FF2B5EF4-FFF2-40B4-BE49-F238E27FC236}">
-                <a16:creationId xmlns:a16="http://schemas.microsoft.com/office/drawing/2014/main" id="{8AB59492-13F7-43BB-9E5E-A1686414452B}"/>
+                <a16:creationId xmlns:a16="http://schemas.microsoft.com/office/drawing/2014/main" id="{FBDB339E-5320-4B70-9AEB-43BAE66EAD00}"/>
               </a:ext>
             </a:extLst>
           </p:cNvPr>
@@ -2896,7 +2896,7 @@
           <p:cNvPr id="3" name="">
             <a:extLst xmlns:a="http://schemas.openxmlformats.org/drawingml/2006/main">
               <a:ext uri="{FF2B5EF4-FFF2-40B4-BE49-F238E27FC236}">
-                <a16:creationId xmlns:a16="http://schemas.microsoft.com/office/drawing/2014/main" id="{29B06186-7BD5-485D-96A6-450FCD09B295}"/>
+                <a16:creationId xmlns:a16="http://schemas.microsoft.com/office/drawing/2014/main" id="{C9C75EA3-7301-466A-A1E0-F087CD0512EE}"/>
               </a:ext>
             </a:extLst>
           </p:cNvPr>
@@ -2954,7 +2954,7 @@
           <p:cNvPr id="4" name="">
             <a:extLst xmlns:a="http://schemas.openxmlformats.org/drawingml/2006/main">
               <a:ext uri="{FF2B5EF4-FFF2-40B4-BE49-F238E27FC236}">
-                <a16:creationId xmlns:a16="http://schemas.microsoft.com/office/drawing/2014/main" id="{C94DE7E8-714C-4268-A0D3-BABD9BC3A61F}"/>
+                <a16:creationId xmlns:a16="http://schemas.microsoft.com/office/drawing/2014/main" id="{5E99E250-157D-484B-BC8A-7814FD4772C6}"/>
               </a:ext>
             </a:extLst>
           </p:cNvPr>
@@ -2985,7 +2985,7 @@
           <p:cNvPr id="5" name="">
             <a:extLst xmlns:a="http://schemas.openxmlformats.org/drawingml/2006/main">
               <a:ext uri="{FF2B5EF4-FFF2-40B4-BE49-F238E27FC236}">
-                <a16:creationId xmlns:a16="http://schemas.microsoft.com/office/drawing/2014/main" id="{DA5AADEB-90CB-4508-BDFD-C3611902EF90}"/>
+                <a16:creationId xmlns:a16="http://schemas.microsoft.com/office/drawing/2014/main" id="{3A2B53EB-3726-40A1-A230-52D188623DB4}"/>
               </a:ext>
             </a:extLst>
           </p:cNvPr>
@@ -3043,7 +3043,7 @@
           <p:cNvPr id="6" name="">
             <a:extLst xmlns:a="http://schemas.openxmlformats.org/drawingml/2006/main">
               <a:ext uri="{FF2B5EF4-FFF2-40B4-BE49-F238E27FC236}">
-                <a16:creationId xmlns:a16="http://schemas.microsoft.com/office/drawing/2014/main" id="{9F252552-F1C0-45A4-A965-1F7B35ED123C}"/>
+                <a16:creationId xmlns:a16="http://schemas.microsoft.com/office/drawing/2014/main" id="{8EBF0A2C-5D5D-4BFA-8D7D-12711C3E9762}"/>
               </a:ext>
             </a:extLst>
           </p:cNvPr>
@@ -3101,7 +3101,7 @@
           <p:cNvPr id="7" name="">
             <a:extLst xmlns:a="http://schemas.openxmlformats.org/drawingml/2006/main">
               <a:ext uri="{FF2B5EF4-FFF2-40B4-BE49-F238E27FC236}">
-                <a16:creationId xmlns:a16="http://schemas.microsoft.com/office/drawing/2014/main" id="{1E5CF9D8-89E0-469C-A796-E6EB8D97B4BC}"/>
+                <a16:creationId xmlns:a16="http://schemas.microsoft.com/office/drawing/2014/main" id="{01E59946-FB36-4BD4-B06D-EA4F2206145D}"/>
               </a:ext>
             </a:extLst>
           </p:cNvPr>
@@ -3166,7 +3166,7 @@
         </p:xfrm>
         <a:graphic xmlns:a="http://schemas.openxmlformats.org/drawingml/2006/main">
           <a:graphicData uri="http://schemas.openxmlformats.org/drawingml/2006/chart">
-            <c:chart xmlns:r="http://schemas.openxmlformats.org/officeDocument/2006/relationships" xmlns:c="http://schemas.openxmlformats.org/drawingml/2006/chart" r:id="R8feed6a7d5f74c97"/>
+            <c:chart xmlns:r="http://schemas.openxmlformats.org/officeDocument/2006/relationships" xmlns:c="http://schemas.openxmlformats.org/drawingml/2006/chart" r:id="R4b18f627d13c4352"/>
           </a:graphicData>
         </a:graphic>
       </p:graphicFrame>
@@ -3175,7 +3175,7 @@
           <p:cNvPr id="9" name="">
             <a:extLst xmlns:a="http://schemas.openxmlformats.org/drawingml/2006/main">
               <a:ext uri="{FF2B5EF4-FFF2-40B4-BE49-F238E27FC236}">
-                <a16:creationId xmlns:a16="http://schemas.microsoft.com/office/drawing/2014/main" id="{ADC039A8-8593-4F74-BC32-DA6E2F76E200}"/>
+                <a16:creationId xmlns:a16="http://schemas.microsoft.com/office/drawing/2014/main" id="{6CD25F1C-E8BB-4D6D-AF94-223AB15ACD23}"/>
               </a:ext>
             </a:extLst>
           </p:cNvPr>
@@ -3233,7 +3233,7 @@
           <p:cNvPr id="10" name="">
             <a:extLst xmlns:a="http://schemas.openxmlformats.org/drawingml/2006/main">
               <a:ext uri="{FF2B5EF4-FFF2-40B4-BE49-F238E27FC236}">
-                <a16:creationId xmlns:a16="http://schemas.microsoft.com/office/drawing/2014/main" id="{4CC02580-87D1-4320-B1C1-DCDB2A9A6407}"/>
+                <a16:creationId xmlns:a16="http://schemas.microsoft.com/office/drawing/2014/main" id="{6125782F-2D8C-443F-96E1-BBE65C9455DD}"/>
               </a:ext>
             </a:extLst>
           </p:cNvPr>
@@ -3268,7 +3268,7 @@
           <p:cNvPr id="11" name="">
             <a:extLst xmlns:a="http://schemas.openxmlformats.org/drawingml/2006/main">
               <a:ext uri="{FF2B5EF4-FFF2-40B4-BE49-F238E27FC236}">
-                <a16:creationId xmlns:a16="http://schemas.microsoft.com/office/drawing/2014/main" id="{EA6AF260-399F-4903-A461-1437B812EFB6}"/>
+                <a16:creationId xmlns:a16="http://schemas.microsoft.com/office/drawing/2014/main" id="{A1FF7CF8-6E8A-400B-A05E-AE41E5CD39E8}"/>
               </a:ext>
             </a:extLst>
           </p:cNvPr>
@@ -3326,7 +3326,7 @@
           <p:cNvPr id="12" name="">
             <a:extLst xmlns:a="http://schemas.openxmlformats.org/drawingml/2006/main">
               <a:ext uri="{FF2B5EF4-FFF2-40B4-BE49-F238E27FC236}">
-                <a16:creationId xmlns:a16="http://schemas.microsoft.com/office/drawing/2014/main" id="{62150505-D259-48E9-B7CA-6CB523904A26}"/>
+                <a16:creationId xmlns:a16="http://schemas.microsoft.com/office/drawing/2014/main" id="{08FFAE0F-694E-41B1-BDAD-8F01FBFE828E}"/>
               </a:ext>
             </a:extLst>
           </p:cNvPr>
@@ -3384,7 +3384,7 @@
           <p:cNvPr id="13" name="">
             <a:extLst xmlns:a="http://schemas.openxmlformats.org/drawingml/2006/main">
               <a:ext uri="{FF2B5EF4-FFF2-40B4-BE49-F238E27FC236}">
-                <a16:creationId xmlns:a16="http://schemas.microsoft.com/office/drawing/2014/main" id="{1D15D249-89D9-4241-9356-29D8BAFB756A}"/>
+                <a16:creationId xmlns:a16="http://schemas.microsoft.com/office/drawing/2014/main" id="{89A73255-BCFA-47B0-905F-BE8D9608DBE9}"/>
               </a:ext>
             </a:extLst>
           </p:cNvPr>
@@ -3442,7 +3442,7 @@
           <p:cNvPr id="14" name="">
             <a:extLst xmlns:a="http://schemas.openxmlformats.org/drawingml/2006/main">
               <a:ext uri="{FF2B5EF4-FFF2-40B4-BE49-F238E27FC236}">
-                <a16:creationId xmlns:a16="http://schemas.microsoft.com/office/drawing/2014/main" id="{54187CA0-2652-42E3-9192-DE3194C1F985}"/>
+                <a16:creationId xmlns:a16="http://schemas.microsoft.com/office/drawing/2014/main" id="{22817D5A-6320-4A09-9E80-F41878FFC070}"/>
               </a:ext>
             </a:extLst>
           </p:cNvPr>
@@ -3477,7 +3477,7 @@
           <p:cNvPr id="15" name="">
             <a:extLst xmlns:a="http://schemas.openxmlformats.org/drawingml/2006/main">
               <a:ext uri="{FF2B5EF4-FFF2-40B4-BE49-F238E27FC236}">
-                <a16:creationId xmlns:a16="http://schemas.microsoft.com/office/drawing/2014/main" id="{1013EC3C-838B-4A39-AB51-1696541B943B}"/>
+                <a16:creationId xmlns:a16="http://schemas.microsoft.com/office/drawing/2014/main" id="{0DE36F16-8A05-4CA6-9C90-BF6A4DE2BD95}"/>
               </a:ext>
             </a:extLst>
           </p:cNvPr>
@@ -3535,7 +3535,7 @@
           <p:cNvPr id="16" name="">
             <a:extLst xmlns:a="http://schemas.openxmlformats.org/drawingml/2006/main">
               <a:ext uri="{FF2B5EF4-FFF2-40B4-BE49-F238E27FC236}">
-                <a16:creationId xmlns:a16="http://schemas.microsoft.com/office/drawing/2014/main" id="{E65D3676-9F5C-4CCA-B111-C97BB3025366}"/>
+                <a16:creationId xmlns:a16="http://schemas.microsoft.com/office/drawing/2014/main" id="{C550C76B-1B6D-48CC-A85C-05008F993170}"/>
               </a:ext>
             </a:extLst>
           </p:cNvPr>
@@ -3593,7 +3593,7 @@
           <p:cNvPr id="17" name="">
             <a:extLst xmlns:a="http://schemas.openxmlformats.org/drawingml/2006/main">
               <a:ext uri="{FF2B5EF4-FFF2-40B4-BE49-F238E27FC236}">
-                <a16:creationId xmlns:a16="http://schemas.microsoft.com/office/drawing/2014/main" id="{D4455233-AFDC-4D36-9C36-FB1027697D0A}"/>
+                <a16:creationId xmlns:a16="http://schemas.microsoft.com/office/drawing/2014/main" id="{80253254-F38F-4EF0-9DCB-6033B8B2E21B}"/>
               </a:ext>
             </a:extLst>
           </p:cNvPr>
@@ -3651,7 +3651,7 @@
           <p:cNvPr id="18" name="">
             <a:extLst xmlns:a="http://schemas.openxmlformats.org/drawingml/2006/main">
               <a:ext uri="{FF2B5EF4-FFF2-40B4-BE49-F238E27FC236}">
-                <a16:creationId xmlns:a16="http://schemas.microsoft.com/office/drawing/2014/main" id="{010733D6-446E-4D83-ACB4-ECE2CE522F02}"/>
+                <a16:creationId xmlns:a16="http://schemas.microsoft.com/office/drawing/2014/main" id="{6F348967-F7C2-4E2F-A7F5-2CD221669CF4}"/>
               </a:ext>
             </a:extLst>
           </p:cNvPr>
@@ -3686,7 +3686,7 @@
           <p:cNvPr id="19" name="">
             <a:extLst xmlns:a="http://schemas.openxmlformats.org/drawingml/2006/main">
               <a:ext uri="{FF2B5EF4-FFF2-40B4-BE49-F238E27FC236}">
-                <a16:creationId xmlns:a16="http://schemas.microsoft.com/office/drawing/2014/main" id="{AC9A53CC-7719-44B1-AB42-72B76A25F0DE}"/>
+                <a16:creationId xmlns:a16="http://schemas.microsoft.com/office/drawing/2014/main" id="{CDF7DC14-AA6C-449F-9DC6-F7B9E8262D8D}"/>
               </a:ext>
             </a:extLst>
           </p:cNvPr>
@@ -3744,7 +3744,7 @@
           <p:cNvPr id="20" name="">
             <a:extLst xmlns:a="http://schemas.openxmlformats.org/drawingml/2006/main">
               <a:ext uri="{FF2B5EF4-FFF2-40B4-BE49-F238E27FC236}">
-                <a16:creationId xmlns:a16="http://schemas.microsoft.com/office/drawing/2014/main" id="{54F1307B-7C75-466F-845D-A1F914B3B696}"/>
+                <a16:creationId xmlns:a16="http://schemas.microsoft.com/office/drawing/2014/main" id="{14DB5D9A-E574-4B20-B3B2-1740B8359530}"/>
               </a:ext>
             </a:extLst>
           </p:cNvPr>
@@ -3792,7 +3792,7 @@
                 <a:ea typeface="Arial"/>
                 <a:cs typeface="Arial"/>
               </a:rPr>
-              <a:t>439.8 ms</a:t>
+              <a:t>883.5 ms</a:t>
             </a:r>
           </a:p>
         </p:txBody>
@@ -3802,7 +3802,7 @@
           <p:cNvPr id="21" name="">
             <a:extLst xmlns:a="http://schemas.openxmlformats.org/drawingml/2006/main">
               <a:ext uri="{FF2B5EF4-FFF2-40B4-BE49-F238E27FC236}">
-                <a16:creationId xmlns:a16="http://schemas.microsoft.com/office/drawing/2014/main" id="{BD8797D1-B2B5-4AC8-B9CE-34811AFC3013}"/>
+                <a16:creationId xmlns:a16="http://schemas.microsoft.com/office/drawing/2014/main" id="{3975940F-183E-4083-AF72-C48DBB26A2A0}"/>
               </a:ext>
             </a:extLst>
           </p:cNvPr>
@@ -3860,7 +3860,7 @@
           <p:cNvPr id="22" name="">
             <a:extLst xmlns:a="http://schemas.openxmlformats.org/drawingml/2006/main">
               <a:ext uri="{FF2B5EF4-FFF2-40B4-BE49-F238E27FC236}">
-                <a16:creationId xmlns:a16="http://schemas.microsoft.com/office/drawing/2014/main" id="{251CA92E-0E94-4A50-9919-332AECFF19A5}"/>
+                <a16:creationId xmlns:a16="http://schemas.microsoft.com/office/drawing/2014/main" id="{42AEF073-71AD-4A10-B91D-17AD3EC7BB1A}"/>
               </a:ext>
             </a:extLst>
           </p:cNvPr>
@@ -3895,7 +3895,7 @@
           <p:cNvPr id="23" name="">
             <a:extLst xmlns:a="http://schemas.openxmlformats.org/drawingml/2006/main">
               <a:ext uri="{FF2B5EF4-FFF2-40B4-BE49-F238E27FC236}">
-                <a16:creationId xmlns:a16="http://schemas.microsoft.com/office/drawing/2014/main" id="{EAADADF4-E1F7-4748-99E5-4E1616D0359A}"/>
+                <a16:creationId xmlns:a16="http://schemas.microsoft.com/office/drawing/2014/main" id="{D62D9196-DA05-4053-AF13-404B72156386}"/>
               </a:ext>
             </a:extLst>
           </p:cNvPr>
@@ -3953,7 +3953,7 @@
           <p:cNvPr id="24" name="">
             <a:extLst xmlns:a="http://schemas.openxmlformats.org/drawingml/2006/main">
               <a:ext uri="{FF2B5EF4-FFF2-40B4-BE49-F238E27FC236}">
-                <a16:creationId xmlns:a16="http://schemas.microsoft.com/office/drawing/2014/main" id="{0E20CC47-F8AD-4876-BDD0-6F14FC3C5945}"/>
+                <a16:creationId xmlns:a16="http://schemas.microsoft.com/office/drawing/2014/main" id="{D7EC7DC7-2F4E-40B8-9E70-02B1E94A6C6F}"/>
               </a:ext>
             </a:extLst>
           </p:cNvPr>
@@ -4001,7 +4001,7 @@
                 <a:ea typeface="Arial"/>
                 <a:cs typeface="Arial"/>
               </a:rPr>
-              <a:t>64 项</a:t>
+              <a:t>66 项</a:t>
             </a:r>
           </a:p>
         </p:txBody>
@@ -4011,7 +4011,7 @@
           <p:cNvPr id="25" name="">
             <a:extLst xmlns:a="http://schemas.openxmlformats.org/drawingml/2006/main">
               <a:ext uri="{FF2B5EF4-FFF2-40B4-BE49-F238E27FC236}">
-                <a16:creationId xmlns:a16="http://schemas.microsoft.com/office/drawing/2014/main" id="{B1B41192-F6D5-4649-9C3D-1AA0D49BC619}"/>
+                <a16:creationId xmlns:a16="http://schemas.microsoft.com/office/drawing/2014/main" id="{37C006C0-4CAB-4147-9EA4-CF98E867729B}"/>
               </a:ext>
             </a:extLst>
           </p:cNvPr>
@@ -4069,7 +4069,7 @@
           <p:cNvPr id="26" name="">
             <a:extLst xmlns:a="http://schemas.openxmlformats.org/drawingml/2006/main">
               <a:ext uri="{FF2B5EF4-FFF2-40B4-BE49-F238E27FC236}">
-                <a16:creationId xmlns:a16="http://schemas.microsoft.com/office/drawing/2014/main" id="{F886D672-2C75-42DC-8CD9-FFD0208411BA}"/>
+                <a16:creationId xmlns:a16="http://schemas.microsoft.com/office/drawing/2014/main" id="{0C765602-6235-41CF-A6AC-1040937E498B}"/>
               </a:ext>
             </a:extLst>
           </p:cNvPr>
@@ -4121,7 +4121,7 @@
                 <a:ea typeface="Arial"/>
                 <a:cs typeface="Arial"/>
               </a:rPr>
-              <a:t>Qwen3画像 F1 1.000 · P95 2.592 s</a:t>
+              <a:t>Qwen3画像 F1 1.000 · P95 4.850 s</a:t>
             </a:r>
           </a:p>
           <a:p xmlns:a="http://schemas.openxmlformats.org/drawingml/2006/main">
@@ -4144,7 +4144,7 @@
                 <a:ea typeface="Arial"/>
                 <a:cs typeface="Arial"/>
               </a:rPr>
-              <a:t>混合检索 P95 430 ms · 12/12真实路由</a:t>
+              <a:t>混合检索 P95 898 ms · 12/12真实路由</a:t>
             </a:r>
           </a:p>
         </p:txBody>
@@ -4152,7 +4152,7 @@
     </p:spTree>
     <p:extLst>
       <p:ext uri="{BB962C8B-B14F-4D97-AF65-F5344CB8AC3E}">
-        <p14:creationId xmlns:p14="http://schemas.microsoft.com/office/powerpoint/2010/main" val="581294452"/>
+        <p14:creationId xmlns:p14="http://schemas.microsoft.com/office/powerpoint/2010/main" val="1233667578"/>
       </p:ext>
     </p:extLst>
   </p:cSld>
@@ -4183,7 +4183,7 @@
           <p:cNvPr id="34" name="">
             <a:extLst xmlns:a="http://schemas.openxmlformats.org/drawingml/2006/main">
               <a:ext uri="{FF2B5EF4-FFF2-40B4-BE49-F238E27FC236}">
-                <a16:creationId xmlns:a16="http://schemas.microsoft.com/office/drawing/2014/main" id="{B31DBD18-AA38-4117-983E-42085A83EBD9}"/>
+                <a16:creationId xmlns:a16="http://schemas.microsoft.com/office/drawing/2014/main" id="{43D0F05B-3FB3-4D7B-899E-B299D72F8AF0}"/>
               </a:ext>
             </a:extLst>
           </p:cNvPr>
@@ -4214,7 +4214,7 @@
           <p:cNvPr id="2" name="">
             <a:extLst xmlns:a="http://schemas.openxmlformats.org/drawingml/2006/main">
               <a:ext uri="{FF2B5EF4-FFF2-40B4-BE49-F238E27FC236}">
-                <a16:creationId xmlns:a16="http://schemas.microsoft.com/office/drawing/2014/main" id="{65F39AD9-5F23-4244-B034-3E7442513708}"/>
+                <a16:creationId xmlns:a16="http://schemas.microsoft.com/office/drawing/2014/main" id="{31DD0C77-3C80-42E8-8C12-849E9AB72B33}"/>
               </a:ext>
             </a:extLst>
           </p:cNvPr>
@@ -4272,7 +4272,7 @@
           <p:cNvPr id="3" name="">
             <a:extLst xmlns:a="http://schemas.openxmlformats.org/drawingml/2006/main">
               <a:ext uri="{FF2B5EF4-FFF2-40B4-BE49-F238E27FC236}">
-                <a16:creationId xmlns:a16="http://schemas.microsoft.com/office/drawing/2014/main" id="{CEFE1796-FC02-4A1C-9B8E-BE6388CFD598}"/>
+                <a16:creationId xmlns:a16="http://schemas.microsoft.com/office/drawing/2014/main" id="{93403F71-D737-4526-9147-498C63A17199}"/>
               </a:ext>
             </a:extLst>
           </p:cNvPr>
@@ -4330,7 +4330,7 @@
           <p:cNvPr id="4" name="">
             <a:extLst xmlns:a="http://schemas.openxmlformats.org/drawingml/2006/main">
               <a:ext uri="{FF2B5EF4-FFF2-40B4-BE49-F238E27FC236}">
-                <a16:creationId xmlns:a16="http://schemas.microsoft.com/office/drawing/2014/main" id="{A6F554BA-9EEF-4BAF-8614-F4E74F2F3BF8}"/>
+                <a16:creationId xmlns:a16="http://schemas.microsoft.com/office/drawing/2014/main" id="{F76DA1F3-4E57-46E7-A3F2-8D7BEB7274BE}"/>
               </a:ext>
             </a:extLst>
           </p:cNvPr>
@@ -4361,7 +4361,7 @@
           <p:cNvPr id="5" name="">
             <a:extLst xmlns:a="http://schemas.openxmlformats.org/drawingml/2006/main">
               <a:ext uri="{FF2B5EF4-FFF2-40B4-BE49-F238E27FC236}">
-                <a16:creationId xmlns:a16="http://schemas.microsoft.com/office/drawing/2014/main" id="{792F8E37-2DE9-4D04-B0C1-E687904C4C9D}"/>
+                <a16:creationId xmlns:a16="http://schemas.microsoft.com/office/drawing/2014/main" id="{E4691228-B032-4C48-B041-C5B988AD3088}"/>
               </a:ext>
             </a:extLst>
           </p:cNvPr>
@@ -4419,7 +4419,7 @@
           <p:cNvPr id="6" name="">
             <a:extLst xmlns:a="http://schemas.openxmlformats.org/drawingml/2006/main">
               <a:ext uri="{FF2B5EF4-FFF2-40B4-BE49-F238E27FC236}">
-                <a16:creationId xmlns:a16="http://schemas.microsoft.com/office/drawing/2014/main" id="{1AD40A4B-B2B9-4C07-9CF4-F9EE8D3A73A5}"/>
+                <a16:creationId xmlns:a16="http://schemas.microsoft.com/office/drawing/2014/main" id="{FDDC6A5F-E5B2-4B19-A928-15EF9AC8BAEB}"/>
               </a:ext>
             </a:extLst>
           </p:cNvPr>
@@ -4477,7 +4477,7 @@
           <p:cNvPr id="7" name="">
             <a:extLst xmlns:a="http://schemas.openxmlformats.org/drawingml/2006/main">
               <a:ext uri="{FF2B5EF4-FFF2-40B4-BE49-F238E27FC236}">
-                <a16:creationId xmlns:a16="http://schemas.microsoft.com/office/drawing/2014/main" id="{92682A96-E4ED-4013-B12D-4729090B2D22}"/>
+                <a16:creationId xmlns:a16="http://schemas.microsoft.com/office/drawing/2014/main" id="{2A1756A5-AEB7-4D39-A526-345D2A9552D6}"/>
               </a:ext>
             </a:extLst>
           </p:cNvPr>
@@ -4535,7 +4535,7 @@
           <p:cNvPr id="8" name="">
             <a:extLst xmlns:a="http://schemas.openxmlformats.org/drawingml/2006/main">
               <a:ext uri="{FF2B5EF4-FFF2-40B4-BE49-F238E27FC236}">
-                <a16:creationId xmlns:a16="http://schemas.microsoft.com/office/drawing/2014/main" id="{D46FD516-5D2E-4B22-8530-A2EC86AA30BB}"/>
+                <a16:creationId xmlns:a16="http://schemas.microsoft.com/office/drawing/2014/main" id="{1991FAA2-3CE5-491F-873C-EEDBF2AF6EB0}"/>
               </a:ext>
             </a:extLst>
           </p:cNvPr>
@@ -4570,7 +4570,7 @@
           <p:cNvPr id="9" name="">
             <a:extLst xmlns:a="http://schemas.openxmlformats.org/drawingml/2006/main">
               <a:ext uri="{FF2B5EF4-FFF2-40B4-BE49-F238E27FC236}">
-                <a16:creationId xmlns:a16="http://schemas.microsoft.com/office/drawing/2014/main" id="{912EBD9F-A946-46E3-BC13-97B9648C7188}"/>
+                <a16:creationId xmlns:a16="http://schemas.microsoft.com/office/drawing/2014/main" id="{782D35CD-79C5-4CED-9D57-5900D5D9F2B5}"/>
               </a:ext>
             </a:extLst>
           </p:cNvPr>
@@ -4601,7 +4601,7 @@
           <p:cNvPr id="10" name="">
             <a:extLst xmlns:a="http://schemas.openxmlformats.org/drawingml/2006/main">
               <a:ext uri="{FF2B5EF4-FFF2-40B4-BE49-F238E27FC236}">
-                <a16:creationId xmlns:a16="http://schemas.microsoft.com/office/drawing/2014/main" id="{AACF1435-A3C0-438D-8D81-8CC6A94FC78A}"/>
+                <a16:creationId xmlns:a16="http://schemas.microsoft.com/office/drawing/2014/main" id="{80B84161-A6CD-4F8D-9411-C871F65C2F3B}"/>
               </a:ext>
             </a:extLst>
           </p:cNvPr>
@@ -4659,7 +4659,7 @@
           <p:cNvPr id="11" name="">
             <a:extLst xmlns:a="http://schemas.openxmlformats.org/drawingml/2006/main">
               <a:ext uri="{FF2B5EF4-FFF2-40B4-BE49-F238E27FC236}">
-                <a16:creationId xmlns:a16="http://schemas.microsoft.com/office/drawing/2014/main" id="{E8465FA3-F703-4CDC-8348-982BFEE570A4}"/>
+                <a16:creationId xmlns:a16="http://schemas.microsoft.com/office/drawing/2014/main" id="{167517EE-0A26-48D4-86BF-F41734687639}"/>
               </a:ext>
             </a:extLst>
           </p:cNvPr>
@@ -4717,7 +4717,7 @@
           <p:cNvPr id="12" name="">
             <a:extLst xmlns:a="http://schemas.openxmlformats.org/drawingml/2006/main">
               <a:ext uri="{FF2B5EF4-FFF2-40B4-BE49-F238E27FC236}">
-                <a16:creationId xmlns:a16="http://schemas.microsoft.com/office/drawing/2014/main" id="{3FBBB3E8-4BBB-4A59-9F98-BC50F3999A43}"/>
+                <a16:creationId xmlns:a16="http://schemas.microsoft.com/office/drawing/2014/main" id="{092FC953-22E9-470F-9EDE-982CADA186EE}"/>
               </a:ext>
             </a:extLst>
           </p:cNvPr>
@@ -4775,7 +4775,7 @@
           <p:cNvPr id="13" name="">
             <a:extLst xmlns:a="http://schemas.openxmlformats.org/drawingml/2006/main">
               <a:ext uri="{FF2B5EF4-FFF2-40B4-BE49-F238E27FC236}">
-                <a16:creationId xmlns:a16="http://schemas.microsoft.com/office/drawing/2014/main" id="{77C0DB0A-8701-447A-916D-A67EB1F421A6}"/>
+                <a16:creationId xmlns:a16="http://schemas.microsoft.com/office/drawing/2014/main" id="{3A959E24-A2C6-45A9-871E-EAA80F4DE333}"/>
               </a:ext>
             </a:extLst>
           </p:cNvPr>
@@ -4810,7 +4810,7 @@
           <p:cNvPr id="14" name="">
             <a:extLst xmlns:a="http://schemas.openxmlformats.org/drawingml/2006/main">
               <a:ext uri="{FF2B5EF4-FFF2-40B4-BE49-F238E27FC236}">
-                <a16:creationId xmlns:a16="http://schemas.microsoft.com/office/drawing/2014/main" id="{49BC178B-A098-45C5-B472-10C1706DEB2B}"/>
+                <a16:creationId xmlns:a16="http://schemas.microsoft.com/office/drawing/2014/main" id="{691F159C-945C-4D32-88A3-A9401A3833BB}"/>
               </a:ext>
             </a:extLst>
           </p:cNvPr>
@@ -4841,7 +4841,7 @@
           <p:cNvPr id="15" name="">
             <a:extLst xmlns:a="http://schemas.openxmlformats.org/drawingml/2006/main">
               <a:ext uri="{FF2B5EF4-FFF2-40B4-BE49-F238E27FC236}">
-                <a16:creationId xmlns:a16="http://schemas.microsoft.com/office/drawing/2014/main" id="{1757EA9C-A15C-4150-8CA2-F7FC8C62941B}"/>
+                <a16:creationId xmlns:a16="http://schemas.microsoft.com/office/drawing/2014/main" id="{34EEBA2C-BC82-43A1-B3CD-BCAF3FACD9E2}"/>
               </a:ext>
             </a:extLst>
           </p:cNvPr>
@@ -4899,7 +4899,7 @@
           <p:cNvPr id="16" name="">
             <a:extLst xmlns:a="http://schemas.openxmlformats.org/drawingml/2006/main">
               <a:ext uri="{FF2B5EF4-FFF2-40B4-BE49-F238E27FC236}">
-                <a16:creationId xmlns:a16="http://schemas.microsoft.com/office/drawing/2014/main" id="{728EB151-2319-4DAC-8A9E-62E7409CD4B7}"/>
+                <a16:creationId xmlns:a16="http://schemas.microsoft.com/office/drawing/2014/main" id="{CB8BCF1C-BE74-47B1-B812-3780E0DED167}"/>
               </a:ext>
             </a:extLst>
           </p:cNvPr>
@@ -4957,7 +4957,7 @@
           <p:cNvPr id="17" name="">
             <a:extLst xmlns:a="http://schemas.openxmlformats.org/drawingml/2006/main">
               <a:ext uri="{FF2B5EF4-FFF2-40B4-BE49-F238E27FC236}">
-                <a16:creationId xmlns:a16="http://schemas.microsoft.com/office/drawing/2014/main" id="{0E754535-880F-497A-BAAA-694FB5DCBDD0}"/>
+                <a16:creationId xmlns:a16="http://schemas.microsoft.com/office/drawing/2014/main" id="{4DF5E062-DACA-47CA-A4C2-DA539F352DB6}"/>
               </a:ext>
             </a:extLst>
           </p:cNvPr>
@@ -5015,7 +5015,7 @@
           <p:cNvPr id="18" name="">
             <a:extLst xmlns:a="http://schemas.openxmlformats.org/drawingml/2006/main">
               <a:ext uri="{FF2B5EF4-FFF2-40B4-BE49-F238E27FC236}">
-                <a16:creationId xmlns:a16="http://schemas.microsoft.com/office/drawing/2014/main" id="{D0AEA450-95DD-46A3-9197-1EA6264374FF}"/>
+                <a16:creationId xmlns:a16="http://schemas.microsoft.com/office/drawing/2014/main" id="{1E610EDA-9BE4-4EC8-99B7-F5DF18E7C99F}"/>
               </a:ext>
             </a:extLst>
           </p:cNvPr>
@@ -5050,7 +5050,7 @@
           <p:cNvPr id="19" name="">
             <a:extLst xmlns:a="http://schemas.openxmlformats.org/drawingml/2006/main">
               <a:ext uri="{FF2B5EF4-FFF2-40B4-BE49-F238E27FC236}">
-                <a16:creationId xmlns:a16="http://schemas.microsoft.com/office/drawing/2014/main" id="{3CB4A4ED-E5C8-41D5-8832-3FAE86427A3D}"/>
+                <a16:creationId xmlns:a16="http://schemas.microsoft.com/office/drawing/2014/main" id="{43044A79-2A78-425C-8918-A56F97974504}"/>
               </a:ext>
             </a:extLst>
           </p:cNvPr>
@@ -5081,7 +5081,7 @@
           <p:cNvPr id="20" name="">
             <a:extLst xmlns:a="http://schemas.openxmlformats.org/drawingml/2006/main">
               <a:ext uri="{FF2B5EF4-FFF2-40B4-BE49-F238E27FC236}">
-                <a16:creationId xmlns:a16="http://schemas.microsoft.com/office/drawing/2014/main" id="{02F48A3D-4F9E-472F-BBF3-24A64C10CE7B}"/>
+                <a16:creationId xmlns:a16="http://schemas.microsoft.com/office/drawing/2014/main" id="{EB66FEFB-27AA-418D-83C6-B0525B2BB1B3}"/>
               </a:ext>
             </a:extLst>
           </p:cNvPr>
@@ -5139,7 +5139,7 @@
           <p:cNvPr id="21" name="">
             <a:extLst xmlns:a="http://schemas.openxmlformats.org/drawingml/2006/main">
               <a:ext uri="{FF2B5EF4-FFF2-40B4-BE49-F238E27FC236}">
-                <a16:creationId xmlns:a16="http://schemas.microsoft.com/office/drawing/2014/main" id="{4A6AD199-CEEE-445D-B6C3-6D407ACE82E9}"/>
+                <a16:creationId xmlns:a16="http://schemas.microsoft.com/office/drawing/2014/main" id="{D3A5335A-CF5D-43C6-A616-7C56CF61DA3B}"/>
               </a:ext>
             </a:extLst>
           </p:cNvPr>
@@ -5197,7 +5197,7 @@
           <p:cNvPr id="22" name="">
             <a:extLst xmlns:a="http://schemas.openxmlformats.org/drawingml/2006/main">
               <a:ext uri="{FF2B5EF4-FFF2-40B4-BE49-F238E27FC236}">
-                <a16:creationId xmlns:a16="http://schemas.microsoft.com/office/drawing/2014/main" id="{8BDBDF0A-66D4-4D18-A4EC-151E8B3C9541}"/>
+                <a16:creationId xmlns:a16="http://schemas.microsoft.com/office/drawing/2014/main" id="{8935EE8A-CC27-4371-8845-128FB97F57EF}"/>
               </a:ext>
             </a:extLst>
           </p:cNvPr>
@@ -5255,7 +5255,7 @@
           <p:cNvPr id="23" name="">
             <a:extLst xmlns:a="http://schemas.openxmlformats.org/drawingml/2006/main">
               <a:ext uri="{FF2B5EF4-FFF2-40B4-BE49-F238E27FC236}">
-                <a16:creationId xmlns:a16="http://schemas.microsoft.com/office/drawing/2014/main" id="{E7406991-BF50-4E82-89C6-9943B18038B9}"/>
+                <a16:creationId xmlns:a16="http://schemas.microsoft.com/office/drawing/2014/main" id="{9F8B1C07-9706-4F2B-93A1-380E8364AF12}"/>
               </a:ext>
             </a:extLst>
           </p:cNvPr>
@@ -5290,7 +5290,7 @@
           <p:cNvPr id="24" name="">
             <a:extLst xmlns:a="http://schemas.openxmlformats.org/drawingml/2006/main">
               <a:ext uri="{FF2B5EF4-FFF2-40B4-BE49-F238E27FC236}">
-                <a16:creationId xmlns:a16="http://schemas.microsoft.com/office/drawing/2014/main" id="{2081986C-10F0-4E96-A3FD-219497FFB69F}"/>
+                <a16:creationId xmlns:a16="http://schemas.microsoft.com/office/drawing/2014/main" id="{64A36ED4-38B0-4BE6-8271-6E3D2EF3DFD8}"/>
               </a:ext>
             </a:extLst>
           </p:cNvPr>
@@ -5321,7 +5321,7 @@
           <p:cNvPr id="25" name="">
             <a:extLst xmlns:a="http://schemas.openxmlformats.org/drawingml/2006/main">
               <a:ext uri="{FF2B5EF4-FFF2-40B4-BE49-F238E27FC236}">
-                <a16:creationId xmlns:a16="http://schemas.microsoft.com/office/drawing/2014/main" id="{509F085D-33DB-4C69-B242-F989FF6A1F93}"/>
+                <a16:creationId xmlns:a16="http://schemas.microsoft.com/office/drawing/2014/main" id="{72FCABD8-3AEB-4C44-8738-946E0CD05F9E}"/>
               </a:ext>
             </a:extLst>
           </p:cNvPr>
@@ -5379,7 +5379,7 @@
           <p:cNvPr id="26" name="">
             <a:extLst xmlns:a="http://schemas.openxmlformats.org/drawingml/2006/main">
               <a:ext uri="{FF2B5EF4-FFF2-40B4-BE49-F238E27FC236}">
-                <a16:creationId xmlns:a16="http://schemas.microsoft.com/office/drawing/2014/main" id="{3CB5C3C2-94E5-4A67-9E72-EA6EE0E799D2}"/>
+                <a16:creationId xmlns:a16="http://schemas.microsoft.com/office/drawing/2014/main" id="{C72631FC-F23A-4F47-8D22-09377BDE0389}"/>
               </a:ext>
             </a:extLst>
           </p:cNvPr>
@@ -5437,7 +5437,7 @@
           <p:cNvPr id="27" name="">
             <a:extLst xmlns:a="http://schemas.openxmlformats.org/drawingml/2006/main">
               <a:ext uri="{FF2B5EF4-FFF2-40B4-BE49-F238E27FC236}">
-                <a16:creationId xmlns:a16="http://schemas.microsoft.com/office/drawing/2014/main" id="{8E11910E-DDE8-4DA9-86CF-870A4BCA64D1}"/>
+                <a16:creationId xmlns:a16="http://schemas.microsoft.com/office/drawing/2014/main" id="{91CB7450-407B-4323-ADC9-2328B596AED1}"/>
               </a:ext>
             </a:extLst>
           </p:cNvPr>
@@ -5495,7 +5495,7 @@
           <p:cNvPr id="28" name="">
             <a:extLst xmlns:a="http://schemas.openxmlformats.org/drawingml/2006/main">
               <a:ext uri="{FF2B5EF4-FFF2-40B4-BE49-F238E27FC236}">
-                <a16:creationId xmlns:a16="http://schemas.microsoft.com/office/drawing/2014/main" id="{6978F6CB-62F0-47D1-8BE1-5A18C271F6EA}"/>
+                <a16:creationId xmlns:a16="http://schemas.microsoft.com/office/drawing/2014/main" id="{DD3661BD-702F-4893-BE1A-8B3EDEDFEBAE}"/>
               </a:ext>
             </a:extLst>
           </p:cNvPr>
@@ -5553,7 +5553,7 @@
           <p:cNvPr id="29" name="">
             <a:extLst xmlns:a="http://schemas.openxmlformats.org/drawingml/2006/main">
               <a:ext uri="{FF2B5EF4-FFF2-40B4-BE49-F238E27FC236}">
-                <a16:creationId xmlns:a16="http://schemas.microsoft.com/office/drawing/2014/main" id="{F4A7D7C0-A8B3-44D4-A346-8856394DCBD1}"/>
+                <a16:creationId xmlns:a16="http://schemas.microsoft.com/office/drawing/2014/main" id="{07C8F4C7-DC61-4475-9033-416C792261C5}"/>
               </a:ext>
             </a:extLst>
           </p:cNvPr>
@@ -5615,7 +5615,7 @@
           <p:cNvPr id="30" name="">
             <a:extLst xmlns:a="http://schemas.openxmlformats.org/drawingml/2006/main">
               <a:ext uri="{FF2B5EF4-FFF2-40B4-BE49-F238E27FC236}">
-                <a16:creationId xmlns:a16="http://schemas.microsoft.com/office/drawing/2014/main" id="{601EB66A-E7CD-42B7-8722-82BCD99DE3EB}"/>
+                <a16:creationId xmlns:a16="http://schemas.microsoft.com/office/drawing/2014/main" id="{20C79C43-A7E1-4E70-BD97-69FD0B22D8F6}"/>
               </a:ext>
             </a:extLst>
           </p:cNvPr>
@@ -5677,7 +5677,7 @@
           <p:cNvPr id="31" name="">
             <a:extLst xmlns:a="http://schemas.openxmlformats.org/drawingml/2006/main">
               <a:ext uri="{FF2B5EF4-FFF2-40B4-BE49-F238E27FC236}">
-                <a16:creationId xmlns:a16="http://schemas.microsoft.com/office/drawing/2014/main" id="{15E454AF-96D6-4987-8F8F-6ACAA5DC8E24}"/>
+                <a16:creationId xmlns:a16="http://schemas.microsoft.com/office/drawing/2014/main" id="{C3FE5935-07C9-4F0A-87C8-65B9830394E8}"/>
               </a:ext>
             </a:extLst>
           </p:cNvPr>
@@ -5739,7 +5739,7 @@
           <p:cNvPr id="32" name="">
             <a:extLst xmlns:a="http://schemas.openxmlformats.org/drawingml/2006/main">
               <a:ext uri="{FF2B5EF4-FFF2-40B4-BE49-F238E27FC236}">
-                <a16:creationId xmlns:a16="http://schemas.microsoft.com/office/drawing/2014/main" id="{5F88E01B-4000-4E6F-8D12-B395F075D23C}"/>
+                <a16:creationId xmlns:a16="http://schemas.microsoft.com/office/drawing/2014/main" id="{516BAABD-6A00-4ACF-8F78-0EE1BE1B022E}"/>
               </a:ext>
             </a:extLst>
           </p:cNvPr>
@@ -5801,7 +5801,7 @@
           <p:cNvPr id="33" name="">
             <a:extLst xmlns:a="http://schemas.openxmlformats.org/drawingml/2006/main">
               <a:ext uri="{FF2B5EF4-FFF2-40B4-BE49-F238E27FC236}">
-                <a16:creationId xmlns:a16="http://schemas.microsoft.com/office/drawing/2014/main" id="{32E5D8FC-423D-45F7-99FB-45336FF354D2}"/>
+                <a16:creationId xmlns:a16="http://schemas.microsoft.com/office/drawing/2014/main" id="{45F1D3D0-9596-4110-A22E-BD1FFD5A8989}"/>
               </a:ext>
             </a:extLst>
           </p:cNvPr>
@@ -5861,7 +5861,7 @@
     </p:spTree>
     <p:extLst>
       <p:ext uri="{BB962C8B-B14F-4D97-AF65-F5344CB8AC3E}">
-        <p14:creationId xmlns:p14="http://schemas.microsoft.com/office/powerpoint/2010/main" val="1010263112"/>
+        <p14:creationId xmlns:p14="http://schemas.microsoft.com/office/powerpoint/2010/main" val="1169107440"/>
       </p:ext>
     </p:extLst>
   </p:cSld>
@@ -5892,7 +5892,7 @@
           <p:cNvPr id="33" name="">
             <a:extLst xmlns:a="http://schemas.openxmlformats.org/drawingml/2006/main">
               <a:ext uri="{FF2B5EF4-FFF2-40B4-BE49-F238E27FC236}">
-                <a16:creationId xmlns:a16="http://schemas.microsoft.com/office/drawing/2014/main" id="{597384CE-27EE-4252-8D88-11A1178EC351}"/>
+                <a16:creationId xmlns:a16="http://schemas.microsoft.com/office/drawing/2014/main" id="{F7AF37EB-1B93-4C6B-93AC-0AE834468A85}"/>
               </a:ext>
             </a:extLst>
           </p:cNvPr>
@@ -5923,7 +5923,7 @@
           <p:cNvPr id="2" name="">
             <a:extLst xmlns:a="http://schemas.openxmlformats.org/drawingml/2006/main">
               <a:ext uri="{FF2B5EF4-FFF2-40B4-BE49-F238E27FC236}">
-                <a16:creationId xmlns:a16="http://schemas.microsoft.com/office/drawing/2014/main" id="{9FFDEA20-53E3-4045-BA98-1AD774261DD9}"/>
+                <a16:creationId xmlns:a16="http://schemas.microsoft.com/office/drawing/2014/main" id="{D1FF1F4B-CD49-46D6-8825-76B9ED96A4EA}"/>
               </a:ext>
             </a:extLst>
           </p:cNvPr>
@@ -5981,7 +5981,7 @@
           <p:cNvPr id="3" name="">
             <a:extLst xmlns:a="http://schemas.openxmlformats.org/drawingml/2006/main">
               <a:ext uri="{FF2B5EF4-FFF2-40B4-BE49-F238E27FC236}">
-                <a16:creationId xmlns:a16="http://schemas.microsoft.com/office/drawing/2014/main" id="{3A891B69-8632-49B5-A4DA-ED45C842F08C}"/>
+                <a16:creationId xmlns:a16="http://schemas.microsoft.com/office/drawing/2014/main" id="{4A152C31-6D8B-4426-8F26-0D26C0F11D73}"/>
               </a:ext>
             </a:extLst>
           </p:cNvPr>
@@ -6039,7 +6039,7 @@
           <p:cNvPr id="4" name="">
             <a:extLst xmlns:a="http://schemas.openxmlformats.org/drawingml/2006/main">
               <a:ext uri="{FF2B5EF4-FFF2-40B4-BE49-F238E27FC236}">
-                <a16:creationId xmlns:a16="http://schemas.microsoft.com/office/drawing/2014/main" id="{12A63EE8-06F6-43BB-87A5-9F31A2089EE9}"/>
+                <a16:creationId xmlns:a16="http://schemas.microsoft.com/office/drawing/2014/main" id="{654B874A-1E4F-4D7A-BF29-6D02EB3F7F56}"/>
               </a:ext>
             </a:extLst>
           </p:cNvPr>
@@ -6070,7 +6070,7 @@
           <p:cNvPr id="5" name="">
             <a:extLst xmlns:a="http://schemas.openxmlformats.org/drawingml/2006/main">
               <a:ext uri="{FF2B5EF4-FFF2-40B4-BE49-F238E27FC236}">
-                <a16:creationId xmlns:a16="http://schemas.microsoft.com/office/drawing/2014/main" id="{A63D9174-6B37-443B-8C57-BE4B334DADE8}"/>
+                <a16:creationId xmlns:a16="http://schemas.microsoft.com/office/drawing/2014/main" id="{2C37674A-F682-4F7E-820A-F8D99624FD4A}"/>
               </a:ext>
             </a:extLst>
           </p:cNvPr>
@@ -6128,7 +6128,7 @@
           <p:cNvPr id="6" name="">
             <a:extLst xmlns:a="http://schemas.openxmlformats.org/drawingml/2006/main">
               <a:ext uri="{FF2B5EF4-FFF2-40B4-BE49-F238E27FC236}">
-                <a16:creationId xmlns:a16="http://schemas.microsoft.com/office/drawing/2014/main" id="{C1FB636B-E21A-4B19-BC12-10652E942525}"/>
+                <a16:creationId xmlns:a16="http://schemas.microsoft.com/office/drawing/2014/main" id="{CBFB9DA7-3B72-47BB-BDE2-3A2B0ECBA989}"/>
               </a:ext>
             </a:extLst>
           </p:cNvPr>
@@ -6186,7 +6186,7 @@
           <p:cNvPr id="7" name="">
             <a:extLst xmlns:a="http://schemas.openxmlformats.org/drawingml/2006/main">
               <a:ext uri="{FF2B5EF4-FFF2-40B4-BE49-F238E27FC236}">
-                <a16:creationId xmlns:a16="http://schemas.microsoft.com/office/drawing/2014/main" id="{F50356B3-2D3A-4A4A-B6B8-3B2100839252}"/>
+                <a16:creationId xmlns:a16="http://schemas.microsoft.com/office/drawing/2014/main" id="{07BB25DE-9044-4C04-91CC-6C0274565033}"/>
               </a:ext>
             </a:extLst>
           </p:cNvPr>
@@ -6244,7 +6244,7 @@
           <p:cNvPr id="8" name="">
             <a:extLst xmlns:a="http://schemas.openxmlformats.org/drawingml/2006/main">
               <a:ext uri="{FF2B5EF4-FFF2-40B4-BE49-F238E27FC236}">
-                <a16:creationId xmlns:a16="http://schemas.microsoft.com/office/drawing/2014/main" id="{793E1CEC-13E2-4693-AD9D-A16E3963EE3E}"/>
+                <a16:creationId xmlns:a16="http://schemas.microsoft.com/office/drawing/2014/main" id="{A9C73CEA-600C-43AA-A161-6A78DE5E703D}"/>
               </a:ext>
             </a:extLst>
           </p:cNvPr>
@@ -6279,7 +6279,7 @@
           <p:cNvPr id="9" name="">
             <a:extLst xmlns:a="http://schemas.openxmlformats.org/drawingml/2006/main">
               <a:ext uri="{FF2B5EF4-FFF2-40B4-BE49-F238E27FC236}">
-                <a16:creationId xmlns:a16="http://schemas.microsoft.com/office/drawing/2014/main" id="{1670E39F-C358-4A0A-A4B6-930A236F1939}"/>
+                <a16:creationId xmlns:a16="http://schemas.microsoft.com/office/drawing/2014/main" id="{5D7AF256-AE03-4618-8E49-7BAC25A60BFD}"/>
               </a:ext>
             </a:extLst>
           </p:cNvPr>
@@ -6337,7 +6337,7 @@
           <p:cNvPr id="10" name="">
             <a:extLst xmlns:a="http://schemas.openxmlformats.org/drawingml/2006/main">
               <a:ext uri="{FF2B5EF4-FFF2-40B4-BE49-F238E27FC236}">
-                <a16:creationId xmlns:a16="http://schemas.microsoft.com/office/drawing/2014/main" id="{EBA675B9-F969-4179-991F-1DAF78BDB5CD}"/>
+                <a16:creationId xmlns:a16="http://schemas.microsoft.com/office/drawing/2014/main" id="{37B623B9-5484-4233-9C53-0806047D8304}"/>
               </a:ext>
             </a:extLst>
           </p:cNvPr>
@@ -6395,7 +6395,7 @@
           <p:cNvPr id="11" name="">
             <a:extLst xmlns:a="http://schemas.openxmlformats.org/drawingml/2006/main">
               <a:ext uri="{FF2B5EF4-FFF2-40B4-BE49-F238E27FC236}">
-                <a16:creationId xmlns:a16="http://schemas.microsoft.com/office/drawing/2014/main" id="{39C6B5EF-FB12-4024-A4F1-446D1686B8B4}"/>
+                <a16:creationId xmlns:a16="http://schemas.microsoft.com/office/drawing/2014/main" id="{F5D00457-FE6C-4249-A064-181CAF9724D3}"/>
               </a:ext>
             </a:extLst>
           </p:cNvPr>
@@ -6476,7 +6476,7 @@
           <p:cNvPr id="12" name="">
             <a:extLst xmlns:a="http://schemas.openxmlformats.org/drawingml/2006/main">
               <a:ext uri="{FF2B5EF4-FFF2-40B4-BE49-F238E27FC236}">
-                <a16:creationId xmlns:a16="http://schemas.microsoft.com/office/drawing/2014/main" id="{01FB5ACD-86A9-43AF-91F6-BE16D940BECE}"/>
+                <a16:creationId xmlns:a16="http://schemas.microsoft.com/office/drawing/2014/main" id="{7094C82A-7581-488E-A57E-2791F78DAA84}"/>
               </a:ext>
             </a:extLst>
           </p:cNvPr>
@@ -6511,7 +6511,7 @@
           <p:cNvPr id="13" name="">
             <a:extLst xmlns:a="http://schemas.openxmlformats.org/drawingml/2006/main">
               <a:ext uri="{FF2B5EF4-FFF2-40B4-BE49-F238E27FC236}">
-                <a16:creationId xmlns:a16="http://schemas.microsoft.com/office/drawing/2014/main" id="{8D0B7F08-6201-4741-BECA-49A8DB05B7D8}"/>
+                <a16:creationId xmlns:a16="http://schemas.microsoft.com/office/drawing/2014/main" id="{15EADA91-B559-4E4F-AF2D-8EB6874FC59D}"/>
               </a:ext>
             </a:extLst>
           </p:cNvPr>
@@ -6569,7 +6569,7 @@
           <p:cNvPr id="14" name="">
             <a:extLst xmlns:a="http://schemas.openxmlformats.org/drawingml/2006/main">
               <a:ext uri="{FF2B5EF4-FFF2-40B4-BE49-F238E27FC236}">
-                <a16:creationId xmlns:a16="http://schemas.microsoft.com/office/drawing/2014/main" id="{6BB9A052-A9D6-474A-8B20-2932EE28465C}"/>
+                <a16:creationId xmlns:a16="http://schemas.microsoft.com/office/drawing/2014/main" id="{8457D237-E273-41E8-8222-32AAC274E1CD}"/>
               </a:ext>
             </a:extLst>
           </p:cNvPr>
@@ -6627,7 +6627,7 @@
           <p:cNvPr id="15" name="">
             <a:extLst xmlns:a="http://schemas.openxmlformats.org/drawingml/2006/main">
               <a:ext uri="{FF2B5EF4-FFF2-40B4-BE49-F238E27FC236}">
-                <a16:creationId xmlns:a16="http://schemas.microsoft.com/office/drawing/2014/main" id="{593FB7E6-97B7-4D1B-93A4-80ED8081231C}"/>
+                <a16:creationId xmlns:a16="http://schemas.microsoft.com/office/drawing/2014/main" id="{CCBADE28-BCD2-4910-885D-B256A5CA14EA}"/>
               </a:ext>
             </a:extLst>
           </p:cNvPr>
@@ -6708,7 +6708,7 @@
           <p:cNvPr id="16" name="">
             <a:extLst xmlns:a="http://schemas.openxmlformats.org/drawingml/2006/main">
               <a:ext uri="{FF2B5EF4-FFF2-40B4-BE49-F238E27FC236}">
-                <a16:creationId xmlns:a16="http://schemas.microsoft.com/office/drawing/2014/main" id="{5309BBF3-C64C-4202-889C-3B77156FC4C7}"/>
+                <a16:creationId xmlns:a16="http://schemas.microsoft.com/office/drawing/2014/main" id="{DC6EAD99-BC54-4FD1-A52C-95804E7AE2FF}"/>
               </a:ext>
             </a:extLst>
           </p:cNvPr>
@@ -6743,7 +6743,7 @@
           <p:cNvPr id="17" name="">
             <a:extLst xmlns:a="http://schemas.openxmlformats.org/drawingml/2006/main">
               <a:ext uri="{FF2B5EF4-FFF2-40B4-BE49-F238E27FC236}">
-                <a16:creationId xmlns:a16="http://schemas.microsoft.com/office/drawing/2014/main" id="{3EEEC8A6-5129-4E3C-81D5-1556C4FB6A30}"/>
+                <a16:creationId xmlns:a16="http://schemas.microsoft.com/office/drawing/2014/main" id="{F9E4582E-F8A1-4AAD-AF06-0DDD8720A2B3}"/>
               </a:ext>
             </a:extLst>
           </p:cNvPr>
@@ -6801,7 +6801,7 @@
           <p:cNvPr id="18" name="">
             <a:extLst xmlns:a="http://schemas.openxmlformats.org/drawingml/2006/main">
               <a:ext uri="{FF2B5EF4-FFF2-40B4-BE49-F238E27FC236}">
-                <a16:creationId xmlns:a16="http://schemas.microsoft.com/office/drawing/2014/main" id="{1BE60D7C-9889-418D-9ACF-499FC0AB3DE2}"/>
+                <a16:creationId xmlns:a16="http://schemas.microsoft.com/office/drawing/2014/main" id="{04C176F0-77CA-49CF-81E9-140AB8C6A167}"/>
               </a:ext>
             </a:extLst>
           </p:cNvPr>
@@ -6859,7 +6859,7 @@
           <p:cNvPr id="19" name="">
             <a:extLst xmlns:a="http://schemas.openxmlformats.org/drawingml/2006/main">
               <a:ext uri="{FF2B5EF4-FFF2-40B4-BE49-F238E27FC236}">
-                <a16:creationId xmlns:a16="http://schemas.microsoft.com/office/drawing/2014/main" id="{E3A3F5BA-5CC6-4AA7-8E72-4174BF165BF1}"/>
+                <a16:creationId xmlns:a16="http://schemas.microsoft.com/office/drawing/2014/main" id="{DB4B9370-6623-461D-B3DC-0A001B145A4A}"/>
               </a:ext>
             </a:extLst>
           </p:cNvPr>
@@ -6940,7 +6940,7 @@
           <p:cNvPr id="20" name="">
             <a:extLst xmlns:a="http://schemas.openxmlformats.org/drawingml/2006/main">
               <a:ext uri="{FF2B5EF4-FFF2-40B4-BE49-F238E27FC236}">
-                <a16:creationId xmlns:a16="http://schemas.microsoft.com/office/drawing/2014/main" id="{622051C9-EFD3-4C0B-8AE8-3A0972232A2F}"/>
+                <a16:creationId xmlns:a16="http://schemas.microsoft.com/office/drawing/2014/main" id="{27414F50-03E5-4032-9CF0-E8C210CD9CFF}"/>
               </a:ext>
             </a:extLst>
           </p:cNvPr>
@@ -6975,7 +6975,7 @@
           <p:cNvPr id="21" name="">
             <a:extLst xmlns:a="http://schemas.openxmlformats.org/drawingml/2006/main">
               <a:ext uri="{FF2B5EF4-FFF2-40B4-BE49-F238E27FC236}">
-                <a16:creationId xmlns:a16="http://schemas.microsoft.com/office/drawing/2014/main" id="{5F5450CF-A26E-4479-AF96-50AECD4CFA77}"/>
+                <a16:creationId xmlns:a16="http://schemas.microsoft.com/office/drawing/2014/main" id="{FFC14701-C57A-4737-9D10-4B588F7B9222}"/>
               </a:ext>
             </a:extLst>
           </p:cNvPr>
@@ -7033,7 +7033,7 @@
           <p:cNvPr id="22" name="">
             <a:extLst xmlns:a="http://schemas.openxmlformats.org/drawingml/2006/main">
               <a:ext uri="{FF2B5EF4-FFF2-40B4-BE49-F238E27FC236}">
-                <a16:creationId xmlns:a16="http://schemas.microsoft.com/office/drawing/2014/main" id="{85598ED0-A1EB-4A4A-8143-01BE2B9883D8}"/>
+                <a16:creationId xmlns:a16="http://schemas.microsoft.com/office/drawing/2014/main" id="{2B538B22-9331-4BFC-B7BE-E3B8F2E97473}"/>
               </a:ext>
             </a:extLst>
           </p:cNvPr>
@@ -7091,7 +7091,7 @@
           <p:cNvPr id="23" name="">
             <a:extLst xmlns:a="http://schemas.openxmlformats.org/drawingml/2006/main">
               <a:ext uri="{FF2B5EF4-FFF2-40B4-BE49-F238E27FC236}">
-                <a16:creationId xmlns:a16="http://schemas.microsoft.com/office/drawing/2014/main" id="{B3457A4B-CF4F-40D7-B950-B1DE2C9F1422}"/>
+                <a16:creationId xmlns:a16="http://schemas.microsoft.com/office/drawing/2014/main" id="{90D2038A-72ED-47AF-8ECB-1282AB597983}"/>
               </a:ext>
             </a:extLst>
           </p:cNvPr>
@@ -7172,7 +7172,7 @@
           <p:cNvPr id="24" name="">
             <a:extLst xmlns:a="http://schemas.openxmlformats.org/drawingml/2006/main">
               <a:ext uri="{FF2B5EF4-FFF2-40B4-BE49-F238E27FC236}">
-                <a16:creationId xmlns:a16="http://schemas.microsoft.com/office/drawing/2014/main" id="{59C57A50-7FF4-496B-9A91-9EC0B9EF5048}"/>
+                <a16:creationId xmlns:a16="http://schemas.microsoft.com/office/drawing/2014/main" id="{DE95861A-4EC4-44DC-BE45-C50255FB291E}"/>
               </a:ext>
             </a:extLst>
           </p:cNvPr>
@@ -7207,7 +7207,7 @@
           <p:cNvPr id="25" name="">
             <a:extLst xmlns:a="http://schemas.openxmlformats.org/drawingml/2006/main">
               <a:ext uri="{FF2B5EF4-FFF2-40B4-BE49-F238E27FC236}">
-                <a16:creationId xmlns:a16="http://schemas.microsoft.com/office/drawing/2014/main" id="{A2E2EEEE-108B-4799-9FBB-1A559B9F6CDF}"/>
+                <a16:creationId xmlns:a16="http://schemas.microsoft.com/office/drawing/2014/main" id="{A53CFB38-5DF6-4F3A-A276-A2EA28384485}"/>
               </a:ext>
             </a:extLst>
           </p:cNvPr>
@@ -7265,7 +7265,7 @@
           <p:cNvPr id="26" name="">
             <a:extLst xmlns:a="http://schemas.openxmlformats.org/drawingml/2006/main">
               <a:ext uri="{FF2B5EF4-FFF2-40B4-BE49-F238E27FC236}">
-                <a16:creationId xmlns:a16="http://schemas.microsoft.com/office/drawing/2014/main" id="{367F9FD8-6119-4D57-BB99-0F80922020D7}"/>
+                <a16:creationId xmlns:a16="http://schemas.microsoft.com/office/drawing/2014/main" id="{F2DC19C8-A0C1-451A-B788-3E958F81D45B}"/>
               </a:ext>
             </a:extLst>
           </p:cNvPr>
@@ -7323,7 +7323,7 @@
           <p:cNvPr id="27" name="">
             <a:extLst xmlns:a="http://schemas.openxmlformats.org/drawingml/2006/main">
               <a:ext uri="{FF2B5EF4-FFF2-40B4-BE49-F238E27FC236}">
-                <a16:creationId xmlns:a16="http://schemas.microsoft.com/office/drawing/2014/main" id="{6128EA7E-49A6-4B47-A1D7-12E26BCAA01C}"/>
+                <a16:creationId xmlns:a16="http://schemas.microsoft.com/office/drawing/2014/main" id="{26342C81-A2A0-4C2D-A011-6FE049E5B907}"/>
               </a:ext>
             </a:extLst>
           </p:cNvPr>
@@ -7404,7 +7404,7 @@
           <p:cNvPr id="28" name="">
             <a:extLst xmlns:a="http://schemas.openxmlformats.org/drawingml/2006/main">
               <a:ext uri="{FF2B5EF4-FFF2-40B4-BE49-F238E27FC236}">
-                <a16:creationId xmlns:a16="http://schemas.microsoft.com/office/drawing/2014/main" id="{ACE13640-70E8-4D5A-9A34-411D633FB809}"/>
+                <a16:creationId xmlns:a16="http://schemas.microsoft.com/office/drawing/2014/main" id="{B7C5790F-01DD-42A6-9152-15511D4C52A4}"/>
               </a:ext>
             </a:extLst>
           </p:cNvPr>
@@ -7439,7 +7439,7 @@
           <p:cNvPr id="29" name="">
             <a:extLst xmlns:a="http://schemas.openxmlformats.org/drawingml/2006/main">
               <a:ext uri="{FF2B5EF4-FFF2-40B4-BE49-F238E27FC236}">
-                <a16:creationId xmlns:a16="http://schemas.microsoft.com/office/drawing/2014/main" id="{4700EFEA-8A97-440D-825F-81C0581463AE}"/>
+                <a16:creationId xmlns:a16="http://schemas.microsoft.com/office/drawing/2014/main" id="{C44B8B10-219C-4606-8278-8828AB27D0B5}"/>
               </a:ext>
             </a:extLst>
           </p:cNvPr>
@@ -7497,7 +7497,7 @@
           <p:cNvPr id="30" name="">
             <a:extLst xmlns:a="http://schemas.openxmlformats.org/drawingml/2006/main">
               <a:ext uri="{FF2B5EF4-FFF2-40B4-BE49-F238E27FC236}">
-                <a16:creationId xmlns:a16="http://schemas.microsoft.com/office/drawing/2014/main" id="{4F3F5AB6-D7ED-4DE1-95DE-B535E82590E3}"/>
+                <a16:creationId xmlns:a16="http://schemas.microsoft.com/office/drawing/2014/main" id="{ADDD9962-3C29-40ED-B781-AF7579167DEE}"/>
               </a:ext>
             </a:extLst>
           </p:cNvPr>
@@ -7555,7 +7555,7 @@
           <p:cNvPr id="31" name="">
             <a:extLst xmlns:a="http://schemas.openxmlformats.org/drawingml/2006/main">
               <a:ext uri="{FF2B5EF4-FFF2-40B4-BE49-F238E27FC236}">
-                <a16:creationId xmlns:a16="http://schemas.microsoft.com/office/drawing/2014/main" id="{01851DD5-C2AC-4A4C-98C4-BD1C5B584FE0}"/>
+                <a16:creationId xmlns:a16="http://schemas.microsoft.com/office/drawing/2014/main" id="{4BC9D04A-154B-43E1-A770-DBE210425560}"/>
               </a:ext>
             </a:extLst>
           </p:cNvPr>
@@ -7636,7 +7636,7 @@
           <p:cNvPr id="32" name="">
             <a:extLst xmlns:a="http://schemas.openxmlformats.org/drawingml/2006/main">
               <a:ext uri="{FF2B5EF4-FFF2-40B4-BE49-F238E27FC236}">
-                <a16:creationId xmlns:a16="http://schemas.microsoft.com/office/drawing/2014/main" id="{9F781EA5-C09F-426A-8628-02B8E8F6B7D5}"/>
+                <a16:creationId xmlns:a16="http://schemas.microsoft.com/office/drawing/2014/main" id="{C196BA06-E66F-4CE7-8935-51E45732061C}"/>
               </a:ext>
             </a:extLst>
           </p:cNvPr>
@@ -7692,7 +7692,7 @@
     </p:spTree>
     <p:extLst>
       <p:ext uri="{BB962C8B-B14F-4D97-AF65-F5344CB8AC3E}">
-        <p14:creationId xmlns:p14="http://schemas.microsoft.com/office/powerpoint/2010/main" val="1265751723"/>
+        <p14:creationId xmlns:p14="http://schemas.microsoft.com/office/powerpoint/2010/main" val="1687429072"/>
       </p:ext>
     </p:extLst>
   </p:cSld>
@@ -7723,7 +7723,7 @@
           <p:cNvPr id="39" name="">
             <a:extLst xmlns:a="http://schemas.openxmlformats.org/drawingml/2006/main">
               <a:ext uri="{FF2B5EF4-FFF2-40B4-BE49-F238E27FC236}">
-                <a16:creationId xmlns:a16="http://schemas.microsoft.com/office/drawing/2014/main" id="{9896186C-5540-449A-87F2-CBAC953A31CE}"/>
+                <a16:creationId xmlns:a16="http://schemas.microsoft.com/office/drawing/2014/main" id="{87439713-4C2E-4FB3-B845-5D11CA88BF99}"/>
               </a:ext>
             </a:extLst>
           </p:cNvPr>
@@ -7754,7 +7754,7 @@
           <p:cNvPr id="2" name="">
             <a:extLst xmlns:a="http://schemas.openxmlformats.org/drawingml/2006/main">
               <a:ext uri="{FF2B5EF4-FFF2-40B4-BE49-F238E27FC236}">
-                <a16:creationId xmlns:a16="http://schemas.microsoft.com/office/drawing/2014/main" id="{9C27A3E2-B192-428E-AB6E-A1EB706BD4A1}"/>
+                <a16:creationId xmlns:a16="http://schemas.microsoft.com/office/drawing/2014/main" id="{AA5381A2-A73B-4DCC-8151-C137ADECAA70}"/>
               </a:ext>
             </a:extLst>
           </p:cNvPr>
@@ -7812,7 +7812,7 @@
           <p:cNvPr id="3" name="">
             <a:extLst xmlns:a="http://schemas.openxmlformats.org/drawingml/2006/main">
               <a:ext uri="{FF2B5EF4-FFF2-40B4-BE49-F238E27FC236}">
-                <a16:creationId xmlns:a16="http://schemas.microsoft.com/office/drawing/2014/main" id="{2A48569A-2F58-4900-8CFC-585D465BF77F}"/>
+                <a16:creationId xmlns:a16="http://schemas.microsoft.com/office/drawing/2014/main" id="{D78375C5-B21B-4448-8232-488D182315F3}"/>
               </a:ext>
             </a:extLst>
           </p:cNvPr>
@@ -7870,7 +7870,7 @@
           <p:cNvPr id="4" name="">
             <a:extLst xmlns:a="http://schemas.openxmlformats.org/drawingml/2006/main">
               <a:ext uri="{FF2B5EF4-FFF2-40B4-BE49-F238E27FC236}">
-                <a16:creationId xmlns:a16="http://schemas.microsoft.com/office/drawing/2014/main" id="{B978D9EF-D2DB-4C50-9118-AE7BCAFEAB81}"/>
+                <a16:creationId xmlns:a16="http://schemas.microsoft.com/office/drawing/2014/main" id="{A025CCB6-E430-400B-B3BA-240F065478D1}"/>
               </a:ext>
             </a:extLst>
           </p:cNvPr>
@@ -7901,7 +7901,7 @@
           <p:cNvPr id="5" name="">
             <a:extLst xmlns:a="http://schemas.openxmlformats.org/drawingml/2006/main">
               <a:ext uri="{FF2B5EF4-FFF2-40B4-BE49-F238E27FC236}">
-                <a16:creationId xmlns:a16="http://schemas.microsoft.com/office/drawing/2014/main" id="{21069035-7502-47C8-BA80-5CF1ED5DEF04}"/>
+                <a16:creationId xmlns:a16="http://schemas.microsoft.com/office/drawing/2014/main" id="{B2F532F8-F32E-4259-B17B-5FED2BC4C557}"/>
               </a:ext>
             </a:extLst>
           </p:cNvPr>
@@ -7959,7 +7959,7 @@
           <p:cNvPr id="6" name="">
             <a:extLst xmlns:a="http://schemas.openxmlformats.org/drawingml/2006/main">
               <a:ext uri="{FF2B5EF4-FFF2-40B4-BE49-F238E27FC236}">
-                <a16:creationId xmlns:a16="http://schemas.microsoft.com/office/drawing/2014/main" id="{73A42B2E-2B26-4A66-AF40-8ADF2D35C1C1}"/>
+                <a16:creationId xmlns:a16="http://schemas.microsoft.com/office/drawing/2014/main" id="{C25FCA91-76F8-434A-8F84-843CEE76EB4C}"/>
               </a:ext>
             </a:extLst>
           </p:cNvPr>
@@ -8017,7 +8017,7 @@
           <p:cNvPr id="7" name="">
             <a:extLst xmlns:a="http://schemas.openxmlformats.org/drawingml/2006/main">
               <a:ext uri="{FF2B5EF4-FFF2-40B4-BE49-F238E27FC236}">
-                <a16:creationId xmlns:a16="http://schemas.microsoft.com/office/drawing/2014/main" id="{2791EF80-755D-4B93-BBA8-994F9EF65055}"/>
+                <a16:creationId xmlns:a16="http://schemas.microsoft.com/office/drawing/2014/main" id="{F27C194C-3476-4937-A7D1-1CB2D109C5DF}"/>
               </a:ext>
             </a:extLst>
           </p:cNvPr>
@@ -8075,7 +8075,7 @@
           <p:cNvPr id="8" name="">
             <a:extLst xmlns:a="http://schemas.openxmlformats.org/drawingml/2006/main">
               <a:ext uri="{FF2B5EF4-FFF2-40B4-BE49-F238E27FC236}">
-                <a16:creationId xmlns:a16="http://schemas.microsoft.com/office/drawing/2014/main" id="{707C4709-BE5B-4214-929C-CF2C78739895}"/>
+                <a16:creationId xmlns:a16="http://schemas.microsoft.com/office/drawing/2014/main" id="{3238A585-E9D9-4265-A174-B1BB7576DB5B}"/>
               </a:ext>
             </a:extLst>
           </p:cNvPr>
@@ -8110,7 +8110,7 @@
           <p:cNvPr id="9" name="">
             <a:extLst xmlns:a="http://schemas.openxmlformats.org/drawingml/2006/main">
               <a:ext uri="{FF2B5EF4-FFF2-40B4-BE49-F238E27FC236}">
-                <a16:creationId xmlns:a16="http://schemas.microsoft.com/office/drawing/2014/main" id="{2A860327-B229-4A12-BA72-2F3A5429429D}"/>
+                <a16:creationId xmlns:a16="http://schemas.microsoft.com/office/drawing/2014/main" id="{8A75C333-A6D2-440F-8C33-924E7267636C}"/>
               </a:ext>
             </a:extLst>
           </p:cNvPr>
@@ -8168,7 +8168,7 @@
           <p:cNvPr id="10" name="">
             <a:extLst xmlns:a="http://schemas.openxmlformats.org/drawingml/2006/main">
               <a:ext uri="{FF2B5EF4-FFF2-40B4-BE49-F238E27FC236}">
-                <a16:creationId xmlns:a16="http://schemas.microsoft.com/office/drawing/2014/main" id="{90032046-0E1F-4BCF-AE49-56F526D0177C}"/>
+                <a16:creationId xmlns:a16="http://schemas.microsoft.com/office/drawing/2014/main" id="{57CAA5EA-016E-47E3-8AB6-8788ADCED270}"/>
               </a:ext>
             </a:extLst>
           </p:cNvPr>
@@ -8199,7 +8199,7 @@
           <p:cNvPr id="11" name="">
             <a:extLst xmlns:a="http://schemas.openxmlformats.org/drawingml/2006/main">
               <a:ext uri="{FF2B5EF4-FFF2-40B4-BE49-F238E27FC236}">
-                <a16:creationId xmlns:a16="http://schemas.microsoft.com/office/drawing/2014/main" id="{3580B124-92D0-41D1-9D1F-40FDDAD95F3F}"/>
+                <a16:creationId xmlns:a16="http://schemas.microsoft.com/office/drawing/2014/main" id="{69D0FBD2-CBD1-4718-9787-1893D7A3705D}"/>
               </a:ext>
             </a:extLst>
           </p:cNvPr>
@@ -8257,7 +8257,7 @@
           <p:cNvPr id="12" name="">
             <a:extLst xmlns:a="http://schemas.openxmlformats.org/drawingml/2006/main">
               <a:ext uri="{FF2B5EF4-FFF2-40B4-BE49-F238E27FC236}">
-                <a16:creationId xmlns:a16="http://schemas.microsoft.com/office/drawing/2014/main" id="{7B6427B0-6265-418B-AD7E-5D0AD95234C7}"/>
+                <a16:creationId xmlns:a16="http://schemas.microsoft.com/office/drawing/2014/main" id="{A592D933-8FEF-4F52-BD36-CF9D3CB81AAC}"/>
               </a:ext>
             </a:extLst>
           </p:cNvPr>
@@ -8288,7 +8288,7 @@
           <p:cNvPr id="13" name="">
             <a:extLst xmlns:a="http://schemas.openxmlformats.org/drawingml/2006/main">
               <a:ext uri="{FF2B5EF4-FFF2-40B4-BE49-F238E27FC236}">
-                <a16:creationId xmlns:a16="http://schemas.microsoft.com/office/drawing/2014/main" id="{F3D8783F-54D0-4D07-8C48-5686685D1762}"/>
+                <a16:creationId xmlns:a16="http://schemas.microsoft.com/office/drawing/2014/main" id="{866F25A6-64D5-4347-99F1-F8519FE83F44}"/>
               </a:ext>
             </a:extLst>
           </p:cNvPr>
@@ -8346,7 +8346,7 @@
           <p:cNvPr id="14" name="">
             <a:extLst xmlns:a="http://schemas.openxmlformats.org/drawingml/2006/main">
               <a:ext uri="{FF2B5EF4-FFF2-40B4-BE49-F238E27FC236}">
-                <a16:creationId xmlns:a16="http://schemas.microsoft.com/office/drawing/2014/main" id="{B902B2F0-92B0-4FFF-B090-EB6CBE5525A8}"/>
+                <a16:creationId xmlns:a16="http://schemas.microsoft.com/office/drawing/2014/main" id="{D3F46889-FBD4-432E-B860-F7687DDC8E5B}"/>
               </a:ext>
             </a:extLst>
           </p:cNvPr>
@@ -8377,7 +8377,7 @@
           <p:cNvPr id="15" name="">
             <a:extLst xmlns:a="http://schemas.openxmlformats.org/drawingml/2006/main">
               <a:ext uri="{FF2B5EF4-FFF2-40B4-BE49-F238E27FC236}">
-                <a16:creationId xmlns:a16="http://schemas.microsoft.com/office/drawing/2014/main" id="{2B852659-522C-45F2-AB95-F02EC544FFC1}"/>
+                <a16:creationId xmlns:a16="http://schemas.microsoft.com/office/drawing/2014/main" id="{F81A3439-FBEE-43E1-B203-5CC340250CFB}"/>
               </a:ext>
             </a:extLst>
           </p:cNvPr>
@@ -8435,7 +8435,7 @@
           <p:cNvPr id="16" name="">
             <a:extLst xmlns:a="http://schemas.openxmlformats.org/drawingml/2006/main">
               <a:ext uri="{FF2B5EF4-FFF2-40B4-BE49-F238E27FC236}">
-                <a16:creationId xmlns:a16="http://schemas.microsoft.com/office/drawing/2014/main" id="{6401AC31-E3B3-409F-BE3D-825F79B65A5F}"/>
+                <a16:creationId xmlns:a16="http://schemas.microsoft.com/office/drawing/2014/main" id="{9E115392-E404-4D2F-B13B-40BB73923E98}"/>
               </a:ext>
             </a:extLst>
           </p:cNvPr>
@@ -8466,7 +8466,7 @@
           <p:cNvPr id="17" name="">
             <a:extLst xmlns:a="http://schemas.openxmlformats.org/drawingml/2006/main">
               <a:ext uri="{FF2B5EF4-FFF2-40B4-BE49-F238E27FC236}">
-                <a16:creationId xmlns:a16="http://schemas.microsoft.com/office/drawing/2014/main" id="{DF929C1B-5AEC-416B-9803-413DA4ED7A30}"/>
+                <a16:creationId xmlns:a16="http://schemas.microsoft.com/office/drawing/2014/main" id="{21A9D5F5-FAD7-46A3-AAFC-D4BCDFF4BDAC}"/>
               </a:ext>
             </a:extLst>
           </p:cNvPr>
@@ -8524,7 +8524,7 @@
           <p:cNvPr id="18" name="">
             <a:extLst xmlns:a="http://schemas.openxmlformats.org/drawingml/2006/main">
               <a:ext uri="{FF2B5EF4-FFF2-40B4-BE49-F238E27FC236}">
-                <a16:creationId xmlns:a16="http://schemas.microsoft.com/office/drawing/2014/main" id="{A0E4427A-8E77-4187-91F2-4AC1D8DC5147}"/>
+                <a16:creationId xmlns:a16="http://schemas.microsoft.com/office/drawing/2014/main" id="{4FDB7E08-7A63-4BB2-BE63-6CD42D510AC0}"/>
               </a:ext>
             </a:extLst>
           </p:cNvPr>
@@ -8559,7 +8559,7 @@
           <p:cNvPr id="19" name="">
             <a:extLst xmlns:a="http://schemas.openxmlformats.org/drawingml/2006/main">
               <a:ext uri="{FF2B5EF4-FFF2-40B4-BE49-F238E27FC236}">
-                <a16:creationId xmlns:a16="http://schemas.microsoft.com/office/drawing/2014/main" id="{C463FEE9-35C7-44AE-A002-14F17155F6D3}"/>
+                <a16:creationId xmlns:a16="http://schemas.microsoft.com/office/drawing/2014/main" id="{59A885FE-F255-4FC9-8DB1-157DA5EF3EC2}"/>
               </a:ext>
             </a:extLst>
           </p:cNvPr>
@@ -8617,7 +8617,7 @@
           <p:cNvPr id="20" name="">
             <a:extLst xmlns:a="http://schemas.openxmlformats.org/drawingml/2006/main">
               <a:ext uri="{FF2B5EF4-FFF2-40B4-BE49-F238E27FC236}">
-                <a16:creationId xmlns:a16="http://schemas.microsoft.com/office/drawing/2014/main" id="{3D70B56E-5EF3-4249-B652-4D6EED0693D4}"/>
+                <a16:creationId xmlns:a16="http://schemas.microsoft.com/office/drawing/2014/main" id="{00655B10-43B2-4116-BC13-C5128184669F}"/>
               </a:ext>
             </a:extLst>
           </p:cNvPr>
@@ -8648,7 +8648,7 @@
           <p:cNvPr id="21" name="">
             <a:extLst xmlns:a="http://schemas.openxmlformats.org/drawingml/2006/main">
               <a:ext uri="{FF2B5EF4-FFF2-40B4-BE49-F238E27FC236}">
-                <a16:creationId xmlns:a16="http://schemas.microsoft.com/office/drawing/2014/main" id="{2559EFCD-62C2-463E-B213-942D7BEE8EF1}"/>
+                <a16:creationId xmlns:a16="http://schemas.microsoft.com/office/drawing/2014/main" id="{DAC322D5-8272-4B6A-834A-E2A0E7FCB57C}"/>
               </a:ext>
             </a:extLst>
           </p:cNvPr>
@@ -8696,7 +8696,7 @@
                 <a:ea typeface="Arial"/>
                 <a:cs typeface="Arial"/>
               </a:rPr>
-              <a:t>64 项自动测试</a:t>
+              <a:t>66 项自动测试</a:t>
             </a:r>
           </a:p>
         </p:txBody>
@@ -8706,7 +8706,7 @@
           <p:cNvPr id="22" name="">
             <a:extLst xmlns:a="http://schemas.openxmlformats.org/drawingml/2006/main">
               <a:ext uri="{FF2B5EF4-FFF2-40B4-BE49-F238E27FC236}">
-                <a16:creationId xmlns:a16="http://schemas.microsoft.com/office/drawing/2014/main" id="{459D2ED5-DD04-46CC-9DE2-7387A872E4BD}"/>
+                <a16:creationId xmlns:a16="http://schemas.microsoft.com/office/drawing/2014/main" id="{82D0C0CE-7757-418C-9754-56C7319B4BA6}"/>
               </a:ext>
             </a:extLst>
           </p:cNvPr>
@@ -8737,7 +8737,7 @@
           <p:cNvPr id="23" name="">
             <a:extLst xmlns:a="http://schemas.openxmlformats.org/drawingml/2006/main">
               <a:ext uri="{FF2B5EF4-FFF2-40B4-BE49-F238E27FC236}">
-                <a16:creationId xmlns:a16="http://schemas.microsoft.com/office/drawing/2014/main" id="{3763989D-19B8-46B3-A5D5-2625719B2CEF}"/>
+                <a16:creationId xmlns:a16="http://schemas.microsoft.com/office/drawing/2014/main" id="{DF3A9BEA-C111-4FDA-B41B-3E76E4E21530}"/>
               </a:ext>
             </a:extLst>
           </p:cNvPr>
@@ -8795,7 +8795,7 @@
           <p:cNvPr id="24" name="">
             <a:extLst xmlns:a="http://schemas.openxmlformats.org/drawingml/2006/main">
               <a:ext uri="{FF2B5EF4-FFF2-40B4-BE49-F238E27FC236}">
-                <a16:creationId xmlns:a16="http://schemas.microsoft.com/office/drawing/2014/main" id="{A9845078-D7E3-4155-AE60-54F518134856}"/>
+                <a16:creationId xmlns:a16="http://schemas.microsoft.com/office/drawing/2014/main" id="{C7B1BC2B-9774-4474-BA89-64B4E3162397}"/>
               </a:ext>
             </a:extLst>
           </p:cNvPr>
@@ -8826,7 +8826,7 @@
           <p:cNvPr id="25" name="">
             <a:extLst xmlns:a="http://schemas.openxmlformats.org/drawingml/2006/main">
               <a:ext uri="{FF2B5EF4-FFF2-40B4-BE49-F238E27FC236}">
-                <a16:creationId xmlns:a16="http://schemas.microsoft.com/office/drawing/2014/main" id="{04335115-E3D3-4F0F-89BE-B80E8D15D451}"/>
+                <a16:creationId xmlns:a16="http://schemas.microsoft.com/office/drawing/2014/main" id="{BDFF24AE-88DF-4E8C-AADE-63DFBB03CE17}"/>
               </a:ext>
             </a:extLst>
           </p:cNvPr>
@@ -8884,7 +8884,7 @@
           <p:cNvPr id="26" name="">
             <a:extLst xmlns:a="http://schemas.openxmlformats.org/drawingml/2006/main">
               <a:ext uri="{FF2B5EF4-FFF2-40B4-BE49-F238E27FC236}">
-                <a16:creationId xmlns:a16="http://schemas.microsoft.com/office/drawing/2014/main" id="{314BF843-9397-4724-84EB-94DD2C863840}"/>
+                <a16:creationId xmlns:a16="http://schemas.microsoft.com/office/drawing/2014/main" id="{ABBF22BC-2E9B-4429-9CA4-8D552A5B4044}"/>
               </a:ext>
             </a:extLst>
           </p:cNvPr>
@@ -8915,7 +8915,7 @@
           <p:cNvPr id="27" name="">
             <a:extLst xmlns:a="http://schemas.openxmlformats.org/drawingml/2006/main">
               <a:ext uri="{FF2B5EF4-FFF2-40B4-BE49-F238E27FC236}">
-                <a16:creationId xmlns:a16="http://schemas.microsoft.com/office/drawing/2014/main" id="{EDB64A9D-250A-43AC-A6F9-EC80B8F47E86}"/>
+                <a16:creationId xmlns:a16="http://schemas.microsoft.com/office/drawing/2014/main" id="{4A9FF60F-0D61-4B5C-871E-59868689FB44}"/>
               </a:ext>
             </a:extLst>
           </p:cNvPr>
@@ -8973,7 +8973,7 @@
           <p:cNvPr id="28" name="">
             <a:extLst xmlns:a="http://schemas.openxmlformats.org/drawingml/2006/main">
               <a:ext uri="{FF2B5EF4-FFF2-40B4-BE49-F238E27FC236}">
-                <a16:creationId xmlns:a16="http://schemas.microsoft.com/office/drawing/2014/main" id="{DB2D0047-6AFD-4CAE-A35A-4297A8BCAB9D}"/>
+                <a16:creationId xmlns:a16="http://schemas.microsoft.com/office/drawing/2014/main" id="{B5DE001A-EE1B-4D98-ABFA-4D0086AF4C0C}"/>
               </a:ext>
             </a:extLst>
           </p:cNvPr>
@@ -9008,7 +9008,7 @@
           <p:cNvPr id="29" name="">
             <a:extLst xmlns:a="http://schemas.openxmlformats.org/drawingml/2006/main">
               <a:ext uri="{FF2B5EF4-FFF2-40B4-BE49-F238E27FC236}">
-                <a16:creationId xmlns:a16="http://schemas.microsoft.com/office/drawing/2014/main" id="{583B9542-7D24-4859-9CA3-3EC0CE660FC3}"/>
+                <a16:creationId xmlns:a16="http://schemas.microsoft.com/office/drawing/2014/main" id="{D4DB3AB1-0EC8-444B-A12B-6B3D9260BEB9}"/>
               </a:ext>
             </a:extLst>
           </p:cNvPr>
@@ -9066,7 +9066,7 @@
           <p:cNvPr id="30" name="">
             <a:extLst xmlns:a="http://schemas.openxmlformats.org/drawingml/2006/main">
               <a:ext uri="{FF2B5EF4-FFF2-40B4-BE49-F238E27FC236}">
-                <a16:creationId xmlns:a16="http://schemas.microsoft.com/office/drawing/2014/main" id="{71692B1D-8F4D-4FFC-9D12-32317902B432}"/>
+                <a16:creationId xmlns:a16="http://schemas.microsoft.com/office/drawing/2014/main" id="{987ABE1F-52B1-48CD-A0E1-2A4A2BA39B6C}"/>
               </a:ext>
             </a:extLst>
           </p:cNvPr>
@@ -9097,7 +9097,7 @@
           <p:cNvPr id="31" name="">
             <a:extLst xmlns:a="http://schemas.openxmlformats.org/drawingml/2006/main">
               <a:ext uri="{FF2B5EF4-FFF2-40B4-BE49-F238E27FC236}">
-                <a16:creationId xmlns:a16="http://schemas.microsoft.com/office/drawing/2014/main" id="{499C8230-6498-4F43-B5BB-8A1C62654C9B}"/>
+                <a16:creationId xmlns:a16="http://schemas.microsoft.com/office/drawing/2014/main" id="{CB018A04-B478-44FF-8227-82D6E77EEF46}"/>
               </a:ext>
             </a:extLst>
           </p:cNvPr>
@@ -9155,7 +9155,7 @@
           <p:cNvPr id="32" name="">
             <a:extLst xmlns:a="http://schemas.openxmlformats.org/drawingml/2006/main">
               <a:ext uri="{FF2B5EF4-FFF2-40B4-BE49-F238E27FC236}">
-                <a16:creationId xmlns:a16="http://schemas.microsoft.com/office/drawing/2014/main" id="{08D8C49E-0620-4914-B3A6-B6DD23999106}"/>
+                <a16:creationId xmlns:a16="http://schemas.microsoft.com/office/drawing/2014/main" id="{4E65A46B-89A6-4E9D-94CD-BBDE6FCC92B2}"/>
               </a:ext>
             </a:extLst>
           </p:cNvPr>
@@ -9186,7 +9186,7 @@
           <p:cNvPr id="33" name="">
             <a:extLst xmlns:a="http://schemas.openxmlformats.org/drawingml/2006/main">
               <a:ext uri="{FF2B5EF4-FFF2-40B4-BE49-F238E27FC236}">
-                <a16:creationId xmlns:a16="http://schemas.microsoft.com/office/drawing/2014/main" id="{7DD10750-4C7D-46C2-AF8F-EF04C998C00A}"/>
+                <a16:creationId xmlns:a16="http://schemas.microsoft.com/office/drawing/2014/main" id="{15039B50-47EE-4782-83FC-C8A32EE5EB1D}"/>
               </a:ext>
             </a:extLst>
           </p:cNvPr>
@@ -9244,7 +9244,7 @@
           <p:cNvPr id="34" name="">
             <a:extLst xmlns:a="http://schemas.openxmlformats.org/drawingml/2006/main">
               <a:ext uri="{FF2B5EF4-FFF2-40B4-BE49-F238E27FC236}">
-                <a16:creationId xmlns:a16="http://schemas.microsoft.com/office/drawing/2014/main" id="{18A3E780-7031-4FCA-937B-E97ABC9871D0}"/>
+                <a16:creationId xmlns:a16="http://schemas.microsoft.com/office/drawing/2014/main" id="{58E744F6-5563-4F87-BFB7-AC88AB746F27}"/>
               </a:ext>
             </a:extLst>
           </p:cNvPr>
@@ -9275,7 +9275,7 @@
           <p:cNvPr id="35" name="">
             <a:extLst xmlns:a="http://schemas.openxmlformats.org/drawingml/2006/main">
               <a:ext uri="{FF2B5EF4-FFF2-40B4-BE49-F238E27FC236}">
-                <a16:creationId xmlns:a16="http://schemas.microsoft.com/office/drawing/2014/main" id="{B4EDD224-568C-4966-86E2-F0409F077F39}"/>
+                <a16:creationId xmlns:a16="http://schemas.microsoft.com/office/drawing/2014/main" id="{2DBA2FF7-BEED-4306-A895-A7F09F49A09D}"/>
               </a:ext>
             </a:extLst>
           </p:cNvPr>
@@ -9333,7 +9333,7 @@
           <p:cNvPr id="36" name="">
             <a:extLst xmlns:a="http://schemas.openxmlformats.org/drawingml/2006/main">
               <a:ext uri="{FF2B5EF4-FFF2-40B4-BE49-F238E27FC236}">
-                <a16:creationId xmlns:a16="http://schemas.microsoft.com/office/drawing/2014/main" id="{B5834E1A-2B72-474A-A457-A4D71B939035}"/>
+                <a16:creationId xmlns:a16="http://schemas.microsoft.com/office/drawing/2014/main" id="{8025C854-EA90-4C94-88E1-13037C5686FE}"/>
               </a:ext>
             </a:extLst>
           </p:cNvPr>
@@ -9364,7 +9364,7 @@
           <p:cNvPr id="37" name="">
             <a:extLst xmlns:a="http://schemas.openxmlformats.org/drawingml/2006/main">
               <a:ext uri="{FF2B5EF4-FFF2-40B4-BE49-F238E27FC236}">
-                <a16:creationId xmlns:a16="http://schemas.microsoft.com/office/drawing/2014/main" id="{D6C98FB4-9E94-4CA4-B837-7DD1D173AEE0}"/>
+                <a16:creationId xmlns:a16="http://schemas.microsoft.com/office/drawing/2014/main" id="{3F97A256-9C65-4AB4-9380-9DE1371760B6}"/>
               </a:ext>
             </a:extLst>
           </p:cNvPr>
@@ -9422,7 +9422,7 @@
           <p:cNvPr id="38" name="">
             <a:extLst xmlns:a="http://schemas.openxmlformats.org/drawingml/2006/main">
               <a:ext uri="{FF2B5EF4-FFF2-40B4-BE49-F238E27FC236}">
-                <a16:creationId xmlns:a16="http://schemas.microsoft.com/office/drawing/2014/main" id="{BE7AE6D4-D7A4-434D-9DD5-6C4A499D820E}"/>
+                <a16:creationId xmlns:a16="http://schemas.microsoft.com/office/drawing/2014/main" id="{B4562E09-AE07-4F9C-A67A-2886211D8C68}"/>
               </a:ext>
             </a:extLst>
           </p:cNvPr>
@@ -9482,7 +9482,7 @@
     </p:spTree>
     <p:extLst>
       <p:ext uri="{BB962C8B-B14F-4D97-AF65-F5344CB8AC3E}">
-        <p14:creationId xmlns:p14="http://schemas.microsoft.com/office/powerpoint/2010/main" val="1661467175"/>
+        <p14:creationId xmlns:p14="http://schemas.microsoft.com/office/powerpoint/2010/main" val="1142559689"/>
       </p:ext>
     </p:extLst>
   </p:cSld>
@@ -9513,7 +9513,7 @@
           <p:cNvPr id="17" name="">
             <a:extLst xmlns:a="http://schemas.openxmlformats.org/drawingml/2006/main">
               <a:ext uri="{FF2B5EF4-FFF2-40B4-BE49-F238E27FC236}">
-                <a16:creationId xmlns:a16="http://schemas.microsoft.com/office/drawing/2014/main" id="{C71E2DDF-7C56-4FC6-98DF-5F2FAA68AA81}"/>
+                <a16:creationId xmlns:a16="http://schemas.microsoft.com/office/drawing/2014/main" id="{766A4DE2-B4B6-4BEC-997C-DCCEF8B09508}"/>
               </a:ext>
             </a:extLst>
           </p:cNvPr>
@@ -9544,7 +9544,7 @@
           <p:cNvPr id="2" name="">
             <a:extLst xmlns:a="http://schemas.openxmlformats.org/drawingml/2006/main">
               <a:ext uri="{FF2B5EF4-FFF2-40B4-BE49-F238E27FC236}">
-                <a16:creationId xmlns:a16="http://schemas.microsoft.com/office/drawing/2014/main" id="{D4D1EACC-D41F-4640-89CE-6E28FD3A5973}"/>
+                <a16:creationId xmlns:a16="http://schemas.microsoft.com/office/drawing/2014/main" id="{E746388E-DF23-48BD-8742-0E953F626681}"/>
               </a:ext>
             </a:extLst>
           </p:cNvPr>
@@ -9602,7 +9602,7 @@
           <p:cNvPr id="3" name="">
             <a:extLst xmlns:a="http://schemas.openxmlformats.org/drawingml/2006/main">
               <a:ext uri="{FF2B5EF4-FFF2-40B4-BE49-F238E27FC236}">
-                <a16:creationId xmlns:a16="http://schemas.microsoft.com/office/drawing/2014/main" id="{D6B009EA-F3C4-4CF8-9501-4058DDEE93B3}"/>
+                <a16:creationId xmlns:a16="http://schemas.microsoft.com/office/drawing/2014/main" id="{A973C571-0FD0-4BB5-AC6E-795782590ADD}"/>
               </a:ext>
             </a:extLst>
           </p:cNvPr>
@@ -9660,7 +9660,7 @@
           <p:cNvPr id="4" name="">
             <a:extLst xmlns:a="http://schemas.openxmlformats.org/drawingml/2006/main">
               <a:ext uri="{FF2B5EF4-FFF2-40B4-BE49-F238E27FC236}">
-                <a16:creationId xmlns:a16="http://schemas.microsoft.com/office/drawing/2014/main" id="{8449F36D-9C2F-4A24-B4A8-CC2A9288801F}"/>
+                <a16:creationId xmlns:a16="http://schemas.microsoft.com/office/drawing/2014/main" id="{4491E64E-0D1F-4DFC-A656-18F8FB14C9C5}"/>
               </a:ext>
             </a:extLst>
           </p:cNvPr>
@@ -9691,7 +9691,7 @@
           <p:cNvPr id="5" name="">
             <a:extLst xmlns:a="http://schemas.openxmlformats.org/drawingml/2006/main">
               <a:ext uri="{FF2B5EF4-FFF2-40B4-BE49-F238E27FC236}">
-                <a16:creationId xmlns:a16="http://schemas.microsoft.com/office/drawing/2014/main" id="{E7405DC6-4F9C-4564-AEBC-F17BC254A08C}"/>
+                <a16:creationId xmlns:a16="http://schemas.microsoft.com/office/drawing/2014/main" id="{C0EFED74-7A28-4ED5-92A7-34F118C42639}"/>
               </a:ext>
             </a:extLst>
           </p:cNvPr>
@@ -9749,7 +9749,7 @@
           <p:cNvPr id="6" name="">
             <a:extLst xmlns:a="http://schemas.openxmlformats.org/drawingml/2006/main">
               <a:ext uri="{FF2B5EF4-FFF2-40B4-BE49-F238E27FC236}">
-                <a16:creationId xmlns:a16="http://schemas.microsoft.com/office/drawing/2014/main" id="{FD46E725-29AE-4488-BB34-9874BC5F7F59}"/>
+                <a16:creationId xmlns:a16="http://schemas.microsoft.com/office/drawing/2014/main" id="{FB204E85-71A5-46B2-B705-BA14AB239EE3}"/>
               </a:ext>
             </a:extLst>
           </p:cNvPr>
@@ -9807,7 +9807,7 @@
           <p:cNvPr id="7" name="">
             <a:extLst xmlns:a="http://schemas.openxmlformats.org/drawingml/2006/main">
               <a:ext uri="{FF2B5EF4-FFF2-40B4-BE49-F238E27FC236}">
-                <a16:creationId xmlns:a16="http://schemas.microsoft.com/office/drawing/2014/main" id="{12CF335A-0DE7-49DA-A291-EA5B6025C682}"/>
+                <a16:creationId xmlns:a16="http://schemas.microsoft.com/office/drawing/2014/main" id="{DFB2D0FE-D260-4AEC-97DF-C74765C1E2C2}"/>
               </a:ext>
             </a:extLst>
           </p:cNvPr>
@@ -9865,7 +9865,7 @@
           <p:cNvPr id="8" name="">
             <a:extLst xmlns:a="http://schemas.openxmlformats.org/drawingml/2006/main">
               <a:ext uri="{FF2B5EF4-FFF2-40B4-BE49-F238E27FC236}">
-                <a16:creationId xmlns:a16="http://schemas.microsoft.com/office/drawing/2014/main" id="{57544220-8098-413D-8BAB-83287E0E848F}"/>
+                <a16:creationId xmlns:a16="http://schemas.microsoft.com/office/drawing/2014/main" id="{FBDDC004-BDF5-4BF6-8236-0BE24BDF1224}"/>
               </a:ext>
             </a:extLst>
           </p:cNvPr>
@@ -9900,7 +9900,7 @@
           <p:cNvPr id="9" name="">
             <a:extLst xmlns:a="http://schemas.openxmlformats.org/drawingml/2006/main">
               <a:ext uri="{FF2B5EF4-FFF2-40B4-BE49-F238E27FC236}">
-                <a16:creationId xmlns:a16="http://schemas.microsoft.com/office/drawing/2014/main" id="{24B0607A-E4BB-4DCC-AC48-A352FDC60ECF}"/>
+                <a16:creationId xmlns:a16="http://schemas.microsoft.com/office/drawing/2014/main" id="{192F8D96-551C-4D93-A050-CE3C600C5237}"/>
               </a:ext>
             </a:extLst>
           </p:cNvPr>
@@ -9933,7 +9933,7 @@
           <p:cNvPr id="10" name="">
             <a:extLst xmlns:a="http://schemas.openxmlformats.org/drawingml/2006/main">
               <a:ext uri="{FF2B5EF4-FFF2-40B4-BE49-F238E27FC236}">
-                <a16:creationId xmlns:a16="http://schemas.microsoft.com/office/drawing/2014/main" id="{6BA8AD5A-0099-4029-8D57-6AFE3912361F}"/>
+                <a16:creationId xmlns:a16="http://schemas.microsoft.com/office/drawing/2014/main" id="{3E1A3886-44DE-45C8-9283-E67FA513C8E9}"/>
               </a:ext>
             </a:extLst>
           </p:cNvPr>
@@ -9991,7 +9991,7 @@
           <p:cNvPr id="11" name="">
             <a:extLst xmlns:a="http://schemas.openxmlformats.org/drawingml/2006/main">
               <a:ext uri="{FF2B5EF4-FFF2-40B4-BE49-F238E27FC236}">
-                <a16:creationId xmlns:a16="http://schemas.microsoft.com/office/drawing/2014/main" id="{00CF9AE7-A09B-418E-8541-65BDF85AB3DE}"/>
+                <a16:creationId xmlns:a16="http://schemas.microsoft.com/office/drawing/2014/main" id="{AD8EA78C-5A10-4CA3-98CD-3071BBF49FAA}"/>
               </a:ext>
             </a:extLst>
           </p:cNvPr>
@@ -10141,7 +10141,7 @@
           <p:cNvPr id="12" name="">
             <a:extLst xmlns:a="http://schemas.openxmlformats.org/drawingml/2006/main">
               <a:ext uri="{FF2B5EF4-FFF2-40B4-BE49-F238E27FC236}">
-                <a16:creationId xmlns:a16="http://schemas.microsoft.com/office/drawing/2014/main" id="{6CB5CEA2-458C-48A6-B614-1C9545386F24}"/>
+                <a16:creationId xmlns:a16="http://schemas.microsoft.com/office/drawing/2014/main" id="{FFD027DD-D17A-40ED-A9A1-9B5CEB020F68}"/>
               </a:ext>
             </a:extLst>
           </p:cNvPr>
@@ -10176,7 +10176,7 @@
           <p:cNvPr id="13" name="">
             <a:extLst xmlns:a="http://schemas.openxmlformats.org/drawingml/2006/main">
               <a:ext uri="{FF2B5EF4-FFF2-40B4-BE49-F238E27FC236}">
-                <a16:creationId xmlns:a16="http://schemas.microsoft.com/office/drawing/2014/main" id="{6E322344-6C76-4490-A6AF-0721F4057DF4}"/>
+                <a16:creationId xmlns:a16="http://schemas.microsoft.com/office/drawing/2014/main" id="{D4C1CF6B-4756-4AC8-9A08-AB4D72CE9D69}"/>
               </a:ext>
             </a:extLst>
           </p:cNvPr>
@@ -10209,7 +10209,7 @@
           <p:cNvPr id="14" name="">
             <a:extLst xmlns:a="http://schemas.openxmlformats.org/drawingml/2006/main">
               <a:ext uri="{FF2B5EF4-FFF2-40B4-BE49-F238E27FC236}">
-                <a16:creationId xmlns:a16="http://schemas.microsoft.com/office/drawing/2014/main" id="{FDDEB696-DD37-4ABE-A096-F34F792846C3}"/>
+                <a16:creationId xmlns:a16="http://schemas.microsoft.com/office/drawing/2014/main" id="{4CBCC8EF-796B-437B-8419-2B79FCDD0306}"/>
               </a:ext>
             </a:extLst>
           </p:cNvPr>
@@ -10257,7 +10257,7 @@
                 <a:ea typeface="Arial"/>
                 <a:cs typeface="Arial"/>
               </a:rPr>
-              <a:t>仍需真人完成</a:t>
+              <a:t>仍需外部验证</a:t>
             </a:r>
           </a:p>
         </p:txBody>
@@ -10267,7 +10267,7 @@
           <p:cNvPr id="15" name="">
             <a:extLst xmlns:a="http://schemas.openxmlformats.org/drawingml/2006/main">
               <a:ext uri="{FF2B5EF4-FFF2-40B4-BE49-F238E27FC236}">
-                <a16:creationId xmlns:a16="http://schemas.microsoft.com/office/drawing/2014/main" id="{5B4CF524-F81B-4D89-ACFA-2007B502436E}"/>
+                <a16:creationId xmlns:a16="http://schemas.microsoft.com/office/drawing/2014/main" id="{D0FE7746-81D8-4CB4-AF1E-103C423D6665}"/>
               </a:ext>
             </a:extLst>
           </p:cNvPr>
@@ -10361,7 +10361,7 @@
                 <a:ea typeface="Arial"/>
                 <a:cs typeface="Arial"/>
               </a:rPr>
-              <a:t>○ 3–5 分钟真人演示视频</a:t>
+              <a:t>○ 基层经办或社工使用反馈</a:t>
             </a:r>
           </a:p>
           <a:p xmlns:a="http://schemas.openxmlformats.org/drawingml/2006/main">
@@ -10417,7 +10417,7 @@
           <p:cNvPr id="16" name="">
             <a:extLst xmlns:a="http://schemas.openxmlformats.org/drawingml/2006/main">
               <a:ext uri="{FF2B5EF4-FFF2-40B4-BE49-F238E27FC236}">
-                <a16:creationId xmlns:a16="http://schemas.microsoft.com/office/drawing/2014/main" id="{E6161EB9-4D2F-4A15-8598-9F7A4EEAB0A5}"/>
+                <a16:creationId xmlns:a16="http://schemas.microsoft.com/office/drawing/2014/main" id="{F4527E66-7F80-4C29-99B0-84B8F5821827}"/>
               </a:ext>
             </a:extLst>
           </p:cNvPr>
@@ -10473,7 +10473,7 @@
     </p:spTree>
     <p:extLst>
       <p:ext uri="{BB962C8B-B14F-4D97-AF65-F5344CB8AC3E}">
-        <p14:creationId xmlns:p14="http://schemas.microsoft.com/office/powerpoint/2010/main" val="477755495"/>
+        <p14:creationId xmlns:p14="http://schemas.microsoft.com/office/powerpoint/2010/main" val="1153428935"/>
       </p:ext>
     </p:extLst>
   </p:cSld>
@@ -10504,7 +10504,7 @@
           <p:cNvPr id="8" name="">
             <a:extLst xmlns:a="http://schemas.openxmlformats.org/drawingml/2006/main">
               <a:ext uri="{FF2B5EF4-FFF2-40B4-BE49-F238E27FC236}">
-                <a16:creationId xmlns:a16="http://schemas.microsoft.com/office/drawing/2014/main" id="{3D2321C9-0E38-405C-89B1-7C032F08C861}"/>
+                <a16:creationId xmlns:a16="http://schemas.microsoft.com/office/drawing/2014/main" id="{AC65EE44-F5AA-4C7D-8611-082D58ADC652}"/>
               </a:ext>
             </a:extLst>
           </p:cNvPr>
@@ -10535,7 +10535,7 @@
           <p:cNvPr id="2" name="">
             <a:extLst xmlns:a="http://schemas.openxmlformats.org/drawingml/2006/main">
               <a:ext uri="{FF2B5EF4-FFF2-40B4-BE49-F238E27FC236}">
-                <a16:creationId xmlns:a16="http://schemas.microsoft.com/office/drawing/2014/main" id="{6751C432-DD67-4724-AED9-4DEE8E9B102E}"/>
+                <a16:creationId xmlns:a16="http://schemas.microsoft.com/office/drawing/2014/main" id="{38950258-F642-4003-8642-0F7BB4BEEC15}"/>
               </a:ext>
             </a:extLst>
           </p:cNvPr>
@@ -10593,7 +10593,7 @@
           <p:cNvPr id="3" name="">
             <a:extLst xmlns:a="http://schemas.openxmlformats.org/drawingml/2006/main">
               <a:ext uri="{FF2B5EF4-FFF2-40B4-BE49-F238E27FC236}">
-                <a16:creationId xmlns:a16="http://schemas.microsoft.com/office/drawing/2014/main" id="{89AC7DFF-145D-47C8-B2E7-CEEFC6442E84}"/>
+                <a16:creationId xmlns:a16="http://schemas.microsoft.com/office/drawing/2014/main" id="{9DAA06B1-DCA8-4523-900D-30441672BA8A}"/>
               </a:ext>
             </a:extLst>
           </p:cNvPr>
@@ -10674,7 +10674,7 @@
           <p:cNvPr id="4" name="">
             <a:extLst xmlns:a="http://schemas.openxmlformats.org/drawingml/2006/main">
               <a:ext uri="{FF2B5EF4-FFF2-40B4-BE49-F238E27FC236}">
-                <a16:creationId xmlns:a16="http://schemas.microsoft.com/office/drawing/2014/main" id="{A213B335-49EA-4536-9366-BF61BE84C276}"/>
+                <a16:creationId xmlns:a16="http://schemas.microsoft.com/office/drawing/2014/main" id="{76423986-0AC5-4523-A68E-7F5167ACFD5C}"/>
               </a:ext>
             </a:extLst>
           </p:cNvPr>
@@ -10732,7 +10732,7 @@
           <p:cNvPr id="5" name="">
             <a:extLst xmlns:a="http://schemas.openxmlformats.org/drawingml/2006/main">
               <a:ext uri="{FF2B5EF4-FFF2-40B4-BE49-F238E27FC236}">
-                <a16:creationId xmlns:a16="http://schemas.microsoft.com/office/drawing/2014/main" id="{6F210859-6FA0-4780-964E-9AB18C9613B0}"/>
+                <a16:creationId xmlns:a16="http://schemas.microsoft.com/office/drawing/2014/main" id="{18522F79-C964-4477-9169-7131ABF1F53A}"/>
               </a:ext>
             </a:extLst>
           </p:cNvPr>
@@ -10790,7 +10790,7 @@
           <p:cNvPr id="6" name="">
             <a:extLst xmlns:a="http://schemas.openxmlformats.org/drawingml/2006/main">
               <a:ext uri="{FF2B5EF4-FFF2-40B4-BE49-F238E27FC236}">
-                <a16:creationId xmlns:a16="http://schemas.microsoft.com/office/drawing/2014/main" id="{F78205E2-D6B6-4CA5-A245-F04BCE31C4C7}"/>
+                <a16:creationId xmlns:a16="http://schemas.microsoft.com/office/drawing/2014/main" id="{0CB0013F-87A7-4068-B416-35AE3D48FAD5}"/>
               </a:ext>
             </a:extLst>
           </p:cNvPr>
@@ -10852,7 +10852,7 @@
           <p:cNvPr id="7" name="">
             <a:extLst xmlns:a="http://schemas.openxmlformats.org/drawingml/2006/main">
               <a:ext uri="{FF2B5EF4-FFF2-40B4-BE49-F238E27FC236}">
-                <a16:creationId xmlns:a16="http://schemas.microsoft.com/office/drawing/2014/main" id="{40018511-5CCB-443D-9F1E-AEC639264D4B}"/>
+                <a16:creationId xmlns:a16="http://schemas.microsoft.com/office/drawing/2014/main" id="{ACFF2FE4-DEFA-47D4-AC1D-84C300426A64}"/>
               </a:ext>
             </a:extLst>
           </p:cNvPr>
@@ -10908,7 +10908,7 @@
     </p:spTree>
     <p:extLst>
       <p:ext uri="{BB962C8B-B14F-4D97-AF65-F5344CB8AC3E}">
-        <p14:creationId xmlns:p14="http://schemas.microsoft.com/office/powerpoint/2010/main" val="1332555615"/>
+        <p14:creationId xmlns:p14="http://schemas.microsoft.com/office/powerpoint/2010/main" val="924743535"/>
       </p:ext>
     </p:extLst>
   </p:cSld>
@@ -10939,7 +10939,7 @@
           <p:cNvPr id="21" name="">
             <a:extLst xmlns:a="http://schemas.openxmlformats.org/drawingml/2006/main">
               <a:ext uri="{FF2B5EF4-FFF2-40B4-BE49-F238E27FC236}">
-                <a16:creationId xmlns:a16="http://schemas.microsoft.com/office/drawing/2014/main" id="{F4180AC9-7274-4A3D-9287-3B87300B6C04}"/>
+                <a16:creationId xmlns:a16="http://schemas.microsoft.com/office/drawing/2014/main" id="{BADECA91-63BB-45B3-A867-6C075E0CA80F}"/>
               </a:ext>
             </a:extLst>
           </p:cNvPr>
@@ -10970,7 +10970,7 @@
           <p:cNvPr id="2" name="">
             <a:extLst xmlns:a="http://schemas.openxmlformats.org/drawingml/2006/main">
               <a:ext uri="{FF2B5EF4-FFF2-40B4-BE49-F238E27FC236}">
-                <a16:creationId xmlns:a16="http://schemas.microsoft.com/office/drawing/2014/main" id="{F2AD6843-8BAE-4AE8-9EB2-844B254FC135}"/>
+                <a16:creationId xmlns:a16="http://schemas.microsoft.com/office/drawing/2014/main" id="{20E6A6C0-E872-4582-BBBB-530F301CB8C6}"/>
               </a:ext>
             </a:extLst>
           </p:cNvPr>
@@ -11028,7 +11028,7 @@
           <p:cNvPr id="3" name="">
             <a:extLst xmlns:a="http://schemas.openxmlformats.org/drawingml/2006/main">
               <a:ext uri="{FF2B5EF4-FFF2-40B4-BE49-F238E27FC236}">
-                <a16:creationId xmlns:a16="http://schemas.microsoft.com/office/drawing/2014/main" id="{68D1F8D4-2FDA-40D0-B724-EE779F9FFBDC}"/>
+                <a16:creationId xmlns:a16="http://schemas.microsoft.com/office/drawing/2014/main" id="{69DB1232-433B-44AB-A587-FCF448D63203}"/>
               </a:ext>
             </a:extLst>
           </p:cNvPr>
@@ -11086,7 +11086,7 @@
           <p:cNvPr id="4" name="">
             <a:extLst xmlns:a="http://schemas.openxmlformats.org/drawingml/2006/main">
               <a:ext uri="{FF2B5EF4-FFF2-40B4-BE49-F238E27FC236}">
-                <a16:creationId xmlns:a16="http://schemas.microsoft.com/office/drawing/2014/main" id="{855D2540-F3E2-4B4A-8FEE-5DD61ED68B08}"/>
+                <a16:creationId xmlns:a16="http://schemas.microsoft.com/office/drawing/2014/main" id="{E4382FEF-509D-4958-BB5B-48C120EACF9F}"/>
               </a:ext>
             </a:extLst>
           </p:cNvPr>
@@ -11117,7 +11117,7 @@
           <p:cNvPr id="5" name="">
             <a:extLst xmlns:a="http://schemas.openxmlformats.org/drawingml/2006/main">
               <a:ext uri="{FF2B5EF4-FFF2-40B4-BE49-F238E27FC236}">
-                <a16:creationId xmlns:a16="http://schemas.microsoft.com/office/drawing/2014/main" id="{5F2FFA73-C1F6-4CEA-904D-4A6ECEA8A0BD}"/>
+                <a16:creationId xmlns:a16="http://schemas.microsoft.com/office/drawing/2014/main" id="{C885A8AE-0F0C-431B-B75D-8A712E1DF8F5}"/>
               </a:ext>
             </a:extLst>
           </p:cNvPr>
@@ -11175,7 +11175,7 @@
           <p:cNvPr id="6" name="">
             <a:extLst xmlns:a="http://schemas.openxmlformats.org/drawingml/2006/main">
               <a:ext uri="{FF2B5EF4-FFF2-40B4-BE49-F238E27FC236}">
-                <a16:creationId xmlns:a16="http://schemas.microsoft.com/office/drawing/2014/main" id="{605FEDB6-6205-4335-A70E-E4C059D7AAB5}"/>
+                <a16:creationId xmlns:a16="http://schemas.microsoft.com/office/drawing/2014/main" id="{EC5D7D92-984C-41C7-84DF-BCA00FA3986D}"/>
               </a:ext>
             </a:extLst>
           </p:cNvPr>
@@ -11233,7 +11233,7 @@
           <p:cNvPr id="7" name="">
             <a:extLst xmlns:a="http://schemas.openxmlformats.org/drawingml/2006/main">
               <a:ext uri="{FF2B5EF4-FFF2-40B4-BE49-F238E27FC236}">
-                <a16:creationId xmlns:a16="http://schemas.microsoft.com/office/drawing/2014/main" id="{EBC55C5F-8BC4-41D1-B86F-D1BD10A27088}"/>
+                <a16:creationId xmlns:a16="http://schemas.microsoft.com/office/drawing/2014/main" id="{499D7A65-4A4B-42A6-80EA-06E315D08DC2}"/>
               </a:ext>
             </a:extLst>
           </p:cNvPr>
@@ -11291,7 +11291,7 @@
           <p:cNvPr id="8" name="">
             <a:extLst xmlns:a="http://schemas.openxmlformats.org/drawingml/2006/main">
               <a:ext uri="{FF2B5EF4-FFF2-40B4-BE49-F238E27FC236}">
-                <a16:creationId xmlns:a16="http://schemas.microsoft.com/office/drawing/2014/main" id="{4DB32E3E-DEEE-41AE-A51B-4453CFFCD5E7}"/>
+                <a16:creationId xmlns:a16="http://schemas.microsoft.com/office/drawing/2014/main" id="{E53E0768-37EC-4B3E-872E-993CBD9D3553}"/>
               </a:ext>
             </a:extLst>
           </p:cNvPr>
@@ -11326,7 +11326,7 @@
           <p:cNvPr id="9" name="">
             <a:extLst xmlns:a="http://schemas.openxmlformats.org/drawingml/2006/main">
               <a:ext uri="{FF2B5EF4-FFF2-40B4-BE49-F238E27FC236}">
-                <a16:creationId xmlns:a16="http://schemas.microsoft.com/office/drawing/2014/main" id="{6880573D-4CD9-4AA7-B32C-9C472EE0D28A}"/>
+                <a16:creationId xmlns:a16="http://schemas.microsoft.com/office/drawing/2014/main" id="{A92EA13D-A6A6-4487-8926-3C11D9774894}"/>
               </a:ext>
             </a:extLst>
           </p:cNvPr>
@@ -11359,7 +11359,7 @@
           <p:cNvPr id="10" name="">
             <a:extLst xmlns:a="http://schemas.openxmlformats.org/drawingml/2006/main">
               <a:ext uri="{FF2B5EF4-FFF2-40B4-BE49-F238E27FC236}">
-                <a16:creationId xmlns:a16="http://schemas.microsoft.com/office/drawing/2014/main" id="{B3803E82-FE88-4E25-B352-8C9F2200587A}"/>
+                <a16:creationId xmlns:a16="http://schemas.microsoft.com/office/drawing/2014/main" id="{4839548A-5EF0-430B-BC21-56E7C6761258}"/>
               </a:ext>
             </a:extLst>
           </p:cNvPr>
@@ -11417,7 +11417,7 @@
           <p:cNvPr id="11" name="">
             <a:extLst xmlns:a="http://schemas.openxmlformats.org/drawingml/2006/main">
               <a:ext uri="{FF2B5EF4-FFF2-40B4-BE49-F238E27FC236}">
-                <a16:creationId xmlns:a16="http://schemas.microsoft.com/office/drawing/2014/main" id="{DD341D53-A292-431A-9692-A8635B7D3AD3}"/>
+                <a16:creationId xmlns:a16="http://schemas.microsoft.com/office/drawing/2014/main" id="{81D57C3C-791F-4136-8D68-97254BBF3FBA}"/>
               </a:ext>
             </a:extLst>
           </p:cNvPr>
@@ -11544,7 +11544,7 @@
           <p:cNvPr id="12" name="">
             <a:extLst xmlns:a="http://schemas.openxmlformats.org/drawingml/2006/main">
               <a:ext uri="{FF2B5EF4-FFF2-40B4-BE49-F238E27FC236}">
-                <a16:creationId xmlns:a16="http://schemas.microsoft.com/office/drawing/2014/main" id="{1E1EAA5F-7DE2-4FAC-A812-9F6B00634888}"/>
+                <a16:creationId xmlns:a16="http://schemas.microsoft.com/office/drawing/2014/main" id="{374A2C4A-256F-4FB5-9C38-0A67FBF4051A}"/>
               </a:ext>
             </a:extLst>
           </p:cNvPr>
@@ -11579,7 +11579,7 @@
           <p:cNvPr id="13" name="">
             <a:extLst xmlns:a="http://schemas.openxmlformats.org/drawingml/2006/main">
               <a:ext uri="{FF2B5EF4-FFF2-40B4-BE49-F238E27FC236}">
-                <a16:creationId xmlns:a16="http://schemas.microsoft.com/office/drawing/2014/main" id="{70446788-B222-447D-99BE-ED4301221CF7}"/>
+                <a16:creationId xmlns:a16="http://schemas.microsoft.com/office/drawing/2014/main" id="{881A50DD-1A9A-4361-8898-076CDE52224A}"/>
               </a:ext>
             </a:extLst>
           </p:cNvPr>
@@ -11612,7 +11612,7 @@
           <p:cNvPr id="14" name="">
             <a:extLst xmlns:a="http://schemas.openxmlformats.org/drawingml/2006/main">
               <a:ext uri="{FF2B5EF4-FFF2-40B4-BE49-F238E27FC236}">
-                <a16:creationId xmlns:a16="http://schemas.microsoft.com/office/drawing/2014/main" id="{68B3DE5F-56A4-4476-B00F-88D2BA721898}"/>
+                <a16:creationId xmlns:a16="http://schemas.microsoft.com/office/drawing/2014/main" id="{D4D50252-8DE7-4CBD-A7D8-F52991030AC3}"/>
               </a:ext>
             </a:extLst>
           </p:cNvPr>
@@ -11670,7 +11670,7 @@
           <p:cNvPr id="15" name="">
             <a:extLst xmlns:a="http://schemas.openxmlformats.org/drawingml/2006/main">
               <a:ext uri="{FF2B5EF4-FFF2-40B4-BE49-F238E27FC236}">
-                <a16:creationId xmlns:a16="http://schemas.microsoft.com/office/drawing/2014/main" id="{01806089-643A-4CEC-8C73-FA3E97C7F540}"/>
+                <a16:creationId xmlns:a16="http://schemas.microsoft.com/office/drawing/2014/main" id="{6FBC034B-DD26-4D51-BE42-A1E268B5D90D}"/>
               </a:ext>
             </a:extLst>
           </p:cNvPr>
@@ -11797,7 +11797,7 @@
           <p:cNvPr id="16" name="">
             <a:extLst xmlns:a="http://schemas.openxmlformats.org/drawingml/2006/main">
               <a:ext uri="{FF2B5EF4-FFF2-40B4-BE49-F238E27FC236}">
-                <a16:creationId xmlns:a16="http://schemas.microsoft.com/office/drawing/2014/main" id="{A59F1BFE-16D4-4D34-A387-BA91174C56E5}"/>
+                <a16:creationId xmlns:a16="http://schemas.microsoft.com/office/drawing/2014/main" id="{55B81E77-2EFA-4CA3-96CD-B6E36062B55E}"/>
               </a:ext>
             </a:extLst>
           </p:cNvPr>
@@ -11832,7 +11832,7 @@
           <p:cNvPr id="17" name="">
             <a:extLst xmlns:a="http://schemas.openxmlformats.org/drawingml/2006/main">
               <a:ext uri="{FF2B5EF4-FFF2-40B4-BE49-F238E27FC236}">
-                <a16:creationId xmlns:a16="http://schemas.microsoft.com/office/drawing/2014/main" id="{5EF5AD3F-B2F3-4D45-BE5D-7ABFAE95E68A}"/>
+                <a16:creationId xmlns:a16="http://schemas.microsoft.com/office/drawing/2014/main" id="{A2520B1F-1A34-4312-92DA-E8DBEB7F0D07}"/>
               </a:ext>
             </a:extLst>
           </p:cNvPr>
@@ -11865,7 +11865,7 @@
           <p:cNvPr id="18" name="">
             <a:extLst xmlns:a="http://schemas.openxmlformats.org/drawingml/2006/main">
               <a:ext uri="{FF2B5EF4-FFF2-40B4-BE49-F238E27FC236}">
-                <a16:creationId xmlns:a16="http://schemas.microsoft.com/office/drawing/2014/main" id="{00AF7FDD-3D95-4FFB-83EC-7651C0BCB02E}"/>
+                <a16:creationId xmlns:a16="http://schemas.microsoft.com/office/drawing/2014/main" id="{4E373DC6-B892-430D-A297-FBF2A9440EBA}"/>
               </a:ext>
             </a:extLst>
           </p:cNvPr>
@@ -11923,7 +11923,7 @@
           <p:cNvPr id="19" name="">
             <a:extLst xmlns:a="http://schemas.openxmlformats.org/drawingml/2006/main">
               <a:ext uri="{FF2B5EF4-FFF2-40B4-BE49-F238E27FC236}">
-                <a16:creationId xmlns:a16="http://schemas.microsoft.com/office/drawing/2014/main" id="{2E7CDBF7-40C1-4DB8-BDA8-89EB9979C7CB}"/>
+                <a16:creationId xmlns:a16="http://schemas.microsoft.com/office/drawing/2014/main" id="{76BC6079-AF6A-4EA0-97A4-727818556363}"/>
               </a:ext>
             </a:extLst>
           </p:cNvPr>
@@ -12050,7 +12050,7 @@
           <p:cNvPr id="20" name="">
             <a:extLst xmlns:a="http://schemas.openxmlformats.org/drawingml/2006/main">
               <a:ext uri="{FF2B5EF4-FFF2-40B4-BE49-F238E27FC236}">
-                <a16:creationId xmlns:a16="http://schemas.microsoft.com/office/drawing/2014/main" id="{502B9942-1026-4C46-949E-7F93CDBDE559}"/>
+                <a16:creationId xmlns:a16="http://schemas.microsoft.com/office/drawing/2014/main" id="{EF7148CE-1503-4B53-91D0-90666EC53937}"/>
               </a:ext>
             </a:extLst>
           </p:cNvPr>
@@ -12106,7 +12106,7 @@
     </p:spTree>
     <p:extLst>
       <p:ext uri="{BB962C8B-B14F-4D97-AF65-F5344CB8AC3E}">
-        <p14:creationId xmlns:p14="http://schemas.microsoft.com/office/powerpoint/2010/main" val="529710818"/>
+        <p14:creationId xmlns:p14="http://schemas.microsoft.com/office/powerpoint/2010/main" val="1274663631"/>
       </p:ext>
     </p:extLst>
   </p:cSld>
@@ -12137,7 +12137,7 @@
           <p:cNvPr id="30" name="">
             <a:extLst xmlns:a="http://schemas.openxmlformats.org/drawingml/2006/main">
               <a:ext uri="{FF2B5EF4-FFF2-40B4-BE49-F238E27FC236}">
-                <a16:creationId xmlns:a16="http://schemas.microsoft.com/office/drawing/2014/main" id="{F85549C2-83A9-4A3F-805E-DA2390E1474F}"/>
+                <a16:creationId xmlns:a16="http://schemas.microsoft.com/office/drawing/2014/main" id="{9E55FEBE-F58B-4AAC-AD75-98F4D9933BA7}"/>
               </a:ext>
             </a:extLst>
           </p:cNvPr>
@@ -12168,7 +12168,7 @@
           <p:cNvPr id="2" name="">
             <a:extLst xmlns:a="http://schemas.openxmlformats.org/drawingml/2006/main">
               <a:ext uri="{FF2B5EF4-FFF2-40B4-BE49-F238E27FC236}">
-                <a16:creationId xmlns:a16="http://schemas.microsoft.com/office/drawing/2014/main" id="{83A73DD7-97A5-4A59-91A5-175EEBB95F1C}"/>
+                <a16:creationId xmlns:a16="http://schemas.microsoft.com/office/drawing/2014/main" id="{8EB72483-FC68-4C83-BDE1-30B6B4BFB216}"/>
               </a:ext>
             </a:extLst>
           </p:cNvPr>
@@ -12226,7 +12226,7 @@
           <p:cNvPr id="3" name="">
             <a:extLst xmlns:a="http://schemas.openxmlformats.org/drawingml/2006/main">
               <a:ext uri="{FF2B5EF4-FFF2-40B4-BE49-F238E27FC236}">
-                <a16:creationId xmlns:a16="http://schemas.microsoft.com/office/drawing/2014/main" id="{798E219A-FAC0-4225-ACB7-DF78B6E7305F}"/>
+                <a16:creationId xmlns:a16="http://schemas.microsoft.com/office/drawing/2014/main" id="{9CF826AF-98C6-4B08-9193-A42A11071604}"/>
               </a:ext>
             </a:extLst>
           </p:cNvPr>
@@ -12284,7 +12284,7 @@
           <p:cNvPr id="4" name="">
             <a:extLst xmlns:a="http://schemas.openxmlformats.org/drawingml/2006/main">
               <a:ext uri="{FF2B5EF4-FFF2-40B4-BE49-F238E27FC236}">
-                <a16:creationId xmlns:a16="http://schemas.microsoft.com/office/drawing/2014/main" id="{3E0B0145-6084-4993-9FBB-752DF8D3A0C8}"/>
+                <a16:creationId xmlns:a16="http://schemas.microsoft.com/office/drawing/2014/main" id="{D76D5D16-D7B3-4689-9B40-0BB83206D172}"/>
               </a:ext>
             </a:extLst>
           </p:cNvPr>
@@ -12315,7 +12315,7 @@
           <p:cNvPr id="5" name="">
             <a:extLst xmlns:a="http://schemas.openxmlformats.org/drawingml/2006/main">
               <a:ext uri="{FF2B5EF4-FFF2-40B4-BE49-F238E27FC236}">
-                <a16:creationId xmlns:a16="http://schemas.microsoft.com/office/drawing/2014/main" id="{0821C0D1-35BF-4978-87A1-79EAE9AFBABD}"/>
+                <a16:creationId xmlns:a16="http://schemas.microsoft.com/office/drawing/2014/main" id="{A80747BC-9918-4729-9031-595A912D2E31}"/>
               </a:ext>
             </a:extLst>
           </p:cNvPr>
@@ -12373,7 +12373,7 @@
           <p:cNvPr id="6" name="">
             <a:extLst xmlns:a="http://schemas.openxmlformats.org/drawingml/2006/main">
               <a:ext uri="{FF2B5EF4-FFF2-40B4-BE49-F238E27FC236}">
-                <a16:creationId xmlns:a16="http://schemas.microsoft.com/office/drawing/2014/main" id="{1F817291-E8E9-493C-BA98-DD5E89E2943F}"/>
+                <a16:creationId xmlns:a16="http://schemas.microsoft.com/office/drawing/2014/main" id="{AF8F51D7-427A-4666-A1F1-11C1EE7F75B7}"/>
               </a:ext>
             </a:extLst>
           </p:cNvPr>
@@ -12431,7 +12431,7 @@
           <p:cNvPr id="7" name="">
             <a:extLst xmlns:a="http://schemas.openxmlformats.org/drawingml/2006/main">
               <a:ext uri="{FF2B5EF4-FFF2-40B4-BE49-F238E27FC236}">
-                <a16:creationId xmlns:a16="http://schemas.microsoft.com/office/drawing/2014/main" id="{24A765B6-B1D8-40B3-BB68-283ABD66B236}"/>
+                <a16:creationId xmlns:a16="http://schemas.microsoft.com/office/drawing/2014/main" id="{44BCCD07-0AB4-42C8-A12A-95C2C3FA25CA}"/>
               </a:ext>
             </a:extLst>
           </p:cNvPr>
@@ -12489,7 +12489,7 @@
           <p:cNvPr id="8" name="">
             <a:extLst xmlns:a="http://schemas.openxmlformats.org/drawingml/2006/main">
               <a:ext uri="{FF2B5EF4-FFF2-40B4-BE49-F238E27FC236}">
-                <a16:creationId xmlns:a16="http://schemas.microsoft.com/office/drawing/2014/main" id="{DCC3895B-5579-4E35-A19A-EEA01C7272DD}"/>
+                <a16:creationId xmlns:a16="http://schemas.microsoft.com/office/drawing/2014/main" id="{3CC0BB7B-7B31-46C2-A55F-ED7C9AD2B3E4}"/>
               </a:ext>
             </a:extLst>
           </p:cNvPr>
@@ -12547,7 +12547,7 @@
           <p:cNvPr id="9" name="">
             <a:extLst xmlns:a="http://schemas.openxmlformats.org/drawingml/2006/main">
               <a:ext uri="{FF2B5EF4-FFF2-40B4-BE49-F238E27FC236}">
-                <a16:creationId xmlns:a16="http://schemas.microsoft.com/office/drawing/2014/main" id="{083322A9-0D82-4779-8107-202E83589212}"/>
+                <a16:creationId xmlns:a16="http://schemas.microsoft.com/office/drawing/2014/main" id="{9862E9EC-B4DF-4001-BBED-034C5DAE8A23}"/>
               </a:ext>
             </a:extLst>
           </p:cNvPr>
@@ -12605,7 +12605,7 @@
           <p:cNvPr id="10" name="">
             <a:extLst xmlns:a="http://schemas.openxmlformats.org/drawingml/2006/main">
               <a:ext uri="{FF2B5EF4-FFF2-40B4-BE49-F238E27FC236}">
-                <a16:creationId xmlns:a16="http://schemas.microsoft.com/office/drawing/2014/main" id="{6F1FFBAF-46D7-4389-936E-AC8ECAE1E1A5}"/>
+                <a16:creationId xmlns:a16="http://schemas.microsoft.com/office/drawing/2014/main" id="{E6445B7C-41EE-4314-A2AA-19A3A744C80D}"/>
               </a:ext>
             </a:extLst>
           </p:cNvPr>
@@ -12640,7 +12640,7 @@
           <p:cNvPr id="11" name="">
             <a:extLst xmlns:a="http://schemas.openxmlformats.org/drawingml/2006/main">
               <a:ext uri="{FF2B5EF4-FFF2-40B4-BE49-F238E27FC236}">
-                <a16:creationId xmlns:a16="http://schemas.microsoft.com/office/drawing/2014/main" id="{5AE44206-EA84-460D-92C0-BC8FD3E18301}"/>
+                <a16:creationId xmlns:a16="http://schemas.microsoft.com/office/drawing/2014/main" id="{2033DC6C-A903-445B-8227-7E0D7D1277FD}"/>
               </a:ext>
             </a:extLst>
           </p:cNvPr>
@@ -12702,7 +12702,7 @@
           <p:cNvPr id="12" name="">
             <a:extLst xmlns:a="http://schemas.openxmlformats.org/drawingml/2006/main">
               <a:ext uri="{FF2B5EF4-FFF2-40B4-BE49-F238E27FC236}">
-                <a16:creationId xmlns:a16="http://schemas.microsoft.com/office/drawing/2014/main" id="{1EE31592-504C-4DF4-AFB2-5E665846D70D}"/>
+                <a16:creationId xmlns:a16="http://schemas.microsoft.com/office/drawing/2014/main" id="{B26C8B01-2FE7-4285-8328-29DC8272F85F}"/>
               </a:ext>
             </a:extLst>
           </p:cNvPr>
@@ -12760,7 +12760,7 @@
           <p:cNvPr id="13" name="">
             <a:extLst xmlns:a="http://schemas.openxmlformats.org/drawingml/2006/main">
               <a:ext uri="{FF2B5EF4-FFF2-40B4-BE49-F238E27FC236}">
-                <a16:creationId xmlns:a16="http://schemas.microsoft.com/office/drawing/2014/main" id="{32DC913B-35C8-44F4-8A94-6CBDF12E58B2}"/>
+                <a16:creationId xmlns:a16="http://schemas.microsoft.com/office/drawing/2014/main" id="{42172896-DA83-4286-B49C-0DEFD8CFE52B}"/>
               </a:ext>
             </a:extLst>
           </p:cNvPr>
@@ -12818,7 +12818,7 @@
           <p:cNvPr id="14" name="">
             <a:extLst xmlns:a="http://schemas.openxmlformats.org/drawingml/2006/main">
               <a:ext uri="{FF2B5EF4-FFF2-40B4-BE49-F238E27FC236}">
-                <a16:creationId xmlns:a16="http://schemas.microsoft.com/office/drawing/2014/main" id="{9EB34103-4E46-4392-AD52-C5AEA658C721}"/>
+                <a16:creationId xmlns:a16="http://schemas.microsoft.com/office/drawing/2014/main" id="{A67CC005-0154-4F9C-9109-9669AFD0749C}"/>
               </a:ext>
             </a:extLst>
           </p:cNvPr>
@@ -12876,7 +12876,7 @@
           <p:cNvPr id="15" name="">
             <a:extLst xmlns:a="http://schemas.openxmlformats.org/drawingml/2006/main">
               <a:ext uri="{FF2B5EF4-FFF2-40B4-BE49-F238E27FC236}">
-                <a16:creationId xmlns:a16="http://schemas.microsoft.com/office/drawing/2014/main" id="{39F6ECE6-FFF1-480F-8993-4F2EE141AB49}"/>
+                <a16:creationId xmlns:a16="http://schemas.microsoft.com/office/drawing/2014/main" id="{C7F2C7DD-792A-4B22-BB24-0016DBD94D8E}"/>
               </a:ext>
             </a:extLst>
           </p:cNvPr>
@@ -12911,7 +12911,7 @@
           <p:cNvPr id="16" name="">
             <a:extLst xmlns:a="http://schemas.openxmlformats.org/drawingml/2006/main">
               <a:ext uri="{FF2B5EF4-FFF2-40B4-BE49-F238E27FC236}">
-                <a16:creationId xmlns:a16="http://schemas.microsoft.com/office/drawing/2014/main" id="{D4C88A35-AAC8-467F-85F0-2D017DD0B64E}"/>
+                <a16:creationId xmlns:a16="http://schemas.microsoft.com/office/drawing/2014/main" id="{8B1DD453-D437-488A-844A-0DFAE1D80146}"/>
               </a:ext>
             </a:extLst>
           </p:cNvPr>
@@ -12973,7 +12973,7 @@
           <p:cNvPr id="17" name="">
             <a:extLst xmlns:a="http://schemas.openxmlformats.org/drawingml/2006/main">
               <a:ext uri="{FF2B5EF4-FFF2-40B4-BE49-F238E27FC236}">
-                <a16:creationId xmlns:a16="http://schemas.microsoft.com/office/drawing/2014/main" id="{4054CED6-352A-4925-B734-1BA5306714DC}"/>
+                <a16:creationId xmlns:a16="http://schemas.microsoft.com/office/drawing/2014/main" id="{80B246BD-C983-4107-A945-854000568AE6}"/>
               </a:ext>
             </a:extLst>
           </p:cNvPr>
@@ -13031,7 +13031,7 @@
           <p:cNvPr id="18" name="">
             <a:extLst xmlns:a="http://schemas.openxmlformats.org/drawingml/2006/main">
               <a:ext uri="{FF2B5EF4-FFF2-40B4-BE49-F238E27FC236}">
-                <a16:creationId xmlns:a16="http://schemas.microsoft.com/office/drawing/2014/main" id="{2B667ED6-734C-4313-9119-97C311C87987}"/>
+                <a16:creationId xmlns:a16="http://schemas.microsoft.com/office/drawing/2014/main" id="{87D0211B-066C-49F6-8025-2D2C47CE72C2}"/>
               </a:ext>
             </a:extLst>
           </p:cNvPr>
@@ -13089,7 +13089,7 @@
           <p:cNvPr id="19" name="">
             <a:extLst xmlns:a="http://schemas.openxmlformats.org/drawingml/2006/main">
               <a:ext uri="{FF2B5EF4-FFF2-40B4-BE49-F238E27FC236}">
-                <a16:creationId xmlns:a16="http://schemas.microsoft.com/office/drawing/2014/main" id="{99CCE8C3-2328-42C3-A9B3-4DC5C79E27AD}"/>
+                <a16:creationId xmlns:a16="http://schemas.microsoft.com/office/drawing/2014/main" id="{76424AAA-F4E2-4EFA-B925-5BEECBEAC1BA}"/>
               </a:ext>
             </a:extLst>
           </p:cNvPr>
@@ -13147,7 +13147,7 @@
           <p:cNvPr id="20" name="">
             <a:extLst xmlns:a="http://schemas.openxmlformats.org/drawingml/2006/main">
               <a:ext uri="{FF2B5EF4-FFF2-40B4-BE49-F238E27FC236}">
-                <a16:creationId xmlns:a16="http://schemas.microsoft.com/office/drawing/2014/main" id="{78F943B3-CDB4-4575-9F83-0F69513E67F0}"/>
+                <a16:creationId xmlns:a16="http://schemas.microsoft.com/office/drawing/2014/main" id="{F69E45B0-2DE0-4E19-9F1A-A5858E17C933}"/>
               </a:ext>
             </a:extLst>
           </p:cNvPr>
@@ -13182,7 +13182,7 @@
           <p:cNvPr id="21" name="">
             <a:extLst xmlns:a="http://schemas.openxmlformats.org/drawingml/2006/main">
               <a:ext uri="{FF2B5EF4-FFF2-40B4-BE49-F238E27FC236}">
-                <a16:creationId xmlns:a16="http://schemas.microsoft.com/office/drawing/2014/main" id="{A3A11FEC-B0F0-42C2-AC5B-81EACDA5DCA8}"/>
+                <a16:creationId xmlns:a16="http://schemas.microsoft.com/office/drawing/2014/main" id="{05A65E49-9706-41E8-8DA1-633351459C82}"/>
               </a:ext>
             </a:extLst>
           </p:cNvPr>
@@ -13244,7 +13244,7 @@
           <p:cNvPr id="22" name="">
             <a:extLst xmlns:a="http://schemas.openxmlformats.org/drawingml/2006/main">
               <a:ext uri="{FF2B5EF4-FFF2-40B4-BE49-F238E27FC236}">
-                <a16:creationId xmlns:a16="http://schemas.microsoft.com/office/drawing/2014/main" id="{75BF8828-07DD-435D-9860-E69215AEE8CF}"/>
+                <a16:creationId xmlns:a16="http://schemas.microsoft.com/office/drawing/2014/main" id="{23DE4502-4921-4BC5-8549-828393A52C44}"/>
               </a:ext>
             </a:extLst>
           </p:cNvPr>
@@ -13302,7 +13302,7 @@
           <p:cNvPr id="23" name="">
             <a:extLst xmlns:a="http://schemas.openxmlformats.org/drawingml/2006/main">
               <a:ext uri="{FF2B5EF4-FFF2-40B4-BE49-F238E27FC236}">
-                <a16:creationId xmlns:a16="http://schemas.microsoft.com/office/drawing/2014/main" id="{A50786BF-5761-475B-AC81-A97D09BBB45F}"/>
+                <a16:creationId xmlns:a16="http://schemas.microsoft.com/office/drawing/2014/main" id="{9942FB7A-BB90-4DE7-8944-9A6D6912690D}"/>
               </a:ext>
             </a:extLst>
           </p:cNvPr>
@@ -13360,7 +13360,7 @@
           <p:cNvPr id="24" name="">
             <a:extLst xmlns:a="http://schemas.openxmlformats.org/drawingml/2006/main">
               <a:ext uri="{FF2B5EF4-FFF2-40B4-BE49-F238E27FC236}">
-                <a16:creationId xmlns:a16="http://schemas.microsoft.com/office/drawing/2014/main" id="{BC8744FB-D7F1-4680-A4DA-D966C3294DD1}"/>
+                <a16:creationId xmlns:a16="http://schemas.microsoft.com/office/drawing/2014/main" id="{F4C2A34B-1D6E-41C4-8D8B-AEF68F6985EF}"/>
               </a:ext>
             </a:extLst>
           </p:cNvPr>
@@ -13418,7 +13418,7 @@
           <p:cNvPr id="25" name="">
             <a:extLst xmlns:a="http://schemas.openxmlformats.org/drawingml/2006/main">
               <a:ext uri="{FF2B5EF4-FFF2-40B4-BE49-F238E27FC236}">
-                <a16:creationId xmlns:a16="http://schemas.microsoft.com/office/drawing/2014/main" id="{CAD80AEC-A503-4FBF-82E8-AEE1CFA03832}"/>
+                <a16:creationId xmlns:a16="http://schemas.microsoft.com/office/drawing/2014/main" id="{130EEC8C-EDF6-4F27-B8DF-97E9BF7B43A5}"/>
               </a:ext>
             </a:extLst>
           </p:cNvPr>
@@ -13453,7 +13453,7 @@
           <p:cNvPr id="26" name="">
             <a:extLst xmlns:a="http://schemas.openxmlformats.org/drawingml/2006/main">
               <a:ext uri="{FF2B5EF4-FFF2-40B4-BE49-F238E27FC236}">
-                <a16:creationId xmlns:a16="http://schemas.microsoft.com/office/drawing/2014/main" id="{53995BBE-03A1-4FBF-B0A7-70F2124918BB}"/>
+                <a16:creationId xmlns:a16="http://schemas.microsoft.com/office/drawing/2014/main" id="{2D74D735-2363-45CE-AB83-FAE48AA07895}"/>
               </a:ext>
             </a:extLst>
           </p:cNvPr>
@@ -13515,7 +13515,7 @@
           <p:cNvPr id="27" name="">
             <a:extLst xmlns:a="http://schemas.openxmlformats.org/drawingml/2006/main">
               <a:ext uri="{FF2B5EF4-FFF2-40B4-BE49-F238E27FC236}">
-                <a16:creationId xmlns:a16="http://schemas.microsoft.com/office/drawing/2014/main" id="{D23BEDDC-A25B-4A0B-A0BA-75711253C6C7}"/>
+                <a16:creationId xmlns:a16="http://schemas.microsoft.com/office/drawing/2014/main" id="{333AE946-990D-4751-9547-269478614A25}"/>
               </a:ext>
             </a:extLst>
           </p:cNvPr>
@@ -13573,7 +13573,7 @@
           <p:cNvPr id="28" name="">
             <a:extLst xmlns:a="http://schemas.openxmlformats.org/drawingml/2006/main">
               <a:ext uri="{FF2B5EF4-FFF2-40B4-BE49-F238E27FC236}">
-                <a16:creationId xmlns:a16="http://schemas.microsoft.com/office/drawing/2014/main" id="{7D50A358-6A3A-4B07-A259-13CE0D1EECA1}"/>
+                <a16:creationId xmlns:a16="http://schemas.microsoft.com/office/drawing/2014/main" id="{41C1C927-0878-43B4-ADDB-1B79FBBD2F30}"/>
               </a:ext>
             </a:extLst>
           </p:cNvPr>
@@ -13631,7 +13631,7 @@
           <p:cNvPr id="29" name="">
             <a:extLst xmlns:a="http://schemas.openxmlformats.org/drawingml/2006/main">
               <a:ext uri="{FF2B5EF4-FFF2-40B4-BE49-F238E27FC236}">
-                <a16:creationId xmlns:a16="http://schemas.microsoft.com/office/drawing/2014/main" id="{67ECDE13-127F-4E35-A4AD-E06E48935110}"/>
+                <a16:creationId xmlns:a16="http://schemas.microsoft.com/office/drawing/2014/main" id="{A80448F3-6B30-4A33-B996-A639A31EA7BC}"/>
               </a:ext>
             </a:extLst>
           </p:cNvPr>
@@ -13691,7 +13691,7 @@
     </p:spTree>
     <p:extLst>
       <p:ext uri="{BB962C8B-B14F-4D97-AF65-F5344CB8AC3E}">
-        <p14:creationId xmlns:p14="http://schemas.microsoft.com/office/powerpoint/2010/main" val="2144320705"/>
+        <p14:creationId xmlns:p14="http://schemas.microsoft.com/office/powerpoint/2010/main" val="229293823"/>
       </p:ext>
     </p:extLst>
   </p:cSld>
@@ -13722,7 +13722,7 @@
           <p:cNvPr id="40" name="">
             <a:extLst xmlns:a="http://schemas.openxmlformats.org/drawingml/2006/main">
               <a:ext uri="{FF2B5EF4-FFF2-40B4-BE49-F238E27FC236}">
-                <a16:creationId xmlns:a16="http://schemas.microsoft.com/office/drawing/2014/main" id="{FB0A10C0-F283-4F11-9C98-82513DA2E6D1}"/>
+                <a16:creationId xmlns:a16="http://schemas.microsoft.com/office/drawing/2014/main" id="{DAEA1149-DC17-4161-A866-AAB2F8DB034D}"/>
               </a:ext>
             </a:extLst>
           </p:cNvPr>
@@ -13753,7 +13753,7 @@
           <p:cNvPr id="2" name="">
             <a:extLst xmlns:a="http://schemas.openxmlformats.org/drawingml/2006/main">
               <a:ext uri="{FF2B5EF4-FFF2-40B4-BE49-F238E27FC236}">
-                <a16:creationId xmlns:a16="http://schemas.microsoft.com/office/drawing/2014/main" id="{53C49ED2-5797-4388-912B-551D33DEA3A9}"/>
+                <a16:creationId xmlns:a16="http://schemas.microsoft.com/office/drawing/2014/main" id="{6899B20B-E37B-41B7-9BDB-4E5C7CBBD11B}"/>
               </a:ext>
             </a:extLst>
           </p:cNvPr>
@@ -13811,7 +13811,7 @@
           <p:cNvPr id="3" name="">
             <a:extLst xmlns:a="http://schemas.openxmlformats.org/drawingml/2006/main">
               <a:ext uri="{FF2B5EF4-FFF2-40B4-BE49-F238E27FC236}">
-                <a16:creationId xmlns:a16="http://schemas.microsoft.com/office/drawing/2014/main" id="{805A9D68-C429-4BB1-A3EF-CF13142508D3}"/>
+                <a16:creationId xmlns:a16="http://schemas.microsoft.com/office/drawing/2014/main" id="{8D14A10B-97F1-4218-9756-C4F30A4FC67D}"/>
               </a:ext>
             </a:extLst>
           </p:cNvPr>
@@ -13869,7 +13869,7 @@
           <p:cNvPr id="4" name="">
             <a:extLst xmlns:a="http://schemas.openxmlformats.org/drawingml/2006/main">
               <a:ext uri="{FF2B5EF4-FFF2-40B4-BE49-F238E27FC236}">
-                <a16:creationId xmlns:a16="http://schemas.microsoft.com/office/drawing/2014/main" id="{AC2445A2-459B-458E-95E1-B4329C4DEB76}"/>
+                <a16:creationId xmlns:a16="http://schemas.microsoft.com/office/drawing/2014/main" id="{CD4E5EF6-E2BD-45F7-8F98-989A1F236CAD}"/>
               </a:ext>
             </a:extLst>
           </p:cNvPr>
@@ -13900,7 +13900,7 @@
           <p:cNvPr id="5" name="">
             <a:extLst xmlns:a="http://schemas.openxmlformats.org/drawingml/2006/main">
               <a:ext uri="{FF2B5EF4-FFF2-40B4-BE49-F238E27FC236}">
-                <a16:creationId xmlns:a16="http://schemas.microsoft.com/office/drawing/2014/main" id="{F3044564-5BBE-4CBE-ABB9-67B03DA098F9}"/>
+                <a16:creationId xmlns:a16="http://schemas.microsoft.com/office/drawing/2014/main" id="{D1D869C8-C583-4CF9-B8FC-E6FF57C9830D}"/>
               </a:ext>
             </a:extLst>
           </p:cNvPr>
@@ -13958,7 +13958,7 @@
           <p:cNvPr id="6" name="">
             <a:extLst xmlns:a="http://schemas.openxmlformats.org/drawingml/2006/main">
               <a:ext uri="{FF2B5EF4-FFF2-40B4-BE49-F238E27FC236}">
-                <a16:creationId xmlns:a16="http://schemas.microsoft.com/office/drawing/2014/main" id="{38C5A70D-562F-4ADC-BB3F-B3611D9F9976}"/>
+                <a16:creationId xmlns:a16="http://schemas.microsoft.com/office/drawing/2014/main" id="{A5E5AC28-848C-4F39-A70E-646AC6EAF5D1}"/>
               </a:ext>
             </a:extLst>
           </p:cNvPr>
@@ -14016,7 +14016,7 @@
           <p:cNvPr id="7" name="">
             <a:extLst xmlns:a="http://schemas.openxmlformats.org/drawingml/2006/main">
               <a:ext uri="{FF2B5EF4-FFF2-40B4-BE49-F238E27FC236}">
-                <a16:creationId xmlns:a16="http://schemas.microsoft.com/office/drawing/2014/main" id="{4F3CE634-4749-40AF-B43A-909C5223615C}"/>
+                <a16:creationId xmlns:a16="http://schemas.microsoft.com/office/drawing/2014/main" id="{F7176DDF-805B-4D7A-8208-51FF1945E6ED}"/>
               </a:ext>
             </a:extLst>
           </p:cNvPr>
@@ -14074,7 +14074,7 @@
           <p:cNvPr id="8" name="">
             <a:extLst xmlns:a="http://schemas.openxmlformats.org/drawingml/2006/main">
               <a:ext uri="{FF2B5EF4-FFF2-40B4-BE49-F238E27FC236}">
-                <a16:creationId xmlns:a16="http://schemas.microsoft.com/office/drawing/2014/main" id="{25C74A03-3764-41C1-8EF2-2DD41399945C}"/>
+                <a16:creationId xmlns:a16="http://schemas.microsoft.com/office/drawing/2014/main" id="{FFF1DC1E-234E-45D8-9B3E-3194E02B5A7B}"/>
               </a:ext>
             </a:extLst>
           </p:cNvPr>
@@ -14109,7 +14109,7 @@
           <p:cNvPr id="9" name="">
             <a:extLst xmlns:a="http://schemas.openxmlformats.org/drawingml/2006/main">
               <a:ext uri="{FF2B5EF4-FFF2-40B4-BE49-F238E27FC236}">
-                <a16:creationId xmlns:a16="http://schemas.microsoft.com/office/drawing/2014/main" id="{CFAC16B2-8813-4F0A-8581-BD8480D816A2}"/>
+                <a16:creationId xmlns:a16="http://schemas.microsoft.com/office/drawing/2014/main" id="{C0F5508F-8F03-4940-8261-1E33F247503F}"/>
               </a:ext>
             </a:extLst>
           </p:cNvPr>
@@ -14171,7 +14171,7 @@
           <p:cNvPr id="10" name="">
             <a:extLst xmlns:a="http://schemas.openxmlformats.org/drawingml/2006/main">
               <a:ext uri="{FF2B5EF4-FFF2-40B4-BE49-F238E27FC236}">
-                <a16:creationId xmlns:a16="http://schemas.microsoft.com/office/drawing/2014/main" id="{DB7CFE6B-5AB5-4224-B264-D3A5C3BEB856}"/>
+                <a16:creationId xmlns:a16="http://schemas.microsoft.com/office/drawing/2014/main" id="{04BFB195-5444-43F8-B77C-B8959297EA99}"/>
               </a:ext>
             </a:extLst>
           </p:cNvPr>
@@ -14229,7 +14229,7 @@
           <p:cNvPr id="11" name="">
             <a:extLst xmlns:a="http://schemas.openxmlformats.org/drawingml/2006/main">
               <a:ext uri="{FF2B5EF4-FFF2-40B4-BE49-F238E27FC236}">
-                <a16:creationId xmlns:a16="http://schemas.microsoft.com/office/drawing/2014/main" id="{DA121B4A-D2D8-4F24-9D72-C0265B81F1F3}"/>
+                <a16:creationId xmlns:a16="http://schemas.microsoft.com/office/drawing/2014/main" id="{9AB895F2-2E78-4E17-9C93-17DDAFE42C47}"/>
               </a:ext>
             </a:extLst>
           </p:cNvPr>
@@ -14287,7 +14287,7 @@
           <p:cNvPr id="12" name="">
             <a:extLst xmlns:a="http://schemas.openxmlformats.org/drawingml/2006/main">
               <a:ext uri="{FF2B5EF4-FFF2-40B4-BE49-F238E27FC236}">
-                <a16:creationId xmlns:a16="http://schemas.microsoft.com/office/drawing/2014/main" id="{7AA173CB-0AB0-4BC2-86DC-E8BE8A466FBC}"/>
+                <a16:creationId xmlns:a16="http://schemas.microsoft.com/office/drawing/2014/main" id="{DD7D875E-DCD1-4C3D-ABE6-BCD4755C84F8}"/>
               </a:ext>
             </a:extLst>
           </p:cNvPr>
@@ -14345,7 +14345,7 @@
           <p:cNvPr id="13" name="">
             <a:extLst xmlns:a="http://schemas.openxmlformats.org/drawingml/2006/main">
               <a:ext uri="{FF2B5EF4-FFF2-40B4-BE49-F238E27FC236}">
-                <a16:creationId xmlns:a16="http://schemas.microsoft.com/office/drawing/2014/main" id="{96E76BF9-7C2F-483C-9F71-0D685DCD452F}"/>
+                <a16:creationId xmlns:a16="http://schemas.microsoft.com/office/drawing/2014/main" id="{04B8DD06-8CF8-46E7-AFC9-64997EA1981C}"/>
               </a:ext>
             </a:extLst>
           </p:cNvPr>
@@ -14380,7 +14380,7 @@
           <p:cNvPr id="14" name="">
             <a:extLst xmlns:a="http://schemas.openxmlformats.org/drawingml/2006/main">
               <a:ext uri="{FF2B5EF4-FFF2-40B4-BE49-F238E27FC236}">
-                <a16:creationId xmlns:a16="http://schemas.microsoft.com/office/drawing/2014/main" id="{0CCD15E0-C8A6-4209-AA57-832C56250A68}"/>
+                <a16:creationId xmlns:a16="http://schemas.microsoft.com/office/drawing/2014/main" id="{85FEB148-CA76-46D6-B910-4CFC5B7FD3CA}"/>
               </a:ext>
             </a:extLst>
           </p:cNvPr>
@@ -14442,7 +14442,7 @@
           <p:cNvPr id="15" name="">
             <a:extLst xmlns:a="http://schemas.openxmlformats.org/drawingml/2006/main">
               <a:ext uri="{FF2B5EF4-FFF2-40B4-BE49-F238E27FC236}">
-                <a16:creationId xmlns:a16="http://schemas.microsoft.com/office/drawing/2014/main" id="{4D00FB25-F7C0-4478-A655-0071B9BC5711}"/>
+                <a16:creationId xmlns:a16="http://schemas.microsoft.com/office/drawing/2014/main" id="{966A8E89-9523-4F4A-A1F2-6836AB2C564F}"/>
               </a:ext>
             </a:extLst>
           </p:cNvPr>
@@ -14500,7 +14500,7 @@
           <p:cNvPr id="16" name="">
             <a:extLst xmlns:a="http://schemas.openxmlformats.org/drawingml/2006/main">
               <a:ext uri="{FF2B5EF4-FFF2-40B4-BE49-F238E27FC236}">
-                <a16:creationId xmlns:a16="http://schemas.microsoft.com/office/drawing/2014/main" id="{FF4A14C1-B4A6-4DCA-AD6B-890AFCCA8B1B}"/>
+                <a16:creationId xmlns:a16="http://schemas.microsoft.com/office/drawing/2014/main" id="{05698095-372D-4EC0-B193-52832B238194}"/>
               </a:ext>
             </a:extLst>
           </p:cNvPr>
@@ -14558,7 +14558,7 @@
           <p:cNvPr id="17" name="">
             <a:extLst xmlns:a="http://schemas.openxmlformats.org/drawingml/2006/main">
               <a:ext uri="{FF2B5EF4-FFF2-40B4-BE49-F238E27FC236}">
-                <a16:creationId xmlns:a16="http://schemas.microsoft.com/office/drawing/2014/main" id="{91866499-5401-4592-BBA8-F833C5827B33}"/>
+                <a16:creationId xmlns:a16="http://schemas.microsoft.com/office/drawing/2014/main" id="{F4861CE0-176E-49DC-937C-AC8B5DA732EF}"/>
               </a:ext>
             </a:extLst>
           </p:cNvPr>
@@ -14616,7 +14616,7 @@
           <p:cNvPr id="18" name="">
             <a:extLst xmlns:a="http://schemas.openxmlformats.org/drawingml/2006/main">
               <a:ext uri="{FF2B5EF4-FFF2-40B4-BE49-F238E27FC236}">
-                <a16:creationId xmlns:a16="http://schemas.microsoft.com/office/drawing/2014/main" id="{A5025B86-8DD0-4301-8E4E-39306EDE6991}"/>
+                <a16:creationId xmlns:a16="http://schemas.microsoft.com/office/drawing/2014/main" id="{B7D4FD60-617D-46BC-AAF6-15C34F07E4A2}"/>
               </a:ext>
             </a:extLst>
           </p:cNvPr>
@@ -14651,7 +14651,7 @@
           <p:cNvPr id="19" name="">
             <a:extLst xmlns:a="http://schemas.openxmlformats.org/drawingml/2006/main">
               <a:ext uri="{FF2B5EF4-FFF2-40B4-BE49-F238E27FC236}">
-                <a16:creationId xmlns:a16="http://schemas.microsoft.com/office/drawing/2014/main" id="{106B51CC-BF0D-480D-967B-67F438918D05}"/>
+                <a16:creationId xmlns:a16="http://schemas.microsoft.com/office/drawing/2014/main" id="{7AA24BDB-A965-4A3D-B8D9-56DE1BCFB9E2}"/>
               </a:ext>
             </a:extLst>
           </p:cNvPr>
@@ -14713,7 +14713,7 @@
           <p:cNvPr id="20" name="">
             <a:extLst xmlns:a="http://schemas.openxmlformats.org/drawingml/2006/main">
               <a:ext uri="{FF2B5EF4-FFF2-40B4-BE49-F238E27FC236}">
-                <a16:creationId xmlns:a16="http://schemas.microsoft.com/office/drawing/2014/main" id="{4E8DF388-BF6D-4212-A2B6-61A61DB5E400}"/>
+                <a16:creationId xmlns:a16="http://schemas.microsoft.com/office/drawing/2014/main" id="{0816B0ED-6460-4C7A-BABF-17A712750D1A}"/>
               </a:ext>
             </a:extLst>
           </p:cNvPr>
@@ -14771,7 +14771,7 @@
           <p:cNvPr id="21" name="">
             <a:extLst xmlns:a="http://schemas.openxmlformats.org/drawingml/2006/main">
               <a:ext uri="{FF2B5EF4-FFF2-40B4-BE49-F238E27FC236}">
-                <a16:creationId xmlns:a16="http://schemas.microsoft.com/office/drawing/2014/main" id="{38AB9B2B-6F07-428D-A4D2-F4A0D36AD748}"/>
+                <a16:creationId xmlns:a16="http://schemas.microsoft.com/office/drawing/2014/main" id="{0FF708CA-7858-4097-8A93-A0976D0BA0CD}"/>
               </a:ext>
             </a:extLst>
           </p:cNvPr>
@@ -14829,7 +14829,7 @@
           <p:cNvPr id="22" name="">
             <a:extLst xmlns:a="http://schemas.openxmlformats.org/drawingml/2006/main">
               <a:ext uri="{FF2B5EF4-FFF2-40B4-BE49-F238E27FC236}">
-                <a16:creationId xmlns:a16="http://schemas.microsoft.com/office/drawing/2014/main" id="{13A486BC-AB27-4404-A314-29BD38BBC6B9}"/>
+                <a16:creationId xmlns:a16="http://schemas.microsoft.com/office/drawing/2014/main" id="{A7932E09-E8DE-4249-BFF2-F85E31551330}"/>
               </a:ext>
             </a:extLst>
           </p:cNvPr>
@@ -14887,7 +14887,7 @@
           <p:cNvPr id="23" name="">
             <a:extLst xmlns:a="http://schemas.openxmlformats.org/drawingml/2006/main">
               <a:ext uri="{FF2B5EF4-FFF2-40B4-BE49-F238E27FC236}">
-                <a16:creationId xmlns:a16="http://schemas.microsoft.com/office/drawing/2014/main" id="{6CBA3A1D-2E87-47E5-87C7-DA90ADF4B7BB}"/>
+                <a16:creationId xmlns:a16="http://schemas.microsoft.com/office/drawing/2014/main" id="{5B1ECF00-75FF-41F5-98C4-EE613D82CA9D}"/>
               </a:ext>
             </a:extLst>
           </p:cNvPr>
@@ -14922,7 +14922,7 @@
           <p:cNvPr id="24" name="">
             <a:extLst xmlns:a="http://schemas.openxmlformats.org/drawingml/2006/main">
               <a:ext uri="{FF2B5EF4-FFF2-40B4-BE49-F238E27FC236}">
-                <a16:creationId xmlns:a16="http://schemas.microsoft.com/office/drawing/2014/main" id="{CC529A89-DB99-4AA3-A94A-3DE30D1AEFD9}"/>
+                <a16:creationId xmlns:a16="http://schemas.microsoft.com/office/drawing/2014/main" id="{D0723DD4-A3B7-476C-BB04-FDC586553ED3}"/>
               </a:ext>
             </a:extLst>
           </p:cNvPr>
@@ -14984,7 +14984,7 @@
           <p:cNvPr id="25" name="">
             <a:extLst xmlns:a="http://schemas.openxmlformats.org/drawingml/2006/main">
               <a:ext uri="{FF2B5EF4-FFF2-40B4-BE49-F238E27FC236}">
-                <a16:creationId xmlns:a16="http://schemas.microsoft.com/office/drawing/2014/main" id="{EB4ECF29-5723-488E-95F3-96A17074DB56}"/>
+                <a16:creationId xmlns:a16="http://schemas.microsoft.com/office/drawing/2014/main" id="{D38AAF02-6170-4B31-AAED-FE7C08901E8B}"/>
               </a:ext>
             </a:extLst>
           </p:cNvPr>
@@ -15042,7 +15042,7 @@
           <p:cNvPr id="26" name="">
             <a:extLst xmlns:a="http://schemas.openxmlformats.org/drawingml/2006/main">
               <a:ext uri="{FF2B5EF4-FFF2-40B4-BE49-F238E27FC236}">
-                <a16:creationId xmlns:a16="http://schemas.microsoft.com/office/drawing/2014/main" id="{2C314DE0-DE0E-49FD-8FAB-6BC222E0FA1A}"/>
+                <a16:creationId xmlns:a16="http://schemas.microsoft.com/office/drawing/2014/main" id="{8A959377-83E7-4111-A0F9-7496D2D3EA85}"/>
               </a:ext>
             </a:extLst>
           </p:cNvPr>
@@ -15100,7 +15100,7 @@
           <p:cNvPr id="27" name="">
             <a:extLst xmlns:a="http://schemas.openxmlformats.org/drawingml/2006/main">
               <a:ext uri="{FF2B5EF4-FFF2-40B4-BE49-F238E27FC236}">
-                <a16:creationId xmlns:a16="http://schemas.microsoft.com/office/drawing/2014/main" id="{73D48AA5-1947-482D-B23A-8608F2E153AC}"/>
+                <a16:creationId xmlns:a16="http://schemas.microsoft.com/office/drawing/2014/main" id="{B9C59E21-C131-4885-9771-91B93D41A0F1}"/>
               </a:ext>
             </a:extLst>
           </p:cNvPr>
@@ -15158,7 +15158,7 @@
           <p:cNvPr id="28" name="">
             <a:extLst xmlns:a="http://schemas.openxmlformats.org/drawingml/2006/main">
               <a:ext uri="{FF2B5EF4-FFF2-40B4-BE49-F238E27FC236}">
-                <a16:creationId xmlns:a16="http://schemas.microsoft.com/office/drawing/2014/main" id="{78B6D823-0FE7-43E9-8389-FEE68227EF7A}"/>
+                <a16:creationId xmlns:a16="http://schemas.microsoft.com/office/drawing/2014/main" id="{71479A8F-2E99-4918-9FCD-6AB040C233EF}"/>
               </a:ext>
             </a:extLst>
           </p:cNvPr>
@@ -15193,7 +15193,7 @@
           <p:cNvPr id="29" name="">
             <a:extLst xmlns:a="http://schemas.openxmlformats.org/drawingml/2006/main">
               <a:ext uri="{FF2B5EF4-FFF2-40B4-BE49-F238E27FC236}">
-                <a16:creationId xmlns:a16="http://schemas.microsoft.com/office/drawing/2014/main" id="{4341ED53-6499-416F-8BF9-4E8DFFB770D0}"/>
+                <a16:creationId xmlns:a16="http://schemas.microsoft.com/office/drawing/2014/main" id="{3A71086D-8F23-4DEB-B7A7-D2CB6AF2EA6A}"/>
               </a:ext>
             </a:extLst>
           </p:cNvPr>
@@ -15255,7 +15255,7 @@
           <p:cNvPr id="30" name="">
             <a:extLst xmlns:a="http://schemas.openxmlformats.org/drawingml/2006/main">
               <a:ext uri="{FF2B5EF4-FFF2-40B4-BE49-F238E27FC236}">
-                <a16:creationId xmlns:a16="http://schemas.microsoft.com/office/drawing/2014/main" id="{EEC6850C-D887-412D-A5A0-D003C5271791}"/>
+                <a16:creationId xmlns:a16="http://schemas.microsoft.com/office/drawing/2014/main" id="{AD06A351-6B8E-4D36-AA0C-0E9129F297F5}"/>
               </a:ext>
             </a:extLst>
           </p:cNvPr>
@@ -15313,7 +15313,7 @@
           <p:cNvPr id="31" name="">
             <a:extLst xmlns:a="http://schemas.openxmlformats.org/drawingml/2006/main">
               <a:ext uri="{FF2B5EF4-FFF2-40B4-BE49-F238E27FC236}">
-                <a16:creationId xmlns:a16="http://schemas.microsoft.com/office/drawing/2014/main" id="{617B594A-76AA-4BD9-BA0F-A74C8437ECD6}"/>
+                <a16:creationId xmlns:a16="http://schemas.microsoft.com/office/drawing/2014/main" id="{C22567C5-C3BE-436D-81C4-FD7508853EAA}"/>
               </a:ext>
             </a:extLst>
           </p:cNvPr>
@@ -15371,7 +15371,7 @@
           <p:cNvPr id="32" name="">
             <a:extLst xmlns:a="http://schemas.openxmlformats.org/drawingml/2006/main">
               <a:ext uri="{FF2B5EF4-FFF2-40B4-BE49-F238E27FC236}">
-                <a16:creationId xmlns:a16="http://schemas.microsoft.com/office/drawing/2014/main" id="{03623562-18C2-4F68-B1A6-E4FBF771ADDF}"/>
+                <a16:creationId xmlns:a16="http://schemas.microsoft.com/office/drawing/2014/main" id="{DE943930-AB40-42CF-9CA7-5C00AF8F9E4D}"/>
               </a:ext>
             </a:extLst>
           </p:cNvPr>
@@ -15406,7 +15406,7 @@
           <p:cNvPr id="33" name="">
             <a:extLst xmlns:a="http://schemas.openxmlformats.org/drawingml/2006/main">
               <a:ext uri="{FF2B5EF4-FFF2-40B4-BE49-F238E27FC236}">
-                <a16:creationId xmlns:a16="http://schemas.microsoft.com/office/drawing/2014/main" id="{4A5C48AE-9950-4FB9-ACB3-0B6BB3E8AFBA}"/>
+                <a16:creationId xmlns:a16="http://schemas.microsoft.com/office/drawing/2014/main" id="{D9F5635D-38CD-457D-80F0-88EA953C597B}"/>
               </a:ext>
             </a:extLst>
           </p:cNvPr>
@@ -15439,7 +15439,7 @@
           <p:cNvPr id="34" name="">
             <a:extLst xmlns:a="http://schemas.openxmlformats.org/drawingml/2006/main">
               <a:ext uri="{FF2B5EF4-FFF2-40B4-BE49-F238E27FC236}">
-                <a16:creationId xmlns:a16="http://schemas.microsoft.com/office/drawing/2014/main" id="{22428A2D-D4C6-455A-AD4C-6CD623A6401B}"/>
+                <a16:creationId xmlns:a16="http://schemas.microsoft.com/office/drawing/2014/main" id="{4B00BA02-1000-47C1-BA96-A7E91ACA6AC6}"/>
               </a:ext>
             </a:extLst>
           </p:cNvPr>
@@ -15497,7 +15497,7 @@
           <p:cNvPr id="35" name="">
             <a:extLst xmlns:a="http://schemas.openxmlformats.org/drawingml/2006/main">
               <a:ext uri="{FF2B5EF4-FFF2-40B4-BE49-F238E27FC236}">
-                <a16:creationId xmlns:a16="http://schemas.microsoft.com/office/drawing/2014/main" id="{925ED3C2-92BC-4BCF-ACB4-3152CACB630C}"/>
+                <a16:creationId xmlns:a16="http://schemas.microsoft.com/office/drawing/2014/main" id="{5F62A3DA-E8FD-4004-8CE0-41FF24669023}"/>
               </a:ext>
             </a:extLst>
           </p:cNvPr>
@@ -15555,7 +15555,7 @@
           <p:cNvPr id="36" name="">
             <a:extLst xmlns:a="http://schemas.openxmlformats.org/drawingml/2006/main">
               <a:ext uri="{FF2B5EF4-FFF2-40B4-BE49-F238E27FC236}">
-                <a16:creationId xmlns:a16="http://schemas.microsoft.com/office/drawing/2014/main" id="{E64EEF42-D527-48C2-B568-F1D391B84B53}"/>
+                <a16:creationId xmlns:a16="http://schemas.microsoft.com/office/drawing/2014/main" id="{CFCF38FC-634C-4910-B01E-2E1C9B8AA67B}"/>
               </a:ext>
             </a:extLst>
           </p:cNvPr>
@@ -15590,7 +15590,7 @@
           <p:cNvPr id="37" name="">
             <a:extLst xmlns:a="http://schemas.openxmlformats.org/drawingml/2006/main">
               <a:ext uri="{FF2B5EF4-FFF2-40B4-BE49-F238E27FC236}">
-                <a16:creationId xmlns:a16="http://schemas.microsoft.com/office/drawing/2014/main" id="{9631752E-C8A7-4CEA-8C73-17F6B5C10E48}"/>
+                <a16:creationId xmlns:a16="http://schemas.microsoft.com/office/drawing/2014/main" id="{76D8E382-67E3-4F3C-9E33-F95FAE0CE681}"/>
               </a:ext>
             </a:extLst>
           </p:cNvPr>
@@ -15623,7 +15623,7 @@
           <p:cNvPr id="38" name="">
             <a:extLst xmlns:a="http://schemas.openxmlformats.org/drawingml/2006/main">
               <a:ext uri="{FF2B5EF4-FFF2-40B4-BE49-F238E27FC236}">
-                <a16:creationId xmlns:a16="http://schemas.microsoft.com/office/drawing/2014/main" id="{FE3EE9CA-96C9-4FC0-883E-09F5277F4B32}"/>
+                <a16:creationId xmlns:a16="http://schemas.microsoft.com/office/drawing/2014/main" id="{61A94545-1A98-4051-976C-348CCBF6A9F9}"/>
               </a:ext>
             </a:extLst>
           </p:cNvPr>
@@ -15681,7 +15681,7 @@
           <p:cNvPr id="39" name="">
             <a:extLst xmlns:a="http://schemas.openxmlformats.org/drawingml/2006/main">
               <a:ext uri="{FF2B5EF4-FFF2-40B4-BE49-F238E27FC236}">
-                <a16:creationId xmlns:a16="http://schemas.microsoft.com/office/drawing/2014/main" id="{163F0C7D-E3B2-408F-8A2D-1B9B6B0143CE}"/>
+                <a16:creationId xmlns:a16="http://schemas.microsoft.com/office/drawing/2014/main" id="{E18EE3C6-5543-4FAF-B75D-E2A0275911D8}"/>
               </a:ext>
             </a:extLst>
           </p:cNvPr>
@@ -15737,7 +15737,7 @@
     </p:spTree>
     <p:extLst>
       <p:ext uri="{BB962C8B-B14F-4D97-AF65-F5344CB8AC3E}">
-        <p14:creationId xmlns:p14="http://schemas.microsoft.com/office/powerpoint/2010/main" val="10642625"/>
+        <p14:creationId xmlns:p14="http://schemas.microsoft.com/office/powerpoint/2010/main" val="292267438"/>
       </p:ext>
     </p:extLst>
   </p:cSld>
@@ -15768,7 +15768,7 @@
           <p:cNvPr id="24" name="">
             <a:extLst xmlns:a="http://schemas.openxmlformats.org/drawingml/2006/main">
               <a:ext uri="{FF2B5EF4-FFF2-40B4-BE49-F238E27FC236}">
-                <a16:creationId xmlns:a16="http://schemas.microsoft.com/office/drawing/2014/main" id="{2A6971C9-825A-4EC8-B7D7-D2F96F7090AC}"/>
+                <a16:creationId xmlns:a16="http://schemas.microsoft.com/office/drawing/2014/main" id="{DC97F76C-9163-4506-84BE-C60D10150B64}"/>
               </a:ext>
             </a:extLst>
           </p:cNvPr>
@@ -15799,7 +15799,7 @@
           <p:cNvPr id="2" name="">
             <a:extLst xmlns:a="http://schemas.openxmlformats.org/drawingml/2006/main">
               <a:ext uri="{FF2B5EF4-FFF2-40B4-BE49-F238E27FC236}">
-                <a16:creationId xmlns:a16="http://schemas.microsoft.com/office/drawing/2014/main" id="{AE5A0026-6D8A-48DB-BBC6-810FB4C9CA95}"/>
+                <a16:creationId xmlns:a16="http://schemas.microsoft.com/office/drawing/2014/main" id="{C35FEEDB-CCCF-41E5-B390-93D175FEF637}"/>
               </a:ext>
             </a:extLst>
           </p:cNvPr>
@@ -15857,7 +15857,7 @@
           <p:cNvPr id="3" name="">
             <a:extLst xmlns:a="http://schemas.openxmlformats.org/drawingml/2006/main">
               <a:ext uri="{FF2B5EF4-FFF2-40B4-BE49-F238E27FC236}">
-                <a16:creationId xmlns:a16="http://schemas.microsoft.com/office/drawing/2014/main" id="{F58AE666-831B-45BF-82F1-317AB06E16EC}"/>
+                <a16:creationId xmlns:a16="http://schemas.microsoft.com/office/drawing/2014/main" id="{01549EEB-2464-4E3C-8865-0CC060FE0308}"/>
               </a:ext>
             </a:extLst>
           </p:cNvPr>
@@ -15915,7 +15915,7 @@
           <p:cNvPr id="4" name="">
             <a:extLst xmlns:a="http://schemas.openxmlformats.org/drawingml/2006/main">
               <a:ext uri="{FF2B5EF4-FFF2-40B4-BE49-F238E27FC236}">
-                <a16:creationId xmlns:a16="http://schemas.microsoft.com/office/drawing/2014/main" id="{731A684C-E301-47AC-8456-C4463167D500}"/>
+                <a16:creationId xmlns:a16="http://schemas.microsoft.com/office/drawing/2014/main" id="{F35B71D0-AF05-4E6C-B684-36F205DDFC3C}"/>
               </a:ext>
             </a:extLst>
           </p:cNvPr>
@@ -15946,7 +15946,7 @@
           <p:cNvPr id="5" name="">
             <a:extLst xmlns:a="http://schemas.openxmlformats.org/drawingml/2006/main">
               <a:ext uri="{FF2B5EF4-FFF2-40B4-BE49-F238E27FC236}">
-                <a16:creationId xmlns:a16="http://schemas.microsoft.com/office/drawing/2014/main" id="{D2B274C2-DD90-4F0A-A4E3-5193D717F4BD}"/>
+                <a16:creationId xmlns:a16="http://schemas.microsoft.com/office/drawing/2014/main" id="{D6B75366-B023-415E-8FCD-AB90A5A3A4B2}"/>
               </a:ext>
             </a:extLst>
           </p:cNvPr>
@@ -16004,7 +16004,7 @@
           <p:cNvPr id="6" name="">
             <a:extLst xmlns:a="http://schemas.openxmlformats.org/drawingml/2006/main">
               <a:ext uri="{FF2B5EF4-FFF2-40B4-BE49-F238E27FC236}">
-                <a16:creationId xmlns:a16="http://schemas.microsoft.com/office/drawing/2014/main" id="{B506BD41-B472-4A12-A724-83F3B62DF9B1}"/>
+                <a16:creationId xmlns:a16="http://schemas.microsoft.com/office/drawing/2014/main" id="{A60DEEAB-C16E-4B42-84E6-8C7E735C24C5}"/>
               </a:ext>
             </a:extLst>
           </p:cNvPr>
@@ -16062,7 +16062,7 @@
           <p:cNvPr id="7" name="">
             <a:extLst xmlns:a="http://schemas.openxmlformats.org/drawingml/2006/main">
               <a:ext uri="{FF2B5EF4-FFF2-40B4-BE49-F238E27FC236}">
-                <a16:creationId xmlns:a16="http://schemas.microsoft.com/office/drawing/2014/main" id="{5C34704D-6E4A-430D-9463-7972BE38E4AF}"/>
+                <a16:creationId xmlns:a16="http://schemas.microsoft.com/office/drawing/2014/main" id="{3DDC0709-3CBF-434B-B61E-62086D4F50BB}"/>
               </a:ext>
             </a:extLst>
           </p:cNvPr>
@@ -16120,7 +16120,7 @@
           <p:cNvPr id="8" name="">
             <a:extLst xmlns:a="http://schemas.openxmlformats.org/drawingml/2006/main">
               <a:ext uri="{FF2B5EF4-FFF2-40B4-BE49-F238E27FC236}">
-                <a16:creationId xmlns:a16="http://schemas.microsoft.com/office/drawing/2014/main" id="{6F06E082-980C-4327-BC5B-AC5CF5192874}"/>
+                <a16:creationId xmlns:a16="http://schemas.microsoft.com/office/drawing/2014/main" id="{C97DF330-C3E5-41C7-9E97-68DAFB81DFE2}"/>
               </a:ext>
             </a:extLst>
           </p:cNvPr>
@@ -16155,7 +16155,7 @@
           <p:cNvPr id="9" name="">
             <a:extLst xmlns:a="http://schemas.openxmlformats.org/drawingml/2006/main">
               <a:ext uri="{FF2B5EF4-FFF2-40B4-BE49-F238E27FC236}">
-                <a16:creationId xmlns:a16="http://schemas.microsoft.com/office/drawing/2014/main" id="{36B0C680-9A61-4088-8EDB-9E7BBD101F7D}"/>
+                <a16:creationId xmlns:a16="http://schemas.microsoft.com/office/drawing/2014/main" id="{C10F5B0E-EA40-4543-A92E-D657966D4B3F}"/>
               </a:ext>
             </a:extLst>
           </p:cNvPr>
@@ -16213,7 +16213,7 @@
           <p:cNvPr id="10" name="">
             <a:extLst xmlns:a="http://schemas.openxmlformats.org/drawingml/2006/main">
               <a:ext uri="{FF2B5EF4-FFF2-40B4-BE49-F238E27FC236}">
-                <a16:creationId xmlns:a16="http://schemas.microsoft.com/office/drawing/2014/main" id="{3FC8D01E-B4F8-4F2A-A3A2-889965CF8684}"/>
+                <a16:creationId xmlns:a16="http://schemas.microsoft.com/office/drawing/2014/main" id="{A8F2C544-3E4C-4EB7-8CF4-3FFE3E488C9D}"/>
               </a:ext>
             </a:extLst>
           </p:cNvPr>
@@ -16271,7 +16271,7 @@
           <p:cNvPr id="11" name="">
             <a:extLst xmlns:a="http://schemas.openxmlformats.org/drawingml/2006/main">
               <a:ext uri="{FF2B5EF4-FFF2-40B4-BE49-F238E27FC236}">
-                <a16:creationId xmlns:a16="http://schemas.microsoft.com/office/drawing/2014/main" id="{D71E1575-9D75-4040-9346-16E7CE74A457}"/>
+                <a16:creationId xmlns:a16="http://schemas.microsoft.com/office/drawing/2014/main" id="{F8B92DD6-8391-47C6-819E-493FC6FA92AA}"/>
               </a:ext>
             </a:extLst>
           </p:cNvPr>
@@ -16306,7 +16306,7 @@
           <p:cNvPr id="12" name="">
             <a:extLst xmlns:a="http://schemas.openxmlformats.org/drawingml/2006/main">
               <a:ext uri="{FF2B5EF4-FFF2-40B4-BE49-F238E27FC236}">
-                <a16:creationId xmlns:a16="http://schemas.microsoft.com/office/drawing/2014/main" id="{A8353D48-9232-4F8B-A92D-0F1CBB71F575}"/>
+                <a16:creationId xmlns:a16="http://schemas.microsoft.com/office/drawing/2014/main" id="{59ABD158-BD1F-4F5C-8324-2A7AA63A62A0}"/>
               </a:ext>
             </a:extLst>
           </p:cNvPr>
@@ -16364,7 +16364,7 @@
           <p:cNvPr id="13" name="">
             <a:extLst xmlns:a="http://schemas.openxmlformats.org/drawingml/2006/main">
               <a:ext uri="{FF2B5EF4-FFF2-40B4-BE49-F238E27FC236}">
-                <a16:creationId xmlns:a16="http://schemas.microsoft.com/office/drawing/2014/main" id="{9AAA6485-DB38-4700-ADCA-666658A50615}"/>
+                <a16:creationId xmlns:a16="http://schemas.microsoft.com/office/drawing/2014/main" id="{90C17636-466C-4070-BD33-4DDD98F1BA05}"/>
               </a:ext>
             </a:extLst>
           </p:cNvPr>
@@ -16422,7 +16422,7 @@
           <p:cNvPr id="14" name="">
             <a:extLst xmlns:a="http://schemas.openxmlformats.org/drawingml/2006/main">
               <a:ext uri="{FF2B5EF4-FFF2-40B4-BE49-F238E27FC236}">
-                <a16:creationId xmlns:a16="http://schemas.microsoft.com/office/drawing/2014/main" id="{1434BB30-7B0B-4E8F-8980-D258F29F4119}"/>
+                <a16:creationId xmlns:a16="http://schemas.microsoft.com/office/drawing/2014/main" id="{D30F2093-CD3E-4033-ADD0-C0B3A0F70DCF}"/>
               </a:ext>
             </a:extLst>
           </p:cNvPr>
@@ -16457,7 +16457,7 @@
           <p:cNvPr id="15" name="">
             <a:extLst xmlns:a="http://schemas.openxmlformats.org/drawingml/2006/main">
               <a:ext uri="{FF2B5EF4-FFF2-40B4-BE49-F238E27FC236}">
-                <a16:creationId xmlns:a16="http://schemas.microsoft.com/office/drawing/2014/main" id="{0EBFD181-DAF2-4B61-871C-F76CE900B344}"/>
+                <a16:creationId xmlns:a16="http://schemas.microsoft.com/office/drawing/2014/main" id="{EB2EA9EC-279C-403B-8933-3D149ADCEEE8}"/>
               </a:ext>
             </a:extLst>
           </p:cNvPr>
@@ -16515,7 +16515,7 @@
           <p:cNvPr id="16" name="">
             <a:extLst xmlns:a="http://schemas.openxmlformats.org/drawingml/2006/main">
               <a:ext uri="{FF2B5EF4-FFF2-40B4-BE49-F238E27FC236}">
-                <a16:creationId xmlns:a16="http://schemas.microsoft.com/office/drawing/2014/main" id="{4404B12A-E5D1-4C6D-9830-FCF9360D980C}"/>
+                <a16:creationId xmlns:a16="http://schemas.microsoft.com/office/drawing/2014/main" id="{A70C5074-1C1B-4633-886E-C61CD494BB8E}"/>
               </a:ext>
             </a:extLst>
           </p:cNvPr>
@@ -16573,7 +16573,7 @@
           <p:cNvPr id="17" name="">
             <a:extLst xmlns:a="http://schemas.openxmlformats.org/drawingml/2006/main">
               <a:ext uri="{FF2B5EF4-FFF2-40B4-BE49-F238E27FC236}">
-                <a16:creationId xmlns:a16="http://schemas.microsoft.com/office/drawing/2014/main" id="{445FF7AE-88BD-41AE-BEC1-296799DE011D}"/>
+                <a16:creationId xmlns:a16="http://schemas.microsoft.com/office/drawing/2014/main" id="{C0C99D8C-8E56-406D-87F6-2DC5E41E5DD8}"/>
               </a:ext>
             </a:extLst>
           </p:cNvPr>
@@ -16608,7 +16608,7 @@
           <p:cNvPr id="18" name="">
             <a:extLst xmlns:a="http://schemas.openxmlformats.org/drawingml/2006/main">
               <a:ext uri="{FF2B5EF4-FFF2-40B4-BE49-F238E27FC236}">
-                <a16:creationId xmlns:a16="http://schemas.microsoft.com/office/drawing/2014/main" id="{642A8DCF-37D5-4051-A285-0CF889AA724E}"/>
+                <a16:creationId xmlns:a16="http://schemas.microsoft.com/office/drawing/2014/main" id="{27929E6A-5435-4258-A7F8-534C32105AB2}"/>
               </a:ext>
             </a:extLst>
           </p:cNvPr>
@@ -16666,7 +16666,7 @@
           <p:cNvPr id="19" name="">
             <a:extLst xmlns:a="http://schemas.openxmlformats.org/drawingml/2006/main">
               <a:ext uri="{FF2B5EF4-FFF2-40B4-BE49-F238E27FC236}">
-                <a16:creationId xmlns:a16="http://schemas.microsoft.com/office/drawing/2014/main" id="{3822962A-4456-412A-889E-DD9BB81583CD}"/>
+                <a16:creationId xmlns:a16="http://schemas.microsoft.com/office/drawing/2014/main" id="{A91A76A8-A5FC-4837-88D2-DFA8434C8E11}"/>
               </a:ext>
             </a:extLst>
           </p:cNvPr>
@@ -16724,7 +16724,7 @@
           <p:cNvPr id="20" name="">
             <a:extLst xmlns:a="http://schemas.openxmlformats.org/drawingml/2006/main">
               <a:ext uri="{FF2B5EF4-FFF2-40B4-BE49-F238E27FC236}">
-                <a16:creationId xmlns:a16="http://schemas.microsoft.com/office/drawing/2014/main" id="{D11A1264-6FCF-417C-BA93-7A8E94CB519B}"/>
+                <a16:creationId xmlns:a16="http://schemas.microsoft.com/office/drawing/2014/main" id="{A546F6AA-6D3F-4212-B217-694BCFEEE49F}"/>
               </a:ext>
             </a:extLst>
           </p:cNvPr>
@@ -16759,7 +16759,7 @@
           <p:cNvPr id="21" name="">
             <a:extLst xmlns:a="http://schemas.openxmlformats.org/drawingml/2006/main">
               <a:ext uri="{FF2B5EF4-FFF2-40B4-BE49-F238E27FC236}">
-                <a16:creationId xmlns:a16="http://schemas.microsoft.com/office/drawing/2014/main" id="{6A7797EA-D5D2-4212-96EC-FD415D8BABDC}"/>
+                <a16:creationId xmlns:a16="http://schemas.microsoft.com/office/drawing/2014/main" id="{3259E6DD-3D42-4CD1-9CEC-374A8C934D2B}"/>
               </a:ext>
             </a:extLst>
           </p:cNvPr>
@@ -16817,7 +16817,7 @@
           <p:cNvPr id="22" name="">
             <a:extLst xmlns:a="http://schemas.openxmlformats.org/drawingml/2006/main">
               <a:ext uri="{FF2B5EF4-FFF2-40B4-BE49-F238E27FC236}">
-                <a16:creationId xmlns:a16="http://schemas.microsoft.com/office/drawing/2014/main" id="{711BE042-949E-4FA5-9931-031625513C33}"/>
+                <a16:creationId xmlns:a16="http://schemas.microsoft.com/office/drawing/2014/main" id="{1297735F-C4CC-40CF-AD9F-4BDE98E4E08A}"/>
               </a:ext>
             </a:extLst>
           </p:cNvPr>
@@ -16875,7 +16875,7 @@
           <p:cNvPr id="23" name="">
             <a:extLst xmlns:a="http://schemas.openxmlformats.org/drawingml/2006/main">
               <a:ext uri="{FF2B5EF4-FFF2-40B4-BE49-F238E27FC236}">
-                <a16:creationId xmlns:a16="http://schemas.microsoft.com/office/drawing/2014/main" id="{94B218B3-FCF1-456E-AACA-03CB951CB268}"/>
+                <a16:creationId xmlns:a16="http://schemas.microsoft.com/office/drawing/2014/main" id="{F34E58E2-1617-45AC-A0CD-E99430C8E875}"/>
               </a:ext>
             </a:extLst>
           </p:cNvPr>
@@ -16935,7 +16935,7 @@
     </p:spTree>
     <p:extLst>
       <p:ext uri="{BB962C8B-B14F-4D97-AF65-F5344CB8AC3E}">
-        <p14:creationId xmlns:p14="http://schemas.microsoft.com/office/powerpoint/2010/main" val="782701219"/>
+        <p14:creationId xmlns:p14="http://schemas.microsoft.com/office/powerpoint/2010/main" val="1876392677"/>
       </p:ext>
     </p:extLst>
   </p:cSld>
@@ -16966,7 +16966,7 @@
           <p:cNvPr id="48" name="">
             <a:extLst xmlns:a="http://schemas.openxmlformats.org/drawingml/2006/main">
               <a:ext uri="{FF2B5EF4-FFF2-40B4-BE49-F238E27FC236}">
-                <a16:creationId xmlns:a16="http://schemas.microsoft.com/office/drawing/2014/main" id="{98162B61-32F0-480D-9AEE-6C49098C9D90}"/>
+                <a16:creationId xmlns:a16="http://schemas.microsoft.com/office/drawing/2014/main" id="{0506ED86-82BF-4CE4-9913-23E80CB75AFB}"/>
               </a:ext>
             </a:extLst>
           </p:cNvPr>
@@ -16997,7 +16997,7 @@
           <p:cNvPr id="2" name="">
             <a:extLst xmlns:a="http://schemas.openxmlformats.org/drawingml/2006/main">
               <a:ext uri="{FF2B5EF4-FFF2-40B4-BE49-F238E27FC236}">
-                <a16:creationId xmlns:a16="http://schemas.microsoft.com/office/drawing/2014/main" id="{BF1B62E8-D6AD-4A6D-BCC7-2C7C84222EAD}"/>
+                <a16:creationId xmlns:a16="http://schemas.microsoft.com/office/drawing/2014/main" id="{110082F4-AB97-4F0B-9608-9233A7F22BA7}"/>
               </a:ext>
             </a:extLst>
           </p:cNvPr>
@@ -17055,7 +17055,7 @@
           <p:cNvPr id="3" name="">
             <a:extLst xmlns:a="http://schemas.openxmlformats.org/drawingml/2006/main">
               <a:ext uri="{FF2B5EF4-FFF2-40B4-BE49-F238E27FC236}">
-                <a16:creationId xmlns:a16="http://schemas.microsoft.com/office/drawing/2014/main" id="{01318386-32CB-48A7-9E97-38963140B1B8}"/>
+                <a16:creationId xmlns:a16="http://schemas.microsoft.com/office/drawing/2014/main" id="{EA2D3F55-BD42-43FE-A19F-74E6EF1CE732}"/>
               </a:ext>
             </a:extLst>
           </p:cNvPr>
@@ -17113,7 +17113,7 @@
           <p:cNvPr id="4" name="">
             <a:extLst xmlns:a="http://schemas.openxmlformats.org/drawingml/2006/main">
               <a:ext uri="{FF2B5EF4-FFF2-40B4-BE49-F238E27FC236}">
-                <a16:creationId xmlns:a16="http://schemas.microsoft.com/office/drawing/2014/main" id="{540610CD-493C-4502-9A6E-F8F03915D42D}"/>
+                <a16:creationId xmlns:a16="http://schemas.microsoft.com/office/drawing/2014/main" id="{40C2E6C1-FB5A-44C3-BB04-F9AD60C3F529}"/>
               </a:ext>
             </a:extLst>
           </p:cNvPr>
@@ -17144,7 +17144,7 @@
           <p:cNvPr id="5" name="">
             <a:extLst xmlns:a="http://schemas.openxmlformats.org/drawingml/2006/main">
               <a:ext uri="{FF2B5EF4-FFF2-40B4-BE49-F238E27FC236}">
-                <a16:creationId xmlns:a16="http://schemas.microsoft.com/office/drawing/2014/main" id="{7A9B39F3-8A42-4F5F-A9B0-B5AFEF84D582}"/>
+                <a16:creationId xmlns:a16="http://schemas.microsoft.com/office/drawing/2014/main" id="{D92FA85A-4156-4731-82EA-00B87F190DF9}"/>
               </a:ext>
             </a:extLst>
           </p:cNvPr>
@@ -17202,7 +17202,7 @@
           <p:cNvPr id="6" name="">
             <a:extLst xmlns:a="http://schemas.openxmlformats.org/drawingml/2006/main">
               <a:ext uri="{FF2B5EF4-FFF2-40B4-BE49-F238E27FC236}">
-                <a16:creationId xmlns:a16="http://schemas.microsoft.com/office/drawing/2014/main" id="{8CC466C0-109C-4E3B-BF43-389F5404EC72}"/>
+                <a16:creationId xmlns:a16="http://schemas.microsoft.com/office/drawing/2014/main" id="{E5200236-BB8B-4D32-9D63-FA8F33CF3DBE}"/>
               </a:ext>
             </a:extLst>
           </p:cNvPr>
@@ -17260,7 +17260,7 @@
           <p:cNvPr id="7" name="">
             <a:extLst xmlns:a="http://schemas.openxmlformats.org/drawingml/2006/main">
               <a:ext uri="{FF2B5EF4-FFF2-40B4-BE49-F238E27FC236}">
-                <a16:creationId xmlns:a16="http://schemas.microsoft.com/office/drawing/2014/main" id="{1886F8C0-CA88-400D-9B07-1C8FE04AD5B1}"/>
+                <a16:creationId xmlns:a16="http://schemas.microsoft.com/office/drawing/2014/main" id="{16C439A8-4549-476D-9294-0AD04F020CBA}"/>
               </a:ext>
             </a:extLst>
           </p:cNvPr>
@@ -17318,7 +17318,7 @@
           <p:cNvPr id="8" name="">
             <a:extLst xmlns:a="http://schemas.openxmlformats.org/drawingml/2006/main">
               <a:ext uri="{FF2B5EF4-FFF2-40B4-BE49-F238E27FC236}">
-                <a16:creationId xmlns:a16="http://schemas.microsoft.com/office/drawing/2014/main" id="{CE8A0A65-EBA3-4FD5-9824-907ACF27DF85}"/>
+                <a16:creationId xmlns:a16="http://schemas.microsoft.com/office/drawing/2014/main" id="{9F5E4F51-8BE4-494E-9524-3D9ED33348EB}"/>
               </a:ext>
             </a:extLst>
           </p:cNvPr>
@@ -17353,7 +17353,7 @@
           <p:cNvPr id="9" name="">
             <a:extLst xmlns:a="http://schemas.openxmlformats.org/drawingml/2006/main">
               <a:ext uri="{FF2B5EF4-FFF2-40B4-BE49-F238E27FC236}">
-                <a16:creationId xmlns:a16="http://schemas.microsoft.com/office/drawing/2014/main" id="{C2DDF9D0-CEEE-455C-95E7-E13C5772FAC5}"/>
+                <a16:creationId xmlns:a16="http://schemas.microsoft.com/office/drawing/2014/main" id="{7BF0F678-87B2-479A-9B9D-C02474A3D68C}"/>
               </a:ext>
             </a:extLst>
           </p:cNvPr>
@@ -17415,7 +17415,7 @@
           <p:cNvPr id="10" name="">
             <a:extLst xmlns:a="http://schemas.openxmlformats.org/drawingml/2006/main">
               <a:ext uri="{FF2B5EF4-FFF2-40B4-BE49-F238E27FC236}">
-                <a16:creationId xmlns:a16="http://schemas.microsoft.com/office/drawing/2014/main" id="{BF2B3B8A-9A6A-4001-855C-8358F6D4AD83}"/>
+                <a16:creationId xmlns:a16="http://schemas.microsoft.com/office/drawing/2014/main" id="{87D8275D-063A-483D-AFF7-A28849E26093}"/>
               </a:ext>
             </a:extLst>
           </p:cNvPr>
@@ -17473,7 +17473,7 @@
           <p:cNvPr id="11" name="">
             <a:extLst xmlns:a="http://schemas.openxmlformats.org/drawingml/2006/main">
               <a:ext uri="{FF2B5EF4-FFF2-40B4-BE49-F238E27FC236}">
-                <a16:creationId xmlns:a16="http://schemas.microsoft.com/office/drawing/2014/main" id="{6C0E8A91-7EB0-4D61-85E0-74013B643478}"/>
+                <a16:creationId xmlns:a16="http://schemas.microsoft.com/office/drawing/2014/main" id="{CA43A2AF-6D56-4FB4-8404-E3DA993169F0}"/>
               </a:ext>
             </a:extLst>
           </p:cNvPr>
@@ -17554,7 +17554,7 @@
           <p:cNvPr id="12" name="">
             <a:extLst xmlns:a="http://schemas.openxmlformats.org/drawingml/2006/main">
               <a:ext uri="{FF2B5EF4-FFF2-40B4-BE49-F238E27FC236}">
-                <a16:creationId xmlns:a16="http://schemas.microsoft.com/office/drawing/2014/main" id="{764D83A3-EA50-4E1F-9F61-E5E6C6F6ACD0}"/>
+                <a16:creationId xmlns:a16="http://schemas.microsoft.com/office/drawing/2014/main" id="{598E428C-B8A6-4E20-BEA6-C51F049EED3F}"/>
               </a:ext>
             </a:extLst>
           </p:cNvPr>
@@ -17612,7 +17612,7 @@
           <p:cNvPr id="13" name="">
             <a:extLst xmlns:a="http://schemas.openxmlformats.org/drawingml/2006/main">
               <a:ext uri="{FF2B5EF4-FFF2-40B4-BE49-F238E27FC236}">
-                <a16:creationId xmlns:a16="http://schemas.microsoft.com/office/drawing/2014/main" id="{3C5C730D-686B-4D68-8EEB-45F3F405E018}"/>
+                <a16:creationId xmlns:a16="http://schemas.microsoft.com/office/drawing/2014/main" id="{D4F5C876-1D44-473C-A94C-128CC9F7F84F}"/>
               </a:ext>
             </a:extLst>
           </p:cNvPr>
@@ -17647,7 +17647,7 @@
           <p:cNvPr id="14" name="">
             <a:extLst xmlns:a="http://schemas.openxmlformats.org/drawingml/2006/main">
               <a:ext uri="{FF2B5EF4-FFF2-40B4-BE49-F238E27FC236}">
-                <a16:creationId xmlns:a16="http://schemas.microsoft.com/office/drawing/2014/main" id="{040C2266-81E8-4932-9EB4-8DD6E7409E9E}"/>
+                <a16:creationId xmlns:a16="http://schemas.microsoft.com/office/drawing/2014/main" id="{214E3FE4-8C8F-49EC-B4C7-91A62FBD7B91}"/>
               </a:ext>
             </a:extLst>
           </p:cNvPr>
@@ -17709,7 +17709,7 @@
           <p:cNvPr id="15" name="">
             <a:extLst xmlns:a="http://schemas.openxmlformats.org/drawingml/2006/main">
               <a:ext uri="{FF2B5EF4-FFF2-40B4-BE49-F238E27FC236}">
-                <a16:creationId xmlns:a16="http://schemas.microsoft.com/office/drawing/2014/main" id="{34E7BB96-FD40-4B09-AD17-8B7D4405B9A1}"/>
+                <a16:creationId xmlns:a16="http://schemas.microsoft.com/office/drawing/2014/main" id="{2F900DCC-370C-4FC8-B53D-855F29C9C195}"/>
               </a:ext>
             </a:extLst>
           </p:cNvPr>
@@ -17767,7 +17767,7 @@
           <p:cNvPr id="16" name="">
             <a:extLst xmlns:a="http://schemas.openxmlformats.org/drawingml/2006/main">
               <a:ext uri="{FF2B5EF4-FFF2-40B4-BE49-F238E27FC236}">
-                <a16:creationId xmlns:a16="http://schemas.microsoft.com/office/drawing/2014/main" id="{26FEFCC4-C7E7-423D-BD85-1F939D95BEDB}"/>
+                <a16:creationId xmlns:a16="http://schemas.microsoft.com/office/drawing/2014/main" id="{08D5475F-C5D1-4645-91D8-D49A60F4CF4C}"/>
               </a:ext>
             </a:extLst>
           </p:cNvPr>
@@ -17848,7 +17848,7 @@
           <p:cNvPr id="17" name="">
             <a:extLst xmlns:a="http://schemas.openxmlformats.org/drawingml/2006/main">
               <a:ext uri="{FF2B5EF4-FFF2-40B4-BE49-F238E27FC236}">
-                <a16:creationId xmlns:a16="http://schemas.microsoft.com/office/drawing/2014/main" id="{5695F463-61A9-4458-8C01-AAD23399F005}"/>
+                <a16:creationId xmlns:a16="http://schemas.microsoft.com/office/drawing/2014/main" id="{982F1976-264A-4DBC-952C-F55353BE1783}"/>
               </a:ext>
             </a:extLst>
           </p:cNvPr>
@@ -17906,7 +17906,7 @@
           <p:cNvPr id="18" name="">
             <a:extLst xmlns:a="http://schemas.openxmlformats.org/drawingml/2006/main">
               <a:ext uri="{FF2B5EF4-FFF2-40B4-BE49-F238E27FC236}">
-                <a16:creationId xmlns:a16="http://schemas.microsoft.com/office/drawing/2014/main" id="{43E39A23-884F-415F-AD36-A731F6F30C04}"/>
+                <a16:creationId xmlns:a16="http://schemas.microsoft.com/office/drawing/2014/main" id="{0C3E10AC-23F9-4C39-9959-96CC0B033FFB}"/>
               </a:ext>
             </a:extLst>
           </p:cNvPr>
@@ -17941,7 +17941,7 @@
           <p:cNvPr id="19" name="">
             <a:extLst xmlns:a="http://schemas.openxmlformats.org/drawingml/2006/main">
               <a:ext uri="{FF2B5EF4-FFF2-40B4-BE49-F238E27FC236}">
-                <a16:creationId xmlns:a16="http://schemas.microsoft.com/office/drawing/2014/main" id="{F1ECADAB-EB37-4AD2-82FB-FF389132EB0B}"/>
+                <a16:creationId xmlns:a16="http://schemas.microsoft.com/office/drawing/2014/main" id="{70A118BB-DDF3-4289-A7CF-84372DD622D2}"/>
               </a:ext>
             </a:extLst>
           </p:cNvPr>
@@ -18003,7 +18003,7 @@
           <p:cNvPr id="20" name="">
             <a:extLst xmlns:a="http://schemas.openxmlformats.org/drawingml/2006/main">
               <a:ext uri="{FF2B5EF4-FFF2-40B4-BE49-F238E27FC236}">
-                <a16:creationId xmlns:a16="http://schemas.microsoft.com/office/drawing/2014/main" id="{13B30AD6-B29F-4678-99A2-22ECA9BC8E47}"/>
+                <a16:creationId xmlns:a16="http://schemas.microsoft.com/office/drawing/2014/main" id="{32F2853C-B6E4-4615-9939-E6B96976084E}"/>
               </a:ext>
             </a:extLst>
           </p:cNvPr>
@@ -18061,7 +18061,7 @@
           <p:cNvPr id="21" name="">
             <a:extLst xmlns:a="http://schemas.openxmlformats.org/drawingml/2006/main">
               <a:ext uri="{FF2B5EF4-FFF2-40B4-BE49-F238E27FC236}">
-                <a16:creationId xmlns:a16="http://schemas.microsoft.com/office/drawing/2014/main" id="{8B481837-CA37-433C-A011-799154CC41B8}"/>
+                <a16:creationId xmlns:a16="http://schemas.microsoft.com/office/drawing/2014/main" id="{D29F1BD4-C265-4D7A-A217-F5AA15F5C966}"/>
               </a:ext>
             </a:extLst>
           </p:cNvPr>
@@ -18142,7 +18142,7 @@
           <p:cNvPr id="22" name="">
             <a:extLst xmlns:a="http://schemas.openxmlformats.org/drawingml/2006/main">
               <a:ext uri="{FF2B5EF4-FFF2-40B4-BE49-F238E27FC236}">
-                <a16:creationId xmlns:a16="http://schemas.microsoft.com/office/drawing/2014/main" id="{C850C7C4-8546-48BA-942B-2A133545E380}"/>
+                <a16:creationId xmlns:a16="http://schemas.microsoft.com/office/drawing/2014/main" id="{0130331D-EB4E-45AB-8A58-C6F459AA03DA}"/>
               </a:ext>
             </a:extLst>
           </p:cNvPr>
@@ -18200,7 +18200,7 @@
           <p:cNvPr id="23" name="">
             <a:extLst xmlns:a="http://schemas.openxmlformats.org/drawingml/2006/main">
               <a:ext uri="{FF2B5EF4-FFF2-40B4-BE49-F238E27FC236}">
-                <a16:creationId xmlns:a16="http://schemas.microsoft.com/office/drawing/2014/main" id="{0261CF70-1B2A-4F68-B5C7-94676B01BC27}"/>
+                <a16:creationId xmlns:a16="http://schemas.microsoft.com/office/drawing/2014/main" id="{DA1CFDBE-5242-415D-813E-20E0D1672C4B}"/>
               </a:ext>
             </a:extLst>
           </p:cNvPr>
@@ -18235,7 +18235,7 @@
           <p:cNvPr id="24" name="">
             <a:extLst xmlns:a="http://schemas.openxmlformats.org/drawingml/2006/main">
               <a:ext uri="{FF2B5EF4-FFF2-40B4-BE49-F238E27FC236}">
-                <a16:creationId xmlns:a16="http://schemas.microsoft.com/office/drawing/2014/main" id="{CFD1E4D4-23D2-4652-8ABC-5DBCF4E67AE9}"/>
+                <a16:creationId xmlns:a16="http://schemas.microsoft.com/office/drawing/2014/main" id="{B36CC351-95CD-40E5-967B-BB97D2A4C01B}"/>
               </a:ext>
             </a:extLst>
           </p:cNvPr>
@@ -18297,7 +18297,7 @@
           <p:cNvPr id="25" name="">
             <a:extLst xmlns:a="http://schemas.openxmlformats.org/drawingml/2006/main">
               <a:ext uri="{FF2B5EF4-FFF2-40B4-BE49-F238E27FC236}">
-                <a16:creationId xmlns:a16="http://schemas.microsoft.com/office/drawing/2014/main" id="{28B76137-2A98-4994-8CDE-24BAF67A0B2E}"/>
+                <a16:creationId xmlns:a16="http://schemas.microsoft.com/office/drawing/2014/main" id="{089F1A4D-C831-4C32-A82D-3F80AB1416CE}"/>
               </a:ext>
             </a:extLst>
           </p:cNvPr>
@@ -18355,7 +18355,7 @@
           <p:cNvPr id="26" name="">
             <a:extLst xmlns:a="http://schemas.openxmlformats.org/drawingml/2006/main">
               <a:ext uri="{FF2B5EF4-FFF2-40B4-BE49-F238E27FC236}">
-                <a16:creationId xmlns:a16="http://schemas.microsoft.com/office/drawing/2014/main" id="{5DB1B9F1-6924-4599-9C6A-A7CCBD921B52}"/>
+                <a16:creationId xmlns:a16="http://schemas.microsoft.com/office/drawing/2014/main" id="{13137BA7-6E84-4405-9FDC-8E0BA98D491F}"/>
               </a:ext>
             </a:extLst>
           </p:cNvPr>
@@ -18436,7 +18436,7 @@
           <p:cNvPr id="27" name="">
             <a:extLst xmlns:a="http://schemas.openxmlformats.org/drawingml/2006/main">
               <a:ext uri="{FF2B5EF4-FFF2-40B4-BE49-F238E27FC236}">
-                <a16:creationId xmlns:a16="http://schemas.microsoft.com/office/drawing/2014/main" id="{B9FF9CFE-0916-4CFB-AD62-FD066F027891}"/>
+                <a16:creationId xmlns:a16="http://schemas.microsoft.com/office/drawing/2014/main" id="{4CED5991-8245-4C2B-B190-5AEDF68588E4}"/>
               </a:ext>
             </a:extLst>
           </p:cNvPr>
@@ -18494,7 +18494,7 @@
           <p:cNvPr id="28" name="">
             <a:extLst xmlns:a="http://schemas.openxmlformats.org/drawingml/2006/main">
               <a:ext uri="{FF2B5EF4-FFF2-40B4-BE49-F238E27FC236}">
-                <a16:creationId xmlns:a16="http://schemas.microsoft.com/office/drawing/2014/main" id="{6A20A319-5D50-481F-B920-9E88823F3F68}"/>
+                <a16:creationId xmlns:a16="http://schemas.microsoft.com/office/drawing/2014/main" id="{8CBF972B-F752-44BA-AD3F-26E3059E9048}"/>
               </a:ext>
             </a:extLst>
           </p:cNvPr>
@@ -18529,7 +18529,7 @@
           <p:cNvPr id="29" name="">
             <a:extLst xmlns:a="http://schemas.openxmlformats.org/drawingml/2006/main">
               <a:ext uri="{FF2B5EF4-FFF2-40B4-BE49-F238E27FC236}">
-                <a16:creationId xmlns:a16="http://schemas.microsoft.com/office/drawing/2014/main" id="{36C22BD1-D053-4390-9CE8-99A43A56E6D4}"/>
+                <a16:creationId xmlns:a16="http://schemas.microsoft.com/office/drawing/2014/main" id="{B0524198-D00D-46F8-9697-EDD6043D13AB}"/>
               </a:ext>
             </a:extLst>
           </p:cNvPr>
@@ -18591,7 +18591,7 @@
           <p:cNvPr id="30" name="">
             <a:extLst xmlns:a="http://schemas.openxmlformats.org/drawingml/2006/main">
               <a:ext uri="{FF2B5EF4-FFF2-40B4-BE49-F238E27FC236}">
-                <a16:creationId xmlns:a16="http://schemas.microsoft.com/office/drawing/2014/main" id="{855E9A67-0043-43F4-9F29-AF40C129C0FE}"/>
+                <a16:creationId xmlns:a16="http://schemas.microsoft.com/office/drawing/2014/main" id="{F462507B-8E81-40AA-9C1F-B6306E1241AA}"/>
               </a:ext>
             </a:extLst>
           </p:cNvPr>
@@ -18649,7 +18649,7 @@
           <p:cNvPr id="31" name="">
             <a:extLst xmlns:a="http://schemas.openxmlformats.org/drawingml/2006/main">
               <a:ext uri="{FF2B5EF4-FFF2-40B4-BE49-F238E27FC236}">
-                <a16:creationId xmlns:a16="http://schemas.microsoft.com/office/drawing/2014/main" id="{D4CA1303-0294-41A1-8F5B-333699049E67}"/>
+                <a16:creationId xmlns:a16="http://schemas.microsoft.com/office/drawing/2014/main" id="{8FFB0322-BFB9-43AC-94B3-AB1C96776236}"/>
               </a:ext>
             </a:extLst>
           </p:cNvPr>
@@ -18730,7 +18730,7 @@
           <p:cNvPr id="32" name="">
             <a:extLst xmlns:a="http://schemas.openxmlformats.org/drawingml/2006/main">
               <a:ext uri="{FF2B5EF4-FFF2-40B4-BE49-F238E27FC236}">
-                <a16:creationId xmlns:a16="http://schemas.microsoft.com/office/drawing/2014/main" id="{4D506538-C863-4493-9DB5-5AFB04158F5E}"/>
+                <a16:creationId xmlns:a16="http://schemas.microsoft.com/office/drawing/2014/main" id="{8DF5D064-DDF4-4903-954F-916340982E65}"/>
               </a:ext>
             </a:extLst>
           </p:cNvPr>
@@ -18765,7 +18765,7 @@
           <p:cNvPr id="33" name="">
             <a:extLst xmlns:a="http://schemas.openxmlformats.org/drawingml/2006/main">
               <a:ext uri="{FF2B5EF4-FFF2-40B4-BE49-F238E27FC236}">
-                <a16:creationId xmlns:a16="http://schemas.microsoft.com/office/drawing/2014/main" id="{525950C6-1F1D-4257-A8D6-FA1C7B654AF0}"/>
+                <a16:creationId xmlns:a16="http://schemas.microsoft.com/office/drawing/2014/main" id="{15AC59D3-B153-4919-94F0-3518C8B9260C}"/>
               </a:ext>
             </a:extLst>
           </p:cNvPr>
@@ -18823,7 +18823,7 @@
           <p:cNvPr id="34" name="">
             <a:extLst xmlns:a="http://schemas.openxmlformats.org/drawingml/2006/main">
               <a:ext uri="{FF2B5EF4-FFF2-40B4-BE49-F238E27FC236}">
-                <a16:creationId xmlns:a16="http://schemas.microsoft.com/office/drawing/2014/main" id="{98CF3C0C-963A-41FF-8889-19758CAD0AF7}"/>
+                <a16:creationId xmlns:a16="http://schemas.microsoft.com/office/drawing/2014/main" id="{4991036A-09A3-4017-A747-D5DA2E04B9AF}"/>
               </a:ext>
             </a:extLst>
           </p:cNvPr>
@@ -18881,7 +18881,7 @@
           <p:cNvPr id="35" name="">
             <a:extLst xmlns:a="http://schemas.openxmlformats.org/drawingml/2006/main">
               <a:ext uri="{FF2B5EF4-FFF2-40B4-BE49-F238E27FC236}">
-                <a16:creationId xmlns:a16="http://schemas.microsoft.com/office/drawing/2014/main" id="{2CA51333-4225-49B4-96BD-AA0DB50F363A}"/>
+                <a16:creationId xmlns:a16="http://schemas.microsoft.com/office/drawing/2014/main" id="{B19EC4F4-3568-4155-B48D-CA08AA19C025}"/>
               </a:ext>
             </a:extLst>
           </p:cNvPr>
@@ -18939,7 +18939,7 @@
           <p:cNvPr id="36" name="">
             <a:extLst xmlns:a="http://schemas.openxmlformats.org/drawingml/2006/main">
               <a:ext uri="{FF2B5EF4-FFF2-40B4-BE49-F238E27FC236}">
-                <a16:creationId xmlns:a16="http://schemas.microsoft.com/office/drawing/2014/main" id="{7C354FCD-5072-49AE-9C22-9F1CDD431772}"/>
+                <a16:creationId xmlns:a16="http://schemas.microsoft.com/office/drawing/2014/main" id="{5F94A1EE-C72D-4F58-909A-D216B62B0C4B}"/>
               </a:ext>
             </a:extLst>
           </p:cNvPr>
@@ -18974,7 +18974,7 @@
           <p:cNvPr id="37" name="">
             <a:extLst xmlns:a="http://schemas.openxmlformats.org/drawingml/2006/main">
               <a:ext uri="{FF2B5EF4-FFF2-40B4-BE49-F238E27FC236}">
-                <a16:creationId xmlns:a16="http://schemas.microsoft.com/office/drawing/2014/main" id="{119A0267-23B9-43EF-8857-ACC34063B8EE}"/>
+                <a16:creationId xmlns:a16="http://schemas.microsoft.com/office/drawing/2014/main" id="{98ED7238-DA1B-4718-94B6-22111861EC4B}"/>
               </a:ext>
             </a:extLst>
           </p:cNvPr>
@@ -19032,7 +19032,7 @@
           <p:cNvPr id="38" name="">
             <a:extLst xmlns:a="http://schemas.openxmlformats.org/drawingml/2006/main">
               <a:ext uri="{FF2B5EF4-FFF2-40B4-BE49-F238E27FC236}">
-                <a16:creationId xmlns:a16="http://schemas.microsoft.com/office/drawing/2014/main" id="{AE6DE9EE-C979-4C59-9935-50F74CE8632F}"/>
+                <a16:creationId xmlns:a16="http://schemas.microsoft.com/office/drawing/2014/main" id="{D2E776F0-E32C-40C7-9D28-CC6E8662AF2E}"/>
               </a:ext>
             </a:extLst>
           </p:cNvPr>
@@ -19090,7 +19090,7 @@
           <p:cNvPr id="39" name="">
             <a:extLst xmlns:a="http://schemas.openxmlformats.org/drawingml/2006/main">
               <a:ext uri="{FF2B5EF4-FFF2-40B4-BE49-F238E27FC236}">
-                <a16:creationId xmlns:a16="http://schemas.microsoft.com/office/drawing/2014/main" id="{B31D2CD7-E7CB-4CA1-9E77-3D52A4A7175A}"/>
+                <a16:creationId xmlns:a16="http://schemas.microsoft.com/office/drawing/2014/main" id="{24B8F11E-2C1F-4856-BCA8-D2D909EBA75D}"/>
               </a:ext>
             </a:extLst>
           </p:cNvPr>
@@ -19148,7 +19148,7 @@
           <p:cNvPr id="40" name="">
             <a:extLst xmlns:a="http://schemas.openxmlformats.org/drawingml/2006/main">
               <a:ext uri="{FF2B5EF4-FFF2-40B4-BE49-F238E27FC236}">
-                <a16:creationId xmlns:a16="http://schemas.microsoft.com/office/drawing/2014/main" id="{DF19AA43-42BA-4D05-93BD-D41F02AC0524}"/>
+                <a16:creationId xmlns:a16="http://schemas.microsoft.com/office/drawing/2014/main" id="{BD49746F-1C70-4A6A-8414-4CC4932DA8C2}"/>
               </a:ext>
             </a:extLst>
           </p:cNvPr>
@@ -19183,7 +19183,7 @@
           <p:cNvPr id="41" name="">
             <a:extLst xmlns:a="http://schemas.openxmlformats.org/drawingml/2006/main">
               <a:ext uri="{FF2B5EF4-FFF2-40B4-BE49-F238E27FC236}">
-                <a16:creationId xmlns:a16="http://schemas.microsoft.com/office/drawing/2014/main" id="{B3618A6B-F71E-463A-BEA3-0A368BC68F0F}"/>
+                <a16:creationId xmlns:a16="http://schemas.microsoft.com/office/drawing/2014/main" id="{E78C6BA9-A139-410B-ABE1-7E3DF0043609}"/>
               </a:ext>
             </a:extLst>
           </p:cNvPr>
@@ -19241,7 +19241,7 @@
           <p:cNvPr id="42" name="">
             <a:extLst xmlns:a="http://schemas.openxmlformats.org/drawingml/2006/main">
               <a:ext uri="{FF2B5EF4-FFF2-40B4-BE49-F238E27FC236}">
-                <a16:creationId xmlns:a16="http://schemas.microsoft.com/office/drawing/2014/main" id="{305AA096-4110-4340-93C8-8C129A14C882}"/>
+                <a16:creationId xmlns:a16="http://schemas.microsoft.com/office/drawing/2014/main" id="{C47FC7C0-A2DF-4F0A-B2D3-889DC2BF79E9}"/>
               </a:ext>
             </a:extLst>
           </p:cNvPr>
@@ -19299,7 +19299,7 @@
           <p:cNvPr id="43" name="">
             <a:extLst xmlns:a="http://schemas.openxmlformats.org/drawingml/2006/main">
               <a:ext uri="{FF2B5EF4-FFF2-40B4-BE49-F238E27FC236}">
-                <a16:creationId xmlns:a16="http://schemas.microsoft.com/office/drawing/2014/main" id="{450F8900-340E-4055-9343-8CE385CA7E75}"/>
+                <a16:creationId xmlns:a16="http://schemas.microsoft.com/office/drawing/2014/main" id="{9146C37B-33D1-4FC7-B30E-D72D771FB8EA}"/>
               </a:ext>
             </a:extLst>
           </p:cNvPr>
@@ -19357,7 +19357,7 @@
           <p:cNvPr id="44" name="">
             <a:extLst xmlns:a="http://schemas.openxmlformats.org/drawingml/2006/main">
               <a:ext uri="{FF2B5EF4-FFF2-40B4-BE49-F238E27FC236}">
-                <a16:creationId xmlns:a16="http://schemas.microsoft.com/office/drawing/2014/main" id="{612319C1-AFBA-46B7-8C55-C57B218C01F4}"/>
+                <a16:creationId xmlns:a16="http://schemas.microsoft.com/office/drawing/2014/main" id="{12A3DF5D-2F87-4206-8509-E886974AF796}"/>
               </a:ext>
             </a:extLst>
           </p:cNvPr>
@@ -19392,7 +19392,7 @@
           <p:cNvPr id="45" name="">
             <a:extLst xmlns:a="http://schemas.openxmlformats.org/drawingml/2006/main">
               <a:ext uri="{FF2B5EF4-FFF2-40B4-BE49-F238E27FC236}">
-                <a16:creationId xmlns:a16="http://schemas.microsoft.com/office/drawing/2014/main" id="{9AFE632A-287D-4A3F-BF68-05DD43F6A74F}"/>
+                <a16:creationId xmlns:a16="http://schemas.microsoft.com/office/drawing/2014/main" id="{4B85DEA3-595E-422B-8998-3E2875263779}"/>
               </a:ext>
             </a:extLst>
           </p:cNvPr>
@@ -19450,7 +19450,7 @@
           <p:cNvPr id="46" name="">
             <a:extLst xmlns:a="http://schemas.openxmlformats.org/drawingml/2006/main">
               <a:ext uri="{FF2B5EF4-FFF2-40B4-BE49-F238E27FC236}">
-                <a16:creationId xmlns:a16="http://schemas.microsoft.com/office/drawing/2014/main" id="{B167DA91-8CFB-4114-B0BB-15F00377729A}"/>
+                <a16:creationId xmlns:a16="http://schemas.microsoft.com/office/drawing/2014/main" id="{F3612CDE-14EC-4F31-87AC-03593AC3817F}"/>
               </a:ext>
             </a:extLst>
           </p:cNvPr>
@@ -19508,7 +19508,7 @@
           <p:cNvPr id="47" name="">
             <a:extLst xmlns:a="http://schemas.openxmlformats.org/drawingml/2006/main">
               <a:ext uri="{FF2B5EF4-FFF2-40B4-BE49-F238E27FC236}">
-                <a16:creationId xmlns:a16="http://schemas.microsoft.com/office/drawing/2014/main" id="{9DFF3A09-8851-44D2-AE67-4D669CAFAFD6}"/>
+                <a16:creationId xmlns:a16="http://schemas.microsoft.com/office/drawing/2014/main" id="{C4CDBCF4-F41C-4835-983A-2F903BD8437D}"/>
               </a:ext>
             </a:extLst>
           </p:cNvPr>
@@ -19564,7 +19564,7 @@
     </p:spTree>
     <p:extLst>
       <p:ext uri="{BB962C8B-B14F-4D97-AF65-F5344CB8AC3E}">
-        <p14:creationId xmlns:p14="http://schemas.microsoft.com/office/powerpoint/2010/main" val="1021770277"/>
+        <p14:creationId xmlns:p14="http://schemas.microsoft.com/office/powerpoint/2010/main" val="1362176350"/>
       </p:ext>
     </p:extLst>
   </p:cSld>
@@ -19595,7 +19595,7 @@
           <p:cNvPr id="30" name="">
             <a:extLst xmlns:a="http://schemas.openxmlformats.org/drawingml/2006/main">
               <a:ext uri="{FF2B5EF4-FFF2-40B4-BE49-F238E27FC236}">
-                <a16:creationId xmlns:a16="http://schemas.microsoft.com/office/drawing/2014/main" id="{00E4B70D-C159-4ADA-A887-B7D562E3E556}"/>
+                <a16:creationId xmlns:a16="http://schemas.microsoft.com/office/drawing/2014/main" id="{81B32A32-3F57-43CC-BED4-EB2A55503353}"/>
               </a:ext>
             </a:extLst>
           </p:cNvPr>
@@ -19626,7 +19626,7 @@
           <p:cNvPr id="2" name="">
             <a:extLst xmlns:a="http://schemas.openxmlformats.org/drawingml/2006/main">
               <a:ext uri="{FF2B5EF4-FFF2-40B4-BE49-F238E27FC236}">
-                <a16:creationId xmlns:a16="http://schemas.microsoft.com/office/drawing/2014/main" id="{A6DB82A0-9A6F-4EAF-A51F-88AABCD98662}"/>
+                <a16:creationId xmlns:a16="http://schemas.microsoft.com/office/drawing/2014/main" id="{443B393D-7904-4F00-B4E1-F92605276D4A}"/>
               </a:ext>
             </a:extLst>
           </p:cNvPr>
@@ -19684,7 +19684,7 @@
           <p:cNvPr id="3" name="">
             <a:extLst xmlns:a="http://schemas.openxmlformats.org/drawingml/2006/main">
               <a:ext uri="{FF2B5EF4-FFF2-40B4-BE49-F238E27FC236}">
-                <a16:creationId xmlns:a16="http://schemas.microsoft.com/office/drawing/2014/main" id="{A6AB6975-2146-4299-BF71-F64EF765291E}"/>
+                <a16:creationId xmlns:a16="http://schemas.microsoft.com/office/drawing/2014/main" id="{AE7314CD-81D2-4E42-9DF0-D8E8CC32E2C6}"/>
               </a:ext>
             </a:extLst>
           </p:cNvPr>
@@ -19742,7 +19742,7 @@
           <p:cNvPr id="4" name="">
             <a:extLst xmlns:a="http://schemas.openxmlformats.org/drawingml/2006/main">
               <a:ext uri="{FF2B5EF4-FFF2-40B4-BE49-F238E27FC236}">
-                <a16:creationId xmlns:a16="http://schemas.microsoft.com/office/drawing/2014/main" id="{F22BC7FF-B415-42A0-A3F8-59AB995BEAF1}"/>
+                <a16:creationId xmlns:a16="http://schemas.microsoft.com/office/drawing/2014/main" id="{AC0D9E2F-8547-424F-B8BD-CEB70644ACCC}"/>
               </a:ext>
             </a:extLst>
           </p:cNvPr>
@@ -19773,7 +19773,7 @@
           <p:cNvPr id="5" name="">
             <a:extLst xmlns:a="http://schemas.openxmlformats.org/drawingml/2006/main">
               <a:ext uri="{FF2B5EF4-FFF2-40B4-BE49-F238E27FC236}">
-                <a16:creationId xmlns:a16="http://schemas.microsoft.com/office/drawing/2014/main" id="{A6386C16-E899-496E-B3C6-09651FA56EDA}"/>
+                <a16:creationId xmlns:a16="http://schemas.microsoft.com/office/drawing/2014/main" id="{86E5F1B0-D6EE-45C4-8EB8-74E2761524D4}"/>
               </a:ext>
             </a:extLst>
           </p:cNvPr>
@@ -19831,7 +19831,7 @@
           <p:cNvPr id="6" name="">
             <a:extLst xmlns:a="http://schemas.openxmlformats.org/drawingml/2006/main">
               <a:ext uri="{FF2B5EF4-FFF2-40B4-BE49-F238E27FC236}">
-                <a16:creationId xmlns:a16="http://schemas.microsoft.com/office/drawing/2014/main" id="{24DDF853-CB1D-485D-983E-6F9CF46975E8}"/>
+                <a16:creationId xmlns:a16="http://schemas.microsoft.com/office/drawing/2014/main" id="{87D2C7AE-2D4C-4963-A892-CC255FF637E5}"/>
               </a:ext>
             </a:extLst>
           </p:cNvPr>
@@ -19889,7 +19889,7 @@
           <p:cNvPr id="7" name="">
             <a:extLst xmlns:a="http://schemas.openxmlformats.org/drawingml/2006/main">
               <a:ext uri="{FF2B5EF4-FFF2-40B4-BE49-F238E27FC236}">
-                <a16:creationId xmlns:a16="http://schemas.microsoft.com/office/drawing/2014/main" id="{69F4E570-D935-4C08-B321-E014F37B40BE}"/>
+                <a16:creationId xmlns:a16="http://schemas.microsoft.com/office/drawing/2014/main" id="{0ADDB3AC-DB82-4259-BB7B-FAA1F29412D0}"/>
               </a:ext>
             </a:extLst>
           </p:cNvPr>
@@ -19947,7 +19947,7 @@
           <p:cNvPr id="8" name="">
             <a:extLst xmlns:a="http://schemas.openxmlformats.org/drawingml/2006/main">
               <a:ext uri="{FF2B5EF4-FFF2-40B4-BE49-F238E27FC236}">
-                <a16:creationId xmlns:a16="http://schemas.microsoft.com/office/drawing/2014/main" id="{BD5570AE-9626-4A08-AC6B-0BB05614A504}"/>
+                <a16:creationId xmlns:a16="http://schemas.microsoft.com/office/drawing/2014/main" id="{CD39545A-C27A-435E-95BF-E09984C972A6}"/>
               </a:ext>
             </a:extLst>
           </p:cNvPr>
@@ -20005,7 +20005,7 @@
           <p:cNvPr id="9" name="">
             <a:extLst xmlns:a="http://schemas.openxmlformats.org/drawingml/2006/main">
               <a:ext uri="{FF2B5EF4-FFF2-40B4-BE49-F238E27FC236}">
-                <a16:creationId xmlns:a16="http://schemas.microsoft.com/office/drawing/2014/main" id="{35397683-27DC-4438-8E6A-6682E1634EEC}"/>
+                <a16:creationId xmlns:a16="http://schemas.microsoft.com/office/drawing/2014/main" id="{3D534779-21BB-4F46-8694-D65814A05C09}"/>
               </a:ext>
             </a:extLst>
           </p:cNvPr>
@@ -20036,7 +20036,7 @@
           <p:cNvPr id="10" name="">
             <a:extLst xmlns:a="http://schemas.openxmlformats.org/drawingml/2006/main">
               <a:ext uri="{FF2B5EF4-FFF2-40B4-BE49-F238E27FC236}">
-                <a16:creationId xmlns:a16="http://schemas.microsoft.com/office/drawing/2014/main" id="{9E679AE7-C617-4B76-B2C7-BCBED94F50B6}"/>
+                <a16:creationId xmlns:a16="http://schemas.microsoft.com/office/drawing/2014/main" id="{336EDF7C-092A-4063-B3C9-FF28420F7329}"/>
               </a:ext>
             </a:extLst>
           </p:cNvPr>
@@ -20067,7 +20067,7 @@
           <p:cNvPr id="11" name="">
             <a:extLst xmlns:a="http://schemas.openxmlformats.org/drawingml/2006/main">
               <a:ext uri="{FF2B5EF4-FFF2-40B4-BE49-F238E27FC236}">
-                <a16:creationId xmlns:a16="http://schemas.microsoft.com/office/drawing/2014/main" id="{71DE3441-BAF8-48EE-9FF9-407F467BCD79}"/>
+                <a16:creationId xmlns:a16="http://schemas.microsoft.com/office/drawing/2014/main" id="{7356ECF0-EF6B-41D9-BB0E-C053973C5A62}"/>
               </a:ext>
             </a:extLst>
           </p:cNvPr>
@@ -20098,7 +20098,7 @@
           <p:cNvPr id="12" name="">
             <a:extLst xmlns:a="http://schemas.openxmlformats.org/drawingml/2006/main">
               <a:ext uri="{FF2B5EF4-FFF2-40B4-BE49-F238E27FC236}">
-                <a16:creationId xmlns:a16="http://schemas.microsoft.com/office/drawing/2014/main" id="{C482094D-AB98-4993-B07E-53ACA9468926}"/>
+                <a16:creationId xmlns:a16="http://schemas.microsoft.com/office/drawing/2014/main" id="{7D79DE35-CA4F-4470-BACE-B00B0F753051}"/>
               </a:ext>
             </a:extLst>
           </p:cNvPr>
@@ -20129,7 +20129,7 @@
           <p:cNvPr id="13" name="">
             <a:extLst xmlns:a="http://schemas.openxmlformats.org/drawingml/2006/main">
               <a:ext uri="{FF2B5EF4-FFF2-40B4-BE49-F238E27FC236}">
-                <a16:creationId xmlns:a16="http://schemas.microsoft.com/office/drawing/2014/main" id="{AF83A610-5FAD-44C9-AC1D-C380937519E6}"/>
+                <a16:creationId xmlns:a16="http://schemas.microsoft.com/office/drawing/2014/main" id="{5F664163-925D-4EF4-AFCC-522AC8EBC6B1}"/>
               </a:ext>
             </a:extLst>
           </p:cNvPr>
@@ -20187,7 +20187,7 @@
           <p:cNvPr id="14" name="">
             <a:extLst xmlns:a="http://schemas.openxmlformats.org/drawingml/2006/main">
               <a:ext uri="{FF2B5EF4-FFF2-40B4-BE49-F238E27FC236}">
-                <a16:creationId xmlns:a16="http://schemas.microsoft.com/office/drawing/2014/main" id="{5EBDAEB8-AA61-4D59-9227-E3A6D4CF0F07}"/>
+                <a16:creationId xmlns:a16="http://schemas.microsoft.com/office/drawing/2014/main" id="{1D35B7CD-F731-43D1-9A79-A40EDBE60C05}"/>
               </a:ext>
             </a:extLst>
           </p:cNvPr>
@@ -20245,7 +20245,7 @@
           <p:cNvPr id="15" name="">
             <a:extLst xmlns:a="http://schemas.openxmlformats.org/drawingml/2006/main">
               <a:ext uri="{FF2B5EF4-FFF2-40B4-BE49-F238E27FC236}">
-                <a16:creationId xmlns:a16="http://schemas.microsoft.com/office/drawing/2014/main" id="{D8BE28C7-B9CC-4509-A4D2-820730285965}"/>
+                <a16:creationId xmlns:a16="http://schemas.microsoft.com/office/drawing/2014/main" id="{D574B90E-847F-4512-BC3B-697A30ED190F}"/>
               </a:ext>
             </a:extLst>
           </p:cNvPr>
@@ -20303,7 +20303,7 @@
           <p:cNvPr id="16" name="">
             <a:extLst xmlns:a="http://schemas.openxmlformats.org/drawingml/2006/main">
               <a:ext uri="{FF2B5EF4-FFF2-40B4-BE49-F238E27FC236}">
-                <a16:creationId xmlns:a16="http://schemas.microsoft.com/office/drawing/2014/main" id="{A6E99867-6820-406F-924A-E8BE75AE09C4}"/>
+                <a16:creationId xmlns:a16="http://schemas.microsoft.com/office/drawing/2014/main" id="{F8874157-1B08-467F-940B-2DB01234E2CC}"/>
               </a:ext>
             </a:extLst>
           </p:cNvPr>
@@ -20338,7 +20338,7 @@
           <p:cNvPr id="17" name="">
             <a:extLst xmlns:a="http://schemas.openxmlformats.org/drawingml/2006/main">
               <a:ext uri="{FF2B5EF4-FFF2-40B4-BE49-F238E27FC236}">
-                <a16:creationId xmlns:a16="http://schemas.microsoft.com/office/drawing/2014/main" id="{F428D236-4D2B-43D9-BD0B-F3F4DFA0D2C2}"/>
+                <a16:creationId xmlns:a16="http://schemas.microsoft.com/office/drawing/2014/main" id="{92DE206F-513F-44BD-BD18-005C80B8B25F}"/>
               </a:ext>
             </a:extLst>
           </p:cNvPr>
@@ -20371,7 +20371,7 @@
           <p:cNvPr id="18" name="">
             <a:extLst xmlns:a="http://schemas.openxmlformats.org/drawingml/2006/main">
               <a:ext uri="{FF2B5EF4-FFF2-40B4-BE49-F238E27FC236}">
-                <a16:creationId xmlns:a16="http://schemas.microsoft.com/office/drawing/2014/main" id="{385C3D94-B6CE-4144-B9FF-01B3F433EEF3}"/>
+                <a16:creationId xmlns:a16="http://schemas.microsoft.com/office/drawing/2014/main" id="{87C600A4-FB9F-42C1-A8DD-E32E3F3BF4E6}"/>
               </a:ext>
             </a:extLst>
           </p:cNvPr>
@@ -20429,7 +20429,7 @@
           <p:cNvPr id="19" name="">
             <a:extLst xmlns:a="http://schemas.openxmlformats.org/drawingml/2006/main">
               <a:ext uri="{FF2B5EF4-FFF2-40B4-BE49-F238E27FC236}">
-                <a16:creationId xmlns:a16="http://schemas.microsoft.com/office/drawing/2014/main" id="{4632641E-0112-4C67-9BC4-55D3A7F8274D}"/>
+                <a16:creationId xmlns:a16="http://schemas.microsoft.com/office/drawing/2014/main" id="{3912A547-4879-4311-89BC-19727F750EAF}"/>
               </a:ext>
             </a:extLst>
           </p:cNvPr>
@@ -20487,7 +20487,7 @@
           <p:cNvPr id="20" name="">
             <a:extLst xmlns:a="http://schemas.openxmlformats.org/drawingml/2006/main">
               <a:ext uri="{FF2B5EF4-FFF2-40B4-BE49-F238E27FC236}">
-                <a16:creationId xmlns:a16="http://schemas.microsoft.com/office/drawing/2014/main" id="{D5B74728-44E4-4634-82D7-FD570DB57651}"/>
+                <a16:creationId xmlns:a16="http://schemas.microsoft.com/office/drawing/2014/main" id="{DDDDA16D-4EA7-451D-9097-2E390028C9AC}"/>
               </a:ext>
             </a:extLst>
           </p:cNvPr>
@@ -20522,7 +20522,7 @@
           <p:cNvPr id="21" name="">
             <a:extLst xmlns:a="http://schemas.openxmlformats.org/drawingml/2006/main">
               <a:ext uri="{FF2B5EF4-FFF2-40B4-BE49-F238E27FC236}">
-                <a16:creationId xmlns:a16="http://schemas.microsoft.com/office/drawing/2014/main" id="{9893557B-980E-4CA2-AE61-144A2089666D}"/>
+                <a16:creationId xmlns:a16="http://schemas.microsoft.com/office/drawing/2014/main" id="{AD6B76C5-7C13-4AEC-93B7-5A3DE646CCA0}"/>
               </a:ext>
             </a:extLst>
           </p:cNvPr>
@@ -20580,7 +20580,7 @@
           <p:cNvPr id="22" name="">
             <a:extLst xmlns:a="http://schemas.openxmlformats.org/drawingml/2006/main">
               <a:ext uri="{FF2B5EF4-FFF2-40B4-BE49-F238E27FC236}">
-                <a16:creationId xmlns:a16="http://schemas.microsoft.com/office/drawing/2014/main" id="{208FAF08-D727-47B6-829D-AC52E25A27EC}"/>
+                <a16:creationId xmlns:a16="http://schemas.microsoft.com/office/drawing/2014/main" id="{46D5CCA6-BE92-4B69-9CB4-3B1ABAB1C132}"/>
               </a:ext>
             </a:extLst>
           </p:cNvPr>
@@ -20638,7 +20638,7 @@
           <p:cNvPr id="23" name="">
             <a:extLst xmlns:a="http://schemas.openxmlformats.org/drawingml/2006/main">
               <a:ext uri="{FF2B5EF4-FFF2-40B4-BE49-F238E27FC236}">
-                <a16:creationId xmlns:a16="http://schemas.microsoft.com/office/drawing/2014/main" id="{80BE19DF-1183-4EBE-BDF1-3FD207296055}"/>
+                <a16:creationId xmlns:a16="http://schemas.microsoft.com/office/drawing/2014/main" id="{1D86CB17-A1E6-4A79-814D-E727CCFBCF26}"/>
               </a:ext>
             </a:extLst>
           </p:cNvPr>
@@ -20673,7 +20673,7 @@
           <p:cNvPr id="24" name="">
             <a:extLst xmlns:a="http://schemas.openxmlformats.org/drawingml/2006/main">
               <a:ext uri="{FF2B5EF4-FFF2-40B4-BE49-F238E27FC236}">
-                <a16:creationId xmlns:a16="http://schemas.microsoft.com/office/drawing/2014/main" id="{9448DEC1-DAD5-46FA-9578-C95FCB83AC26}"/>
+                <a16:creationId xmlns:a16="http://schemas.microsoft.com/office/drawing/2014/main" id="{30FEC5C4-1430-4702-83FD-2E130B73DB66}"/>
               </a:ext>
             </a:extLst>
           </p:cNvPr>
@@ -20731,7 +20731,7 @@
           <p:cNvPr id="25" name="">
             <a:extLst xmlns:a="http://schemas.openxmlformats.org/drawingml/2006/main">
               <a:ext uri="{FF2B5EF4-FFF2-40B4-BE49-F238E27FC236}">
-                <a16:creationId xmlns:a16="http://schemas.microsoft.com/office/drawing/2014/main" id="{10D25447-057D-44C6-9DA3-F99AADBB5B45}"/>
+                <a16:creationId xmlns:a16="http://schemas.microsoft.com/office/drawing/2014/main" id="{5A948089-ECD9-4198-BA2B-82703C510005}"/>
               </a:ext>
             </a:extLst>
           </p:cNvPr>
@@ -20789,7 +20789,7 @@
           <p:cNvPr id="26" name="">
             <a:extLst xmlns:a="http://schemas.openxmlformats.org/drawingml/2006/main">
               <a:ext uri="{FF2B5EF4-FFF2-40B4-BE49-F238E27FC236}">
-                <a16:creationId xmlns:a16="http://schemas.microsoft.com/office/drawing/2014/main" id="{910EB746-5DB4-4D21-B7C9-90CA90A81BED}"/>
+                <a16:creationId xmlns:a16="http://schemas.microsoft.com/office/drawing/2014/main" id="{8D9F126B-AC3B-4BAD-8C49-FFE3B3EBB278}"/>
               </a:ext>
             </a:extLst>
           </p:cNvPr>
@@ -20824,7 +20824,7 @@
           <p:cNvPr id="27" name="">
             <a:extLst xmlns:a="http://schemas.openxmlformats.org/drawingml/2006/main">
               <a:ext uri="{FF2B5EF4-FFF2-40B4-BE49-F238E27FC236}">
-                <a16:creationId xmlns:a16="http://schemas.microsoft.com/office/drawing/2014/main" id="{932A6310-9AAA-4BEF-B639-C4FD7587C0A8}"/>
+                <a16:creationId xmlns:a16="http://schemas.microsoft.com/office/drawing/2014/main" id="{A78356B5-0407-4B3D-84A4-38467A1EEAA4}"/>
               </a:ext>
             </a:extLst>
           </p:cNvPr>
@@ -20882,7 +20882,7 @@
           <p:cNvPr id="28" name="">
             <a:extLst xmlns:a="http://schemas.openxmlformats.org/drawingml/2006/main">
               <a:ext uri="{FF2B5EF4-FFF2-40B4-BE49-F238E27FC236}">
-                <a16:creationId xmlns:a16="http://schemas.microsoft.com/office/drawing/2014/main" id="{99D34927-C57E-4D2F-9C87-7386ED5DF918}"/>
+                <a16:creationId xmlns:a16="http://schemas.microsoft.com/office/drawing/2014/main" id="{2D9A65F4-4A9A-42A9-9D7B-256D3D77032A}"/>
               </a:ext>
             </a:extLst>
           </p:cNvPr>
@@ -20940,7 +20940,7 @@
           <p:cNvPr id="29" name="">
             <a:extLst xmlns:a="http://schemas.openxmlformats.org/drawingml/2006/main">
               <a:ext uri="{FF2B5EF4-FFF2-40B4-BE49-F238E27FC236}">
-                <a16:creationId xmlns:a16="http://schemas.microsoft.com/office/drawing/2014/main" id="{AF306B60-0C7B-4AA4-B1FF-476008803980}"/>
+                <a16:creationId xmlns:a16="http://schemas.microsoft.com/office/drawing/2014/main" id="{3926D2B1-EED0-42DB-83EF-19B9B3CF6673}"/>
               </a:ext>
             </a:extLst>
           </p:cNvPr>
@@ -20996,7 +20996,7 @@
     </p:spTree>
     <p:extLst>
       <p:ext uri="{BB962C8B-B14F-4D97-AF65-F5344CB8AC3E}">
-        <p14:creationId xmlns:p14="http://schemas.microsoft.com/office/powerpoint/2010/main" val="2078300882"/>
+        <p14:creationId xmlns:p14="http://schemas.microsoft.com/office/powerpoint/2010/main" val="1333065954"/>
       </p:ext>
     </p:extLst>
   </p:cSld>
@@ -21027,7 +21027,7 @@
           <p:cNvPr id="39" name="">
             <a:extLst xmlns:a="http://schemas.openxmlformats.org/drawingml/2006/main">
               <a:ext uri="{FF2B5EF4-FFF2-40B4-BE49-F238E27FC236}">
-                <a16:creationId xmlns:a16="http://schemas.microsoft.com/office/drawing/2014/main" id="{6CC86B5F-9D61-4900-9806-EC9543A66540}"/>
+                <a16:creationId xmlns:a16="http://schemas.microsoft.com/office/drawing/2014/main" id="{DB077B4D-B446-4A77-9746-B15434E0E490}"/>
               </a:ext>
             </a:extLst>
           </p:cNvPr>
@@ -21058,7 +21058,7 @@
           <p:cNvPr id="2" name="">
             <a:extLst xmlns:a="http://schemas.openxmlformats.org/drawingml/2006/main">
               <a:ext uri="{FF2B5EF4-FFF2-40B4-BE49-F238E27FC236}">
-                <a16:creationId xmlns:a16="http://schemas.microsoft.com/office/drawing/2014/main" id="{731B6751-91F5-4FEF-8B9E-E54C6BAB0DE3}"/>
+                <a16:creationId xmlns:a16="http://schemas.microsoft.com/office/drawing/2014/main" id="{B6F520AC-993D-4F21-A4B7-BAB3F6FC68A3}"/>
               </a:ext>
             </a:extLst>
           </p:cNvPr>
@@ -21116,7 +21116,7 @@
           <p:cNvPr id="3" name="">
             <a:extLst xmlns:a="http://schemas.openxmlformats.org/drawingml/2006/main">
               <a:ext uri="{FF2B5EF4-FFF2-40B4-BE49-F238E27FC236}">
-                <a16:creationId xmlns:a16="http://schemas.microsoft.com/office/drawing/2014/main" id="{94CAFC73-236A-471D-ABE6-8B25B600ABC6}"/>
+                <a16:creationId xmlns:a16="http://schemas.microsoft.com/office/drawing/2014/main" id="{76478CAD-13C6-4C27-9936-C27E79CA9B66}"/>
               </a:ext>
             </a:extLst>
           </p:cNvPr>
@@ -21174,7 +21174,7 @@
           <p:cNvPr id="4" name="">
             <a:extLst xmlns:a="http://schemas.openxmlformats.org/drawingml/2006/main">
               <a:ext uri="{FF2B5EF4-FFF2-40B4-BE49-F238E27FC236}">
-                <a16:creationId xmlns:a16="http://schemas.microsoft.com/office/drawing/2014/main" id="{3D561ACC-F932-4D91-BD96-92EBB0A76722}"/>
+                <a16:creationId xmlns:a16="http://schemas.microsoft.com/office/drawing/2014/main" id="{158303C6-3102-4CC7-A8BE-3D815324484F}"/>
               </a:ext>
             </a:extLst>
           </p:cNvPr>
@@ -21205,7 +21205,7 @@
           <p:cNvPr id="5" name="">
             <a:extLst xmlns:a="http://schemas.openxmlformats.org/drawingml/2006/main">
               <a:ext uri="{FF2B5EF4-FFF2-40B4-BE49-F238E27FC236}">
-                <a16:creationId xmlns:a16="http://schemas.microsoft.com/office/drawing/2014/main" id="{BBDD1319-510B-4C24-8A7A-50816D40A37A}"/>
+                <a16:creationId xmlns:a16="http://schemas.microsoft.com/office/drawing/2014/main" id="{574C12E0-0D53-4593-AB6C-DD28AF7F8D4D}"/>
               </a:ext>
             </a:extLst>
           </p:cNvPr>
@@ -21263,7 +21263,7 @@
           <p:cNvPr id="6" name="">
             <a:extLst xmlns:a="http://schemas.openxmlformats.org/drawingml/2006/main">
               <a:ext uri="{FF2B5EF4-FFF2-40B4-BE49-F238E27FC236}">
-                <a16:creationId xmlns:a16="http://schemas.microsoft.com/office/drawing/2014/main" id="{CC3932DD-B1E5-4B8F-A143-F5A6715E6623}"/>
+                <a16:creationId xmlns:a16="http://schemas.microsoft.com/office/drawing/2014/main" id="{3B722A8C-D1B1-4723-BEE0-1791EAD62964}"/>
               </a:ext>
             </a:extLst>
           </p:cNvPr>
@@ -21321,7 +21321,7 @@
           <p:cNvPr id="7" name="">
             <a:extLst xmlns:a="http://schemas.openxmlformats.org/drawingml/2006/main">
               <a:ext uri="{FF2B5EF4-FFF2-40B4-BE49-F238E27FC236}">
-                <a16:creationId xmlns:a16="http://schemas.microsoft.com/office/drawing/2014/main" id="{6D51E37F-6014-434E-86C0-F4F9FD73EAFF}"/>
+                <a16:creationId xmlns:a16="http://schemas.microsoft.com/office/drawing/2014/main" id="{A85C3B1C-3910-410B-B6CD-8E620D718978}"/>
               </a:ext>
             </a:extLst>
           </p:cNvPr>
@@ -21379,7 +21379,7 @@
           <p:cNvPr id="8" name="">
             <a:extLst xmlns:a="http://schemas.openxmlformats.org/drawingml/2006/main">
               <a:ext uri="{FF2B5EF4-FFF2-40B4-BE49-F238E27FC236}">
-                <a16:creationId xmlns:a16="http://schemas.microsoft.com/office/drawing/2014/main" id="{392A68EE-B7CC-41B2-9F7E-CF26FD822754}"/>
+                <a16:creationId xmlns:a16="http://schemas.microsoft.com/office/drawing/2014/main" id="{C5366DC8-006D-4525-8720-9F40F11F27C3}"/>
               </a:ext>
             </a:extLst>
           </p:cNvPr>
@@ -21412,7 +21412,7 @@
           <p:cNvPr id="9" name="">
             <a:extLst xmlns:a="http://schemas.openxmlformats.org/drawingml/2006/main">
               <a:ext uri="{FF2B5EF4-FFF2-40B4-BE49-F238E27FC236}">
-                <a16:creationId xmlns:a16="http://schemas.microsoft.com/office/drawing/2014/main" id="{27433E9B-C0F3-462A-92D1-428A4A3B5BFB}"/>
+                <a16:creationId xmlns:a16="http://schemas.microsoft.com/office/drawing/2014/main" id="{46290E49-3973-4B76-99EB-A0F0CC72B69B}"/>
               </a:ext>
             </a:extLst>
           </p:cNvPr>
@@ -21470,7 +21470,7 @@
           <p:cNvPr id="10" name="">
             <a:extLst xmlns:a="http://schemas.openxmlformats.org/drawingml/2006/main">
               <a:ext uri="{FF2B5EF4-FFF2-40B4-BE49-F238E27FC236}">
-                <a16:creationId xmlns:a16="http://schemas.microsoft.com/office/drawing/2014/main" id="{1EBBA2A5-7F87-4762-9CDA-2667A7E94C78}"/>
+                <a16:creationId xmlns:a16="http://schemas.microsoft.com/office/drawing/2014/main" id="{B5636119-FDEB-478F-92E6-26E504621FD1}"/>
               </a:ext>
             </a:extLst>
           </p:cNvPr>
@@ -21551,7 +21551,7 @@
           <p:cNvPr id="11" name="">
             <a:extLst xmlns:a="http://schemas.openxmlformats.org/drawingml/2006/main">
               <a:ext uri="{FF2B5EF4-FFF2-40B4-BE49-F238E27FC236}">
-                <a16:creationId xmlns:a16="http://schemas.microsoft.com/office/drawing/2014/main" id="{BA43F5B7-E60F-425E-B90C-D84C7C889BA9}"/>
+                <a16:creationId xmlns:a16="http://schemas.microsoft.com/office/drawing/2014/main" id="{EC7EFE86-30CA-4582-822C-C95FB4E77800}"/>
               </a:ext>
             </a:extLst>
           </p:cNvPr>
@@ -21609,7 +21609,7 @@
           <p:cNvPr id="12" name="">
             <a:extLst xmlns:a="http://schemas.openxmlformats.org/drawingml/2006/main">
               <a:ext uri="{FF2B5EF4-FFF2-40B4-BE49-F238E27FC236}">
-                <a16:creationId xmlns:a16="http://schemas.microsoft.com/office/drawing/2014/main" id="{E06D12B9-BF29-42C1-8EB6-FFD518A343B2}"/>
+                <a16:creationId xmlns:a16="http://schemas.microsoft.com/office/drawing/2014/main" id="{54F1CF9A-98AE-460B-B014-D704BC50B1F9}"/>
               </a:ext>
             </a:extLst>
           </p:cNvPr>
@@ -21642,7 +21642,7 @@
           <p:cNvPr id="13" name="">
             <a:extLst xmlns:a="http://schemas.openxmlformats.org/drawingml/2006/main">
               <a:ext uri="{FF2B5EF4-FFF2-40B4-BE49-F238E27FC236}">
-                <a16:creationId xmlns:a16="http://schemas.microsoft.com/office/drawing/2014/main" id="{4C2EBBB5-3DA4-4AAC-B165-C564460A1F66}"/>
+                <a16:creationId xmlns:a16="http://schemas.microsoft.com/office/drawing/2014/main" id="{6015768B-470F-4059-8A8F-FFDE04D11274}"/>
               </a:ext>
             </a:extLst>
           </p:cNvPr>
@@ -21700,7 +21700,7 @@
           <p:cNvPr id="14" name="">
             <a:extLst xmlns:a="http://schemas.openxmlformats.org/drawingml/2006/main">
               <a:ext uri="{FF2B5EF4-FFF2-40B4-BE49-F238E27FC236}">
-                <a16:creationId xmlns:a16="http://schemas.microsoft.com/office/drawing/2014/main" id="{E9CA4560-80B5-438A-87F1-C5840D45D954}"/>
+                <a16:creationId xmlns:a16="http://schemas.microsoft.com/office/drawing/2014/main" id="{D07C6688-3CB5-442B-AB89-9FAD0C64EA9F}"/>
               </a:ext>
             </a:extLst>
           </p:cNvPr>
@@ -21781,7 +21781,7 @@
           <p:cNvPr id="15" name="">
             <a:extLst xmlns:a="http://schemas.openxmlformats.org/drawingml/2006/main">
               <a:ext uri="{FF2B5EF4-FFF2-40B4-BE49-F238E27FC236}">
-                <a16:creationId xmlns:a16="http://schemas.microsoft.com/office/drawing/2014/main" id="{70E9893A-1859-4143-BD3D-53D3C8725B7C}"/>
+                <a16:creationId xmlns:a16="http://schemas.microsoft.com/office/drawing/2014/main" id="{6EFAA00F-D506-4502-83B0-893BF20F40B2}"/>
               </a:ext>
             </a:extLst>
           </p:cNvPr>
@@ -21839,7 +21839,7 @@
           <p:cNvPr id="16" name="">
             <a:extLst xmlns:a="http://schemas.openxmlformats.org/drawingml/2006/main">
               <a:ext uri="{FF2B5EF4-FFF2-40B4-BE49-F238E27FC236}">
-                <a16:creationId xmlns:a16="http://schemas.microsoft.com/office/drawing/2014/main" id="{9365C3FF-D88C-44B3-B036-1FFC0CBAA0D4}"/>
+                <a16:creationId xmlns:a16="http://schemas.microsoft.com/office/drawing/2014/main" id="{9E75865D-7224-47F5-9417-C61D6DF381BE}"/>
               </a:ext>
             </a:extLst>
           </p:cNvPr>
@@ -21872,7 +21872,7 @@
           <p:cNvPr id="17" name="">
             <a:extLst xmlns:a="http://schemas.openxmlformats.org/drawingml/2006/main">
               <a:ext uri="{FF2B5EF4-FFF2-40B4-BE49-F238E27FC236}">
-                <a16:creationId xmlns:a16="http://schemas.microsoft.com/office/drawing/2014/main" id="{22F9FA2F-B87D-4653-9C19-6F8F978DC3B1}"/>
+                <a16:creationId xmlns:a16="http://schemas.microsoft.com/office/drawing/2014/main" id="{5A4F21AF-D684-488F-AEFA-BD2EEC532D05}"/>
               </a:ext>
             </a:extLst>
           </p:cNvPr>
@@ -21930,7 +21930,7 @@
           <p:cNvPr id="18" name="">
             <a:extLst xmlns:a="http://schemas.openxmlformats.org/drawingml/2006/main">
               <a:ext uri="{FF2B5EF4-FFF2-40B4-BE49-F238E27FC236}">
-                <a16:creationId xmlns:a16="http://schemas.microsoft.com/office/drawing/2014/main" id="{DCC0F621-F6B2-43E3-8359-438D8C08545A}"/>
+                <a16:creationId xmlns:a16="http://schemas.microsoft.com/office/drawing/2014/main" id="{97A67B04-D827-4254-B0E9-848048BF77D0}"/>
               </a:ext>
             </a:extLst>
           </p:cNvPr>
@@ -22011,7 +22011,7 @@
           <p:cNvPr id="19" name="">
             <a:extLst xmlns:a="http://schemas.openxmlformats.org/drawingml/2006/main">
               <a:ext uri="{FF2B5EF4-FFF2-40B4-BE49-F238E27FC236}">
-                <a16:creationId xmlns:a16="http://schemas.microsoft.com/office/drawing/2014/main" id="{F3796599-E56F-4A6F-8AC8-53D4AAAB0DBF}"/>
+                <a16:creationId xmlns:a16="http://schemas.microsoft.com/office/drawing/2014/main" id="{7906DEA3-82FE-4386-81A5-C61EBFAF8164}"/>
               </a:ext>
             </a:extLst>
           </p:cNvPr>
@@ -22069,7 +22069,7 @@
           <p:cNvPr id="20" name="">
             <a:extLst xmlns:a="http://schemas.openxmlformats.org/drawingml/2006/main">
               <a:ext uri="{FF2B5EF4-FFF2-40B4-BE49-F238E27FC236}">
-                <a16:creationId xmlns:a16="http://schemas.microsoft.com/office/drawing/2014/main" id="{A8B2F703-0DF0-4BF7-A811-098E6E9F6C0A}"/>
+                <a16:creationId xmlns:a16="http://schemas.microsoft.com/office/drawing/2014/main" id="{2884DF4D-8DF7-4E87-B148-F54E8D9A0FF6}"/>
               </a:ext>
             </a:extLst>
           </p:cNvPr>
@@ -22102,7 +22102,7 @@
           <p:cNvPr id="21" name="">
             <a:extLst xmlns:a="http://schemas.openxmlformats.org/drawingml/2006/main">
               <a:ext uri="{FF2B5EF4-FFF2-40B4-BE49-F238E27FC236}">
-                <a16:creationId xmlns:a16="http://schemas.microsoft.com/office/drawing/2014/main" id="{D94848B2-04C0-4A72-B3A6-386B69C3FAAA}"/>
+                <a16:creationId xmlns:a16="http://schemas.microsoft.com/office/drawing/2014/main" id="{7D8B0EC4-447A-42DD-80D0-6080957F64AA}"/>
               </a:ext>
             </a:extLst>
           </p:cNvPr>
@@ -22160,7 +22160,7 @@
           <p:cNvPr id="22" name="">
             <a:extLst xmlns:a="http://schemas.openxmlformats.org/drawingml/2006/main">
               <a:ext uri="{FF2B5EF4-FFF2-40B4-BE49-F238E27FC236}">
-                <a16:creationId xmlns:a16="http://schemas.microsoft.com/office/drawing/2014/main" id="{B55BDB08-AB2B-4F01-B126-587AA232A814}"/>
+                <a16:creationId xmlns:a16="http://schemas.microsoft.com/office/drawing/2014/main" id="{5A7C4B2F-0400-4918-AA43-559E77714D1B}"/>
               </a:ext>
             </a:extLst>
           </p:cNvPr>
@@ -22241,7 +22241,7 @@
           <p:cNvPr id="23" name="">
             <a:extLst xmlns:a="http://schemas.openxmlformats.org/drawingml/2006/main">
               <a:ext uri="{FF2B5EF4-FFF2-40B4-BE49-F238E27FC236}">
-                <a16:creationId xmlns:a16="http://schemas.microsoft.com/office/drawing/2014/main" id="{8809B0ED-B1B2-489E-AF95-DF75D5DB6C8F}"/>
+                <a16:creationId xmlns:a16="http://schemas.microsoft.com/office/drawing/2014/main" id="{29FF0EA9-C58D-4D82-A23A-935C475CBC17}"/>
               </a:ext>
             </a:extLst>
           </p:cNvPr>
@@ -22299,7 +22299,7 @@
           <p:cNvPr id="24" name="">
             <a:extLst xmlns:a="http://schemas.openxmlformats.org/drawingml/2006/main">
               <a:ext uri="{FF2B5EF4-FFF2-40B4-BE49-F238E27FC236}">
-                <a16:creationId xmlns:a16="http://schemas.microsoft.com/office/drawing/2014/main" id="{072D31B8-5D26-4F50-A4EE-7F33E5E02B5A}"/>
+                <a16:creationId xmlns:a16="http://schemas.microsoft.com/office/drawing/2014/main" id="{FCDB3D6B-2EF6-40CB-8FC2-CF4725C06B51}"/>
               </a:ext>
             </a:extLst>
           </p:cNvPr>
@@ -22332,7 +22332,7 @@
           <p:cNvPr id="25" name="">
             <a:extLst xmlns:a="http://schemas.openxmlformats.org/drawingml/2006/main">
               <a:ext uri="{FF2B5EF4-FFF2-40B4-BE49-F238E27FC236}">
-                <a16:creationId xmlns:a16="http://schemas.microsoft.com/office/drawing/2014/main" id="{46AEA1BF-D91F-43C6-A016-821A5F601164}"/>
+                <a16:creationId xmlns:a16="http://schemas.microsoft.com/office/drawing/2014/main" id="{D3ABEBB3-23A3-4BCB-871A-CB51F13C5EF1}"/>
               </a:ext>
             </a:extLst>
           </p:cNvPr>
@@ -22390,7 +22390,7 @@
           <p:cNvPr id="26" name="">
             <a:extLst xmlns:a="http://schemas.openxmlformats.org/drawingml/2006/main">
               <a:ext uri="{FF2B5EF4-FFF2-40B4-BE49-F238E27FC236}">
-                <a16:creationId xmlns:a16="http://schemas.microsoft.com/office/drawing/2014/main" id="{51D02047-8BD9-4FB5-B18E-94C80D7CE058}"/>
+                <a16:creationId xmlns:a16="http://schemas.microsoft.com/office/drawing/2014/main" id="{D53B326D-4FA5-49D5-B4C6-AE97906E6533}"/>
               </a:ext>
             </a:extLst>
           </p:cNvPr>
@@ -22471,7 +22471,7 @@
           <p:cNvPr id="27" name="">
             <a:extLst xmlns:a="http://schemas.openxmlformats.org/drawingml/2006/main">
               <a:ext uri="{FF2B5EF4-FFF2-40B4-BE49-F238E27FC236}">
-                <a16:creationId xmlns:a16="http://schemas.microsoft.com/office/drawing/2014/main" id="{4300B5FE-D735-48B6-B006-32792BB2E001}"/>
+                <a16:creationId xmlns:a16="http://schemas.microsoft.com/office/drawing/2014/main" id="{2D6A0E21-7F2D-4393-AD51-712CFE1B422B}"/>
               </a:ext>
             </a:extLst>
           </p:cNvPr>
@@ -22506,7 +22506,7 @@
           <p:cNvPr id="28" name="">
             <a:extLst xmlns:a="http://schemas.openxmlformats.org/drawingml/2006/main">
               <a:ext uri="{FF2B5EF4-FFF2-40B4-BE49-F238E27FC236}">
-                <a16:creationId xmlns:a16="http://schemas.microsoft.com/office/drawing/2014/main" id="{1E6211A0-1992-4EB9-8884-AA59FE9E86AB}"/>
+                <a16:creationId xmlns:a16="http://schemas.microsoft.com/office/drawing/2014/main" id="{B7AFF750-C797-4A03-AE82-DEAFDC7D5F24}"/>
               </a:ext>
             </a:extLst>
           </p:cNvPr>
@@ -22564,7 +22564,7 @@
           <p:cNvPr id="29" name="">
             <a:extLst xmlns:a="http://schemas.openxmlformats.org/drawingml/2006/main">
               <a:ext uri="{FF2B5EF4-FFF2-40B4-BE49-F238E27FC236}">
-                <a16:creationId xmlns:a16="http://schemas.microsoft.com/office/drawing/2014/main" id="{B062384A-980D-4EE4-8835-2E2EA8B2CD3B}"/>
+                <a16:creationId xmlns:a16="http://schemas.microsoft.com/office/drawing/2014/main" id="{CB1326B5-ACAF-4A0C-BC24-B711194A3A5E}"/>
               </a:ext>
             </a:extLst>
           </p:cNvPr>
@@ -22622,7 +22622,7 @@
           <p:cNvPr id="30" name="">
             <a:extLst xmlns:a="http://schemas.openxmlformats.org/drawingml/2006/main">
               <a:ext uri="{FF2B5EF4-FFF2-40B4-BE49-F238E27FC236}">
-                <a16:creationId xmlns:a16="http://schemas.microsoft.com/office/drawing/2014/main" id="{F7E43C5D-22AD-416B-ADC2-6C4D682C61B5}"/>
+                <a16:creationId xmlns:a16="http://schemas.microsoft.com/office/drawing/2014/main" id="{250E04DE-B433-422C-96D3-372680705A87}"/>
               </a:ext>
             </a:extLst>
           </p:cNvPr>
@@ -22680,7 +22680,7 @@
           <p:cNvPr id="31" name="">
             <a:extLst xmlns:a="http://schemas.openxmlformats.org/drawingml/2006/main">
               <a:ext uri="{FF2B5EF4-FFF2-40B4-BE49-F238E27FC236}">
-                <a16:creationId xmlns:a16="http://schemas.microsoft.com/office/drawing/2014/main" id="{8FB82B90-9D7E-44AC-889A-7025EDF1E1AD}"/>
+                <a16:creationId xmlns:a16="http://schemas.microsoft.com/office/drawing/2014/main" id="{2F9E711E-E704-4635-A99B-E3C4E7BB22AC}"/>
               </a:ext>
             </a:extLst>
           </p:cNvPr>
@@ -22715,7 +22715,7 @@
           <p:cNvPr id="32" name="">
             <a:extLst xmlns:a="http://schemas.openxmlformats.org/drawingml/2006/main">
               <a:ext uri="{FF2B5EF4-FFF2-40B4-BE49-F238E27FC236}">
-                <a16:creationId xmlns:a16="http://schemas.microsoft.com/office/drawing/2014/main" id="{2573B335-4E6C-460B-85AC-10FEF56D300E}"/>
+                <a16:creationId xmlns:a16="http://schemas.microsoft.com/office/drawing/2014/main" id="{E4B6A64B-505D-44AC-9E4A-ADD6D500F769}"/>
               </a:ext>
             </a:extLst>
           </p:cNvPr>
@@ -22773,7 +22773,7 @@
           <p:cNvPr id="33" name="">
             <a:extLst xmlns:a="http://schemas.openxmlformats.org/drawingml/2006/main">
               <a:ext uri="{FF2B5EF4-FFF2-40B4-BE49-F238E27FC236}">
-                <a16:creationId xmlns:a16="http://schemas.microsoft.com/office/drawing/2014/main" id="{CB175A54-77E5-4029-8AD7-C081C7D332CB}"/>
+                <a16:creationId xmlns:a16="http://schemas.microsoft.com/office/drawing/2014/main" id="{D2E958B0-0BD2-4D44-904F-C567785234BA}"/>
               </a:ext>
             </a:extLst>
           </p:cNvPr>
@@ -22831,7 +22831,7 @@
           <p:cNvPr id="34" name="">
             <a:extLst xmlns:a="http://schemas.openxmlformats.org/drawingml/2006/main">
               <a:ext uri="{FF2B5EF4-FFF2-40B4-BE49-F238E27FC236}">
-                <a16:creationId xmlns:a16="http://schemas.microsoft.com/office/drawing/2014/main" id="{ECF3A904-D5CB-4F1A-83AF-1BA9DF6B9C6C}"/>
+                <a16:creationId xmlns:a16="http://schemas.microsoft.com/office/drawing/2014/main" id="{04862FFA-5F01-46A6-8834-E977206CDD68}"/>
               </a:ext>
             </a:extLst>
           </p:cNvPr>
@@ -22889,7 +22889,7 @@
           <p:cNvPr id="35" name="">
             <a:extLst xmlns:a="http://schemas.openxmlformats.org/drawingml/2006/main">
               <a:ext uri="{FF2B5EF4-FFF2-40B4-BE49-F238E27FC236}">
-                <a16:creationId xmlns:a16="http://schemas.microsoft.com/office/drawing/2014/main" id="{5055CDE9-7CFF-45D2-9F58-08D579EC79E7}"/>
+                <a16:creationId xmlns:a16="http://schemas.microsoft.com/office/drawing/2014/main" id="{62F7DC28-0670-4589-B73C-E8ECB32FD859}"/>
               </a:ext>
             </a:extLst>
           </p:cNvPr>
@@ -22924,7 +22924,7 @@
           <p:cNvPr id="36" name="">
             <a:extLst xmlns:a="http://schemas.openxmlformats.org/drawingml/2006/main">
               <a:ext uri="{FF2B5EF4-FFF2-40B4-BE49-F238E27FC236}">
-                <a16:creationId xmlns:a16="http://schemas.microsoft.com/office/drawing/2014/main" id="{C8618362-7719-42FB-831F-5E2BDB72C85C}"/>
+                <a16:creationId xmlns:a16="http://schemas.microsoft.com/office/drawing/2014/main" id="{D1E22B08-32AA-4296-80CD-6C9E74FE56BC}"/>
               </a:ext>
             </a:extLst>
           </p:cNvPr>
@@ -22982,7 +22982,7 @@
           <p:cNvPr id="37" name="">
             <a:extLst xmlns:a="http://schemas.openxmlformats.org/drawingml/2006/main">
               <a:ext uri="{FF2B5EF4-FFF2-40B4-BE49-F238E27FC236}">
-                <a16:creationId xmlns:a16="http://schemas.microsoft.com/office/drawing/2014/main" id="{8AC1C5EB-CBC8-449D-9EE3-C83954CE8986}"/>
+                <a16:creationId xmlns:a16="http://schemas.microsoft.com/office/drawing/2014/main" id="{3E27E1AA-15D3-4A30-8DE7-DBA81CFCE4CA}"/>
               </a:ext>
             </a:extLst>
           </p:cNvPr>
@@ -23040,7 +23040,7 @@
           <p:cNvPr id="38" name="">
             <a:extLst xmlns:a="http://schemas.openxmlformats.org/drawingml/2006/main">
               <a:ext uri="{FF2B5EF4-FFF2-40B4-BE49-F238E27FC236}">
-                <a16:creationId xmlns:a16="http://schemas.microsoft.com/office/drawing/2014/main" id="{50FFE186-9182-4008-8439-702C5A2B5F46}"/>
+                <a16:creationId xmlns:a16="http://schemas.microsoft.com/office/drawing/2014/main" id="{DB7A68A1-F2D7-4704-B110-B2388C46ACC0}"/>
               </a:ext>
             </a:extLst>
           </p:cNvPr>
@@ -23096,7 +23096,7 @@
     </p:spTree>
     <p:extLst>
       <p:ext uri="{BB962C8B-B14F-4D97-AF65-F5344CB8AC3E}">
-        <p14:creationId xmlns:p14="http://schemas.microsoft.com/office/powerpoint/2010/main" val="572969673"/>
+        <p14:creationId xmlns:p14="http://schemas.microsoft.com/office/powerpoint/2010/main" val="1086078909"/>
       </p:ext>
     </p:extLst>
   </p:cSld>
@@ -23127,7 +23127,7 @@
           <p:cNvPr id="37" name="">
             <a:extLst xmlns:a="http://schemas.openxmlformats.org/drawingml/2006/main">
               <a:ext uri="{FF2B5EF4-FFF2-40B4-BE49-F238E27FC236}">
-                <a16:creationId xmlns:a16="http://schemas.microsoft.com/office/drawing/2014/main" id="{428E794A-452A-4FBD-A983-CD6108D5D3DC}"/>
+                <a16:creationId xmlns:a16="http://schemas.microsoft.com/office/drawing/2014/main" id="{5C3ABF66-4C3A-4F05-90C7-89FD40DE0F34}"/>
               </a:ext>
             </a:extLst>
           </p:cNvPr>
@@ -23158,7 +23158,7 @@
           <p:cNvPr id="2" name="">
             <a:extLst xmlns:a="http://schemas.openxmlformats.org/drawingml/2006/main">
               <a:ext uri="{FF2B5EF4-FFF2-40B4-BE49-F238E27FC236}">
-                <a16:creationId xmlns:a16="http://schemas.microsoft.com/office/drawing/2014/main" id="{2648CF06-1A4D-4756-B345-B37DB2AD92B7}"/>
+                <a16:creationId xmlns:a16="http://schemas.microsoft.com/office/drawing/2014/main" id="{60104428-5CB0-405D-BA2A-7BC2D16C6468}"/>
               </a:ext>
             </a:extLst>
           </p:cNvPr>
@@ -23216,7 +23216,7 @@
           <p:cNvPr id="3" name="">
             <a:extLst xmlns:a="http://schemas.openxmlformats.org/drawingml/2006/main">
               <a:ext uri="{FF2B5EF4-FFF2-40B4-BE49-F238E27FC236}">
-                <a16:creationId xmlns:a16="http://schemas.microsoft.com/office/drawing/2014/main" id="{EEAC952C-DF84-468F-AA38-62635D413A5B}"/>
+                <a16:creationId xmlns:a16="http://schemas.microsoft.com/office/drawing/2014/main" id="{3B846762-D055-43DF-A65F-BCC557E211FC}"/>
               </a:ext>
             </a:extLst>
           </p:cNvPr>
@@ -23274,7 +23274,7 @@
           <p:cNvPr id="4" name="">
             <a:extLst xmlns:a="http://schemas.openxmlformats.org/drawingml/2006/main">
               <a:ext uri="{FF2B5EF4-FFF2-40B4-BE49-F238E27FC236}">
-                <a16:creationId xmlns:a16="http://schemas.microsoft.com/office/drawing/2014/main" id="{4865174D-6D26-418A-A792-73A563684EC2}"/>
+                <a16:creationId xmlns:a16="http://schemas.microsoft.com/office/drawing/2014/main" id="{0617C1D6-8C15-4527-9955-B7271A8F2A6B}"/>
               </a:ext>
             </a:extLst>
           </p:cNvPr>
@@ -23305,7 +23305,7 @@
           <p:cNvPr id="5" name="">
             <a:extLst xmlns:a="http://schemas.openxmlformats.org/drawingml/2006/main">
               <a:ext uri="{FF2B5EF4-FFF2-40B4-BE49-F238E27FC236}">
-                <a16:creationId xmlns:a16="http://schemas.microsoft.com/office/drawing/2014/main" id="{2BC2030C-0C83-4616-8C03-6E79E976DAB8}"/>
+                <a16:creationId xmlns:a16="http://schemas.microsoft.com/office/drawing/2014/main" id="{D1F10583-B264-41DE-88A2-184998AAE189}"/>
               </a:ext>
             </a:extLst>
           </p:cNvPr>
@@ -23363,7 +23363,7 @@
           <p:cNvPr id="6" name="">
             <a:extLst xmlns:a="http://schemas.openxmlformats.org/drawingml/2006/main">
               <a:ext uri="{FF2B5EF4-FFF2-40B4-BE49-F238E27FC236}">
-                <a16:creationId xmlns:a16="http://schemas.microsoft.com/office/drawing/2014/main" id="{0CF9D9D3-3727-40E6-B2F7-76554926A01D}"/>
+                <a16:creationId xmlns:a16="http://schemas.microsoft.com/office/drawing/2014/main" id="{AE41CA2E-AFB4-4CD4-8D5A-8207FDAABDE7}"/>
               </a:ext>
             </a:extLst>
           </p:cNvPr>
@@ -23421,7 +23421,7 @@
           <p:cNvPr id="7" name="">
             <a:extLst xmlns:a="http://schemas.openxmlformats.org/drawingml/2006/main">
               <a:ext uri="{FF2B5EF4-FFF2-40B4-BE49-F238E27FC236}">
-                <a16:creationId xmlns:a16="http://schemas.microsoft.com/office/drawing/2014/main" id="{9AC4DA3D-57B1-4BED-9E57-A97AE31D6EDE}"/>
+                <a16:creationId xmlns:a16="http://schemas.microsoft.com/office/drawing/2014/main" id="{A7E48C54-30DA-4426-9F9B-F4CDC2DF437E}"/>
               </a:ext>
             </a:extLst>
           </p:cNvPr>
@@ -23479,7 +23479,7 @@
           <p:cNvPr id="8" name="">
             <a:extLst xmlns:a="http://schemas.openxmlformats.org/drawingml/2006/main">
               <a:ext uri="{FF2B5EF4-FFF2-40B4-BE49-F238E27FC236}">
-                <a16:creationId xmlns:a16="http://schemas.microsoft.com/office/drawing/2014/main" id="{C951C210-652E-4E67-B67C-8EDC30E30652}"/>
+                <a16:creationId xmlns:a16="http://schemas.microsoft.com/office/drawing/2014/main" id="{9F819F7A-8403-4D8C-A46D-98140B2D7259}"/>
               </a:ext>
             </a:extLst>
           </p:cNvPr>
@@ -23514,7 +23514,7 @@
           <p:cNvPr id="9" name="">
             <a:extLst xmlns:a="http://schemas.openxmlformats.org/drawingml/2006/main">
               <a:ext uri="{FF2B5EF4-FFF2-40B4-BE49-F238E27FC236}">
-                <a16:creationId xmlns:a16="http://schemas.microsoft.com/office/drawing/2014/main" id="{11E1C65F-3300-4682-9A0A-C3BBE996638A}"/>
+                <a16:creationId xmlns:a16="http://schemas.microsoft.com/office/drawing/2014/main" id="{82929F4F-CBA3-4EF0-811E-CC83ACF5FD1D}"/>
               </a:ext>
             </a:extLst>
           </p:cNvPr>
@@ -23547,7 +23547,7 @@
           <p:cNvPr id="10" name="">
             <a:extLst xmlns:a="http://schemas.openxmlformats.org/drawingml/2006/main">
               <a:ext uri="{FF2B5EF4-FFF2-40B4-BE49-F238E27FC236}">
-                <a16:creationId xmlns:a16="http://schemas.microsoft.com/office/drawing/2014/main" id="{6456526E-CCFB-4541-BE69-3ED284BAFAD1}"/>
+                <a16:creationId xmlns:a16="http://schemas.microsoft.com/office/drawing/2014/main" id="{436D8740-5EE8-4BB3-B1C0-3F02BD2608F5}"/>
               </a:ext>
             </a:extLst>
           </p:cNvPr>
@@ -23605,7 +23605,7 @@
           <p:cNvPr id="11" name="">
             <a:extLst xmlns:a="http://schemas.openxmlformats.org/drawingml/2006/main">
               <a:ext uri="{FF2B5EF4-FFF2-40B4-BE49-F238E27FC236}">
-                <a16:creationId xmlns:a16="http://schemas.microsoft.com/office/drawing/2014/main" id="{C9EF0F12-93E6-47FF-966A-95F5AD5F5E88}"/>
+                <a16:creationId xmlns:a16="http://schemas.microsoft.com/office/drawing/2014/main" id="{40C569B8-2344-4056-95F2-526C89A9E248}"/>
               </a:ext>
             </a:extLst>
           </p:cNvPr>
@@ -23686,7 +23686,7 @@
           <p:cNvPr id="12" name="">
             <a:extLst xmlns:a="http://schemas.openxmlformats.org/drawingml/2006/main">
               <a:ext uri="{FF2B5EF4-FFF2-40B4-BE49-F238E27FC236}">
-                <a16:creationId xmlns:a16="http://schemas.microsoft.com/office/drawing/2014/main" id="{DF0C1DAE-E596-4D9E-828C-7E75924ED8AD}"/>
+                <a16:creationId xmlns:a16="http://schemas.microsoft.com/office/drawing/2014/main" id="{54CD37F9-1B24-4CA7-BB08-B49090105425}"/>
               </a:ext>
             </a:extLst>
           </p:cNvPr>
@@ -23721,7 +23721,7 @@
           <p:cNvPr id="13" name="">
             <a:extLst xmlns:a="http://schemas.openxmlformats.org/drawingml/2006/main">
               <a:ext uri="{FF2B5EF4-FFF2-40B4-BE49-F238E27FC236}">
-                <a16:creationId xmlns:a16="http://schemas.microsoft.com/office/drawing/2014/main" id="{5B4DF31C-526E-413B-BBBF-6DBC8A79B6AB}"/>
+                <a16:creationId xmlns:a16="http://schemas.microsoft.com/office/drawing/2014/main" id="{A73361AF-7546-4734-8237-A2734FD6555A}"/>
               </a:ext>
             </a:extLst>
           </p:cNvPr>
@@ -23754,7 +23754,7 @@
           <p:cNvPr id="14" name="">
             <a:extLst xmlns:a="http://schemas.openxmlformats.org/drawingml/2006/main">
               <a:ext uri="{FF2B5EF4-FFF2-40B4-BE49-F238E27FC236}">
-                <a16:creationId xmlns:a16="http://schemas.microsoft.com/office/drawing/2014/main" id="{E8CAE275-39ED-45EB-81D0-21B2571B5B96}"/>
+                <a16:creationId xmlns:a16="http://schemas.microsoft.com/office/drawing/2014/main" id="{21FF68E0-53F0-434E-B5E4-1B6523EEBAD1}"/>
               </a:ext>
             </a:extLst>
           </p:cNvPr>
@@ -23812,7 +23812,7 @@
           <p:cNvPr id="15" name="">
             <a:extLst xmlns:a="http://schemas.openxmlformats.org/drawingml/2006/main">
               <a:ext uri="{FF2B5EF4-FFF2-40B4-BE49-F238E27FC236}">
-                <a16:creationId xmlns:a16="http://schemas.microsoft.com/office/drawing/2014/main" id="{1FD3F21E-BD73-46C3-84D1-07533D64A8CE}"/>
+                <a16:creationId xmlns:a16="http://schemas.microsoft.com/office/drawing/2014/main" id="{76585B1A-3A7F-4FA6-BF38-AFD0C842D96F}"/>
               </a:ext>
             </a:extLst>
           </p:cNvPr>
@@ -23893,7 +23893,7 @@
           <p:cNvPr id="16" name="">
             <a:extLst xmlns:a="http://schemas.openxmlformats.org/drawingml/2006/main">
               <a:ext uri="{FF2B5EF4-FFF2-40B4-BE49-F238E27FC236}">
-                <a16:creationId xmlns:a16="http://schemas.microsoft.com/office/drawing/2014/main" id="{B1669EE7-2F4C-4FE3-83C1-05E3798EB76C}"/>
+                <a16:creationId xmlns:a16="http://schemas.microsoft.com/office/drawing/2014/main" id="{BAAE0AC0-10E0-4C2B-84A1-CE1715ED1A2A}"/>
               </a:ext>
             </a:extLst>
           </p:cNvPr>
@@ -23951,7 +23951,7 @@
           <p:cNvPr id="17" name="">
             <a:extLst xmlns:a="http://schemas.openxmlformats.org/drawingml/2006/main">
               <a:ext uri="{FF2B5EF4-FFF2-40B4-BE49-F238E27FC236}">
-                <a16:creationId xmlns:a16="http://schemas.microsoft.com/office/drawing/2014/main" id="{FB40FA59-9336-4567-91B7-E71B35653A28}"/>
+                <a16:creationId xmlns:a16="http://schemas.microsoft.com/office/drawing/2014/main" id="{73739B5A-9C89-4A6C-8520-512E0426FE21}"/>
               </a:ext>
             </a:extLst>
           </p:cNvPr>
@@ -24009,7 +24009,7 @@
           <p:cNvPr id="18" name="">
             <a:extLst xmlns:a="http://schemas.openxmlformats.org/drawingml/2006/main">
               <a:ext uri="{FF2B5EF4-FFF2-40B4-BE49-F238E27FC236}">
-                <a16:creationId xmlns:a16="http://schemas.microsoft.com/office/drawing/2014/main" id="{CA757DFA-73B3-4DC3-977D-3574CF845760}"/>
+                <a16:creationId xmlns:a16="http://schemas.microsoft.com/office/drawing/2014/main" id="{38A46DD7-335B-4E16-92C9-7932F99C6C57}"/>
               </a:ext>
             </a:extLst>
           </p:cNvPr>
@@ -24067,7 +24067,7 @@
           <p:cNvPr id="19" name="">
             <a:extLst xmlns:a="http://schemas.openxmlformats.org/drawingml/2006/main">
               <a:ext uri="{FF2B5EF4-FFF2-40B4-BE49-F238E27FC236}">
-                <a16:creationId xmlns:a16="http://schemas.microsoft.com/office/drawing/2014/main" id="{92787C41-9274-4444-B77F-05A0D16B1CC2}"/>
+                <a16:creationId xmlns:a16="http://schemas.microsoft.com/office/drawing/2014/main" id="{DA85F2CC-E377-401D-A8DD-D1CE55F67B33}"/>
               </a:ext>
             </a:extLst>
           </p:cNvPr>
@@ -24098,7 +24098,7 @@
           <p:cNvPr id="20" name="">
             <a:extLst xmlns:a="http://schemas.openxmlformats.org/drawingml/2006/main">
               <a:ext uri="{FF2B5EF4-FFF2-40B4-BE49-F238E27FC236}">
-                <a16:creationId xmlns:a16="http://schemas.microsoft.com/office/drawing/2014/main" id="{836BDABB-E2FD-4C46-8593-DE15E61EDAF4}"/>
+                <a16:creationId xmlns:a16="http://schemas.microsoft.com/office/drawing/2014/main" id="{D6BB62FA-2F1A-486E-975C-698A2595E41D}"/>
               </a:ext>
             </a:extLst>
           </p:cNvPr>
@@ -24133,7 +24133,7 @@
           <p:cNvPr id="21" name="">
             <a:extLst xmlns:a="http://schemas.openxmlformats.org/drawingml/2006/main">
               <a:ext uri="{FF2B5EF4-FFF2-40B4-BE49-F238E27FC236}">
-                <a16:creationId xmlns:a16="http://schemas.microsoft.com/office/drawing/2014/main" id="{9F388383-EC00-43B7-8BBD-F7C1982CD377}"/>
+                <a16:creationId xmlns:a16="http://schemas.microsoft.com/office/drawing/2014/main" id="{E1089C67-EDC3-4A1F-A7B0-54766F47A74E}"/>
               </a:ext>
             </a:extLst>
           </p:cNvPr>
@@ -24164,7 +24164,7 @@
           <p:cNvPr id="22" name="">
             <a:extLst xmlns:a="http://schemas.openxmlformats.org/drawingml/2006/main">
               <a:ext uri="{FF2B5EF4-FFF2-40B4-BE49-F238E27FC236}">
-                <a16:creationId xmlns:a16="http://schemas.microsoft.com/office/drawing/2014/main" id="{5F1E6959-1CC1-4782-9D83-259527C04125}"/>
+                <a16:creationId xmlns:a16="http://schemas.microsoft.com/office/drawing/2014/main" id="{30E7F966-DF82-462B-92B7-A43E3BA83559}"/>
               </a:ext>
             </a:extLst>
           </p:cNvPr>
@@ -24222,7 +24222,7 @@
           <p:cNvPr id="23" name="">
             <a:extLst xmlns:a="http://schemas.openxmlformats.org/drawingml/2006/main">
               <a:ext uri="{FF2B5EF4-FFF2-40B4-BE49-F238E27FC236}">
-                <a16:creationId xmlns:a16="http://schemas.microsoft.com/office/drawing/2014/main" id="{DE8D283C-10BD-44C0-B768-57E584328DBB}"/>
+                <a16:creationId xmlns:a16="http://schemas.microsoft.com/office/drawing/2014/main" id="{F8EAB5CA-5051-4A22-8806-D69AD8095FE5}"/>
               </a:ext>
             </a:extLst>
           </p:cNvPr>
@@ -24280,7 +24280,7 @@
           <p:cNvPr id="24" name="">
             <a:extLst xmlns:a="http://schemas.openxmlformats.org/drawingml/2006/main">
               <a:ext uri="{FF2B5EF4-FFF2-40B4-BE49-F238E27FC236}">
-                <a16:creationId xmlns:a16="http://schemas.microsoft.com/office/drawing/2014/main" id="{C361A1D0-9217-44A0-B4DD-5166082D2A89}"/>
+                <a16:creationId xmlns:a16="http://schemas.microsoft.com/office/drawing/2014/main" id="{633387EE-C19B-4E9F-A355-2B7C0E54F220}"/>
               </a:ext>
             </a:extLst>
           </p:cNvPr>
@@ -24315,7 +24315,7 @@
           <p:cNvPr id="25" name="">
             <a:extLst xmlns:a="http://schemas.openxmlformats.org/drawingml/2006/main">
               <a:ext uri="{FF2B5EF4-FFF2-40B4-BE49-F238E27FC236}">
-                <a16:creationId xmlns:a16="http://schemas.microsoft.com/office/drawing/2014/main" id="{8FC54C92-1B12-4BEE-B35F-6CA255FA060D}"/>
+                <a16:creationId xmlns:a16="http://schemas.microsoft.com/office/drawing/2014/main" id="{43548006-1665-4739-B889-8BFBC0F96676}"/>
               </a:ext>
             </a:extLst>
           </p:cNvPr>
@@ -24346,7 +24346,7 @@
           <p:cNvPr id="26" name="">
             <a:extLst xmlns:a="http://schemas.openxmlformats.org/drawingml/2006/main">
               <a:ext uri="{FF2B5EF4-FFF2-40B4-BE49-F238E27FC236}">
-                <a16:creationId xmlns:a16="http://schemas.microsoft.com/office/drawing/2014/main" id="{0D619F54-E185-4A40-992A-6CA825A148FB}"/>
+                <a16:creationId xmlns:a16="http://schemas.microsoft.com/office/drawing/2014/main" id="{8F834FD5-B7F5-4B38-831D-134556354241}"/>
               </a:ext>
             </a:extLst>
           </p:cNvPr>
@@ -24404,7 +24404,7 @@
           <p:cNvPr id="27" name="">
             <a:extLst xmlns:a="http://schemas.openxmlformats.org/drawingml/2006/main">
               <a:ext uri="{FF2B5EF4-FFF2-40B4-BE49-F238E27FC236}">
-                <a16:creationId xmlns:a16="http://schemas.microsoft.com/office/drawing/2014/main" id="{7CC92595-4EFE-40D4-8368-428A3BC592BD}"/>
+                <a16:creationId xmlns:a16="http://schemas.microsoft.com/office/drawing/2014/main" id="{B985B28E-1304-4C4D-BE31-C1C7AD0D3F17}"/>
               </a:ext>
             </a:extLst>
           </p:cNvPr>
@@ -24462,7 +24462,7 @@
           <p:cNvPr id="28" name="">
             <a:extLst xmlns:a="http://schemas.openxmlformats.org/drawingml/2006/main">
               <a:ext uri="{FF2B5EF4-FFF2-40B4-BE49-F238E27FC236}">
-                <a16:creationId xmlns:a16="http://schemas.microsoft.com/office/drawing/2014/main" id="{AC680E8D-79D0-4648-974F-F01769580A83}"/>
+                <a16:creationId xmlns:a16="http://schemas.microsoft.com/office/drawing/2014/main" id="{61B6E8DF-252A-4866-8B62-64931025794A}"/>
               </a:ext>
             </a:extLst>
           </p:cNvPr>
@@ -24497,7 +24497,7 @@
           <p:cNvPr id="29" name="">
             <a:extLst xmlns:a="http://schemas.openxmlformats.org/drawingml/2006/main">
               <a:ext uri="{FF2B5EF4-FFF2-40B4-BE49-F238E27FC236}">
-                <a16:creationId xmlns:a16="http://schemas.microsoft.com/office/drawing/2014/main" id="{E043208D-431D-48A6-A89D-E40D80169B8F}"/>
+                <a16:creationId xmlns:a16="http://schemas.microsoft.com/office/drawing/2014/main" id="{1B8A145F-28E9-4E73-AB3F-82F6F472455B}"/>
               </a:ext>
             </a:extLst>
           </p:cNvPr>
@@ -24528,7 +24528,7 @@
           <p:cNvPr id="30" name="">
             <a:extLst xmlns:a="http://schemas.openxmlformats.org/drawingml/2006/main">
               <a:ext uri="{FF2B5EF4-FFF2-40B4-BE49-F238E27FC236}">
-                <a16:creationId xmlns:a16="http://schemas.microsoft.com/office/drawing/2014/main" id="{4AE7E9F6-A242-4CDB-9982-920B620C25B2}"/>
+                <a16:creationId xmlns:a16="http://schemas.microsoft.com/office/drawing/2014/main" id="{85E5385F-C2C9-42C8-9A1A-211FE633D294}"/>
               </a:ext>
             </a:extLst>
           </p:cNvPr>
@@ -24586,7 +24586,7 @@
           <p:cNvPr id="31" name="">
             <a:extLst xmlns:a="http://schemas.openxmlformats.org/drawingml/2006/main">
               <a:ext uri="{FF2B5EF4-FFF2-40B4-BE49-F238E27FC236}">
-                <a16:creationId xmlns:a16="http://schemas.microsoft.com/office/drawing/2014/main" id="{3E93B85B-E0D3-4D7D-9ADC-1B0E4878AE67}"/>
+                <a16:creationId xmlns:a16="http://schemas.microsoft.com/office/drawing/2014/main" id="{2B59376A-EEDE-43DD-AD70-1746D7148139}"/>
               </a:ext>
             </a:extLst>
           </p:cNvPr>
@@ -24644,7 +24644,7 @@
           <p:cNvPr id="32" name="">
             <a:extLst xmlns:a="http://schemas.openxmlformats.org/drawingml/2006/main">
               <a:ext uri="{FF2B5EF4-FFF2-40B4-BE49-F238E27FC236}">
-                <a16:creationId xmlns:a16="http://schemas.microsoft.com/office/drawing/2014/main" id="{3AFF9524-2D37-4370-903B-362A825C8807}"/>
+                <a16:creationId xmlns:a16="http://schemas.microsoft.com/office/drawing/2014/main" id="{816F5C80-586C-46F1-AAB7-3437ABA17A29}"/>
               </a:ext>
             </a:extLst>
           </p:cNvPr>
@@ -24679,7 +24679,7 @@
           <p:cNvPr id="33" name="">
             <a:extLst xmlns:a="http://schemas.openxmlformats.org/drawingml/2006/main">
               <a:ext uri="{FF2B5EF4-FFF2-40B4-BE49-F238E27FC236}">
-                <a16:creationId xmlns:a16="http://schemas.microsoft.com/office/drawing/2014/main" id="{6EB37278-EFB5-44D6-9173-77EC8DB3BAA8}"/>
+                <a16:creationId xmlns:a16="http://schemas.microsoft.com/office/drawing/2014/main" id="{4E79B527-7B92-41CC-85DC-B122431B63B6}"/>
               </a:ext>
             </a:extLst>
           </p:cNvPr>
@@ -24710,7 +24710,7 @@
           <p:cNvPr id="34" name="">
             <a:extLst xmlns:a="http://schemas.openxmlformats.org/drawingml/2006/main">
               <a:ext uri="{FF2B5EF4-FFF2-40B4-BE49-F238E27FC236}">
-                <a16:creationId xmlns:a16="http://schemas.microsoft.com/office/drawing/2014/main" id="{826228D1-0549-4E09-BBD5-18F74C273567}"/>
+                <a16:creationId xmlns:a16="http://schemas.microsoft.com/office/drawing/2014/main" id="{2D8FCD79-97F5-4187-A7EC-7003AD0F8B25}"/>
               </a:ext>
             </a:extLst>
           </p:cNvPr>
@@ -24768,7 +24768,7 @@
           <p:cNvPr id="35" name="">
             <a:extLst xmlns:a="http://schemas.openxmlformats.org/drawingml/2006/main">
               <a:ext uri="{FF2B5EF4-FFF2-40B4-BE49-F238E27FC236}">
-                <a16:creationId xmlns:a16="http://schemas.microsoft.com/office/drawing/2014/main" id="{3416417D-A64F-4038-A460-87DC8DF081D8}"/>
+                <a16:creationId xmlns:a16="http://schemas.microsoft.com/office/drawing/2014/main" id="{6F2810B2-93D0-44FA-BB9E-9E944DB2C97C}"/>
               </a:ext>
             </a:extLst>
           </p:cNvPr>
@@ -24826,7 +24826,7 @@
           <p:cNvPr id="36" name="">
             <a:extLst xmlns:a="http://schemas.openxmlformats.org/drawingml/2006/main">
               <a:ext uri="{FF2B5EF4-FFF2-40B4-BE49-F238E27FC236}">
-                <a16:creationId xmlns:a16="http://schemas.microsoft.com/office/drawing/2014/main" id="{036D64C7-6C95-4AC8-835E-4AAD3C2BB1AF}"/>
+                <a16:creationId xmlns:a16="http://schemas.microsoft.com/office/drawing/2014/main" id="{E17A171B-A1D6-4563-86A4-2ACBB7BDC40C}"/>
               </a:ext>
             </a:extLst>
           </p:cNvPr>
@@ -24882,7 +24882,7 @@
     </p:spTree>
     <p:extLst>
       <p:ext uri="{BB962C8B-B14F-4D97-AF65-F5344CB8AC3E}">
-        <p14:creationId xmlns:p14="http://schemas.microsoft.com/office/powerpoint/2010/main" val="987719877"/>
+        <p14:creationId xmlns:p14="http://schemas.microsoft.com/office/powerpoint/2010/main" val="1957083381"/>
       </p:ext>
     </p:extLst>
   </p:cSld>
